--- a/media/exports/reports/2026-09/funding.pptx
+++ b/media/exports/reports/2026-09/funding.pptx
@@ -272,7 +272,9 @@
     <a:lstStyle/>
     <a:p>
       <a:pPr>
-        <a:defRPr sz="1800"/>
+        <a:defRPr sz="1800">
+          <a:latin typeface="Roboto"/>
+        </a:defRPr>
       </a:pPr>
       <a:endParaRPr lang="en-US"/>
     </a:p>
@@ -568,7 +570,9 @@
     <a:lstStyle/>
     <a:p>
       <a:pPr>
-        <a:defRPr sz="1800"/>
+        <a:defRPr sz="1800">
+          <a:latin typeface="Roboto"/>
+        </a:defRPr>
       </a:pPr>
       <a:endParaRPr/>
     </a:p>
@@ -864,7 +868,9 @@
     <a:lstStyle/>
     <a:p>
       <a:pPr>
-        <a:defRPr sz="1800"/>
+        <a:defRPr sz="1800">
+          <a:latin typeface="Roboto"/>
+        </a:defRPr>
       </a:pPr>
       <a:endParaRPr/>
     </a:p>
@@ -3895,11 +3901,17 @@
           <a:bodyPr rtlCol="0" anchor="ctr"/>
           <a:lstStyle/>
           <a:p>
+            <a:pPr>
+              <a:defRPr>
+                <a:latin typeface="Roboto"/>
+              </a:defRPr>
+            </a:pPr>
             <a:r>
               <a:rPr sz="1600" b="1">
                 <a:solidFill>
                   <a:srgbClr val="FFFFFF"/>
                 </a:solidFill>
+                <a:latin typeface="Roboto"/>
               </a:rPr>
               <a:t>4th</a:t>
             </a:r>
@@ -3928,14 +3940,19 @@
           </a:bodyPr>
           <a:lstStyle/>
           <a:p>
+            <a:pPr>
+              <a:defRPr>
+                <a:latin typeface="Roboto"/>
+              </a:defRPr>
+            </a:pPr>
             <a:r>
               <a:rPr sz="1800" b="1">
                 <a:solidFill>
                   <a:srgbClr val="25342A"/>
                 </a:solidFill>
-                <a:latin typeface="Arial"/>
+                <a:latin typeface="Roboto"/>
               </a:rPr>
-              <a:t>The 4th Sheet</a:t>
+              <a:t>The Fourth Sheet</a:t>
             </a:r>
           </a:p>
         </p:txBody>
@@ -3962,12 +3979,17 @@
           </a:bodyPr>
           <a:lstStyle/>
           <a:p>
+            <a:pPr>
+              <a:defRPr>
+                <a:latin typeface="Roboto"/>
+              </a:defRPr>
+            </a:pPr>
             <a:r>
               <a:rPr sz="1100" b="1">
                 <a:solidFill>
                   <a:srgbClr val="8A7A52"/>
                 </a:solidFill>
-                <a:latin typeface="Arial"/>
+                <a:latin typeface="Roboto"/>
               </a:rPr>
               <a:t>SAMPLE DATA · invented figures for demonstration</a:t>
             </a:r>
@@ -3996,12 +4018,17 @@
           </a:bodyPr>
           <a:lstStyle/>
           <a:p>
+            <a:pPr>
+              <a:defRPr>
+                <a:latin typeface="Roboto"/>
+              </a:defRPr>
+            </a:pPr>
             <a:r>
               <a:rPr sz="3400" b="1">
                 <a:solidFill>
                   <a:srgbClr val="25342A"/>
                 </a:solidFill>
-                <a:latin typeface="Arial"/>
+                <a:latin typeface="Roboto"/>
               </a:rPr>
               <a:t>Which funding is worth chasing?</a:t>
             </a:r>
@@ -4030,12 +4057,17 @@
           </a:bodyPr>
           <a:lstStyle/>
           <a:p>
+            <a:pPr>
+              <a:defRPr>
+                <a:latin typeface="Roboto"/>
+              </a:defRPr>
+            </a:pPr>
             <a:r>
               <a:rPr sz="1600" b="0">
                 <a:solidFill>
                   <a:srgbClr val="5F6F63"/>
                 </a:solidFill>
-                <a:latin typeface="Arial"/>
+                <a:latin typeface="Roboto"/>
               </a:rPr>
               <a:t>Sample Community Services Ltd</a:t>
             </a:r>
@@ -4064,12 +4096,17 @@
           </a:bodyPr>
           <a:lstStyle/>
           <a:p>
+            <a:pPr>
+              <a:defRPr>
+                <a:latin typeface="Roboto"/>
+              </a:defRPr>
+            </a:pPr>
             <a:r>
               <a:rPr sz="1400" b="0">
                 <a:solidFill>
                   <a:srgbClr val="25342A"/>
                 </a:solidFill>
-                <a:latin typeface="Arial"/>
+                <a:latin typeface="Roboto"/>
               </a:rPr>
               <a:t>Period: September 2026. Each source of money compared on what it raises and what it costs to raise. Pick a source and every chart, table row and note follows it.</a:t>
             </a:r>
@@ -4098,45 +4135,65 @@
           </a:bodyPr>
           <a:lstStyle/>
           <a:p>
+            <a:pPr>
+              <a:defRPr>
+                <a:latin typeface="Roboto"/>
+              </a:defRPr>
+            </a:pPr>
             <a:r>
               <a:rPr sz="1100" b="0">
                 <a:solidFill>
                   <a:srgbClr val="5F6F63"/>
                 </a:solidFill>
-                <a:latin typeface="Arial"/>
+                <a:latin typeface="Roboto"/>
               </a:rPr>
               <a:t>How final is this data?</a:t>
             </a:r>
           </a:p>
           <a:p>
+            <a:pPr>
+              <a:defRPr>
+                <a:latin typeface="Roboto"/>
+              </a:defRPr>
+            </a:pPr>
             <a:r>
               <a:rPr sz="1100" b="0">
                 <a:solidFill>
                   <a:srgbClr val="5F6F63"/>
                 </a:solidFill>
-                <a:latin typeface="Arial"/>
+                <a:latin typeface="Roboto"/>
               </a:rPr>
               <a:t>August 2026: Locked. August 2026 is locked (closed 2 Sep 2026). These numbers won't change.</a:t>
             </a:r>
           </a:p>
           <a:p>
+            <a:pPr>
+              <a:defRPr>
+                <a:latin typeface="Roboto"/>
+              </a:defRPr>
+            </a:pPr>
             <a:r>
               <a:rPr sz="1100" b="0">
                 <a:solidFill>
                   <a:srgbClr val="5F6F63"/>
                 </a:solidFill>
-                <a:latin typeface="Arial"/>
+                <a:latin typeface="Roboto"/>
               </a:rPr>
               <a:t>September 2026: Locked. September 2026 is locked (closed 2 Oct 2026). These numbers won't change.</a:t>
             </a:r>
           </a:p>
           <a:p>
+            <a:pPr>
+              <a:defRPr>
+                <a:latin typeface="Roboto"/>
+              </a:defRPr>
+            </a:pPr>
             <a:r>
               <a:rPr sz="1100" b="0">
                 <a:solidFill>
                   <a:srgbClr val="5F6F63"/>
                 </a:solidFill>
-                <a:latin typeface="Arial"/>
+                <a:latin typeface="Roboto"/>
               </a:rPr>
               <a:t>October 2026: Incomplete. October 2026 is still in progress: figures to 6 Oct only.</a:t>
             </a:r>
@@ -4165,12 +4222,17 @@
           </a:bodyPr>
           <a:lstStyle/>
           <a:p>
+            <a:pPr>
+              <a:defRPr>
+                <a:latin typeface="Roboto"/>
+              </a:defRPr>
+            </a:pPr>
             <a:r>
               <a:rPr sz="900" b="0">
                 <a:solidFill>
                   <a:srgbClr val="5F6F63"/>
                 </a:solidFill>
-                <a:latin typeface="Arial"/>
+                <a:latin typeface="Roboto"/>
               </a:rPr>
               <a:t>funding.pptx</a:t>
             </a:r>
@@ -4199,13 +4261,17 @@
           </a:bodyPr>
           <a:lstStyle/>
           <a:p>
-            <a:pPr algn="ctr"/>
+            <a:pPr algn="ctr">
+              <a:defRPr>
+                <a:latin typeface="Roboto"/>
+              </a:defRPr>
+            </a:pPr>
             <a:r>
               <a:rPr sz="900" b="0">
                 <a:solidFill>
                   <a:srgbClr val="5F6F63"/>
                 </a:solidFill>
-                <a:latin typeface="Arial"/>
+                <a:latin typeface="Roboto"/>
               </a:rPr>
               <a:t>Data retrieved 2pm, Tue 6 Oct 2026 · Sample data</a:t>
             </a:r>
@@ -4234,13 +4300,17 @@
           </a:bodyPr>
           <a:lstStyle/>
           <a:p>
-            <a:pPr algn="r"/>
+            <a:pPr algn="r">
+              <a:defRPr>
+                <a:latin typeface="Roboto"/>
+              </a:defRPr>
+            </a:pPr>
             <a:r>
               <a:rPr sz="900" b="0">
                 <a:solidFill>
                   <a:srgbClr val="5F6F63"/>
                 </a:solidFill>
-                <a:latin typeface="Arial"/>
+                <a:latin typeface="Roboto"/>
               </a:rPr>
               <a:t>Slide 1 of 9</a:t>
             </a:r>
@@ -4304,7 +4374,11 @@
           <a:bodyPr rtlCol="0" anchor="ctr"/>
           <a:lstStyle/>
           <a:p>
-            <a:pPr algn="ctr"/>
+            <a:pPr algn="ctr">
+              <a:defRPr>
+                <a:latin typeface="Roboto"/>
+              </a:defRPr>
+            </a:pPr>
           </a:p>
         </p:txBody>
       </p:sp>
@@ -4330,12 +4404,17 @@
           </a:bodyPr>
           <a:lstStyle/>
           <a:p>
+            <a:pPr>
+              <a:defRPr>
+                <a:latin typeface="Roboto"/>
+              </a:defRPr>
+            </a:pPr>
             <a:r>
               <a:rPr sz="1000" b="0">
                 <a:solidFill>
                   <a:srgbClr val="5F6F63"/>
                 </a:solidFill>
-                <a:latin typeface="Arial"/>
+                <a:latin typeface="Roboto"/>
               </a:rPr>
               <a:t>Sample Community Services Ltd · Which funding is worth chasing?</a:t>
             </a:r>
@@ -4364,12 +4443,17 @@
           </a:bodyPr>
           <a:lstStyle/>
           <a:p>
+            <a:pPr>
+              <a:defRPr>
+                <a:latin typeface="Roboto"/>
+              </a:defRPr>
+            </a:pPr>
             <a:r>
               <a:rPr sz="2400" b="1">
                 <a:solidFill>
                   <a:srgbClr val="25342A"/>
                 </a:solidFill>
-                <a:latin typeface="Arial"/>
+                <a:latin typeface="Roboto"/>
               </a:rPr>
               <a:t>Cost to raise a dollar, by source, September 2026 (cents) · Source: All sources</a:t>
             </a:r>
@@ -4416,12 +4500,17 @@
           </a:bodyPr>
           <a:lstStyle/>
           <a:p>
+            <a:pPr>
+              <a:defRPr>
+                <a:latin typeface="Roboto"/>
+              </a:defRPr>
+            </a:pPr>
             <a:r>
               <a:rPr sz="900" b="0">
                 <a:solidFill>
                   <a:srgbClr val="5F6F63"/>
                 </a:solidFill>
-                <a:latin typeface="Arial"/>
+                <a:latin typeface="Roboto"/>
               </a:rPr>
               <a:t>funding.pptx</a:t>
             </a:r>
@@ -4450,13 +4539,17 @@
           </a:bodyPr>
           <a:lstStyle/>
           <a:p>
-            <a:pPr algn="ctr"/>
+            <a:pPr algn="ctr">
+              <a:defRPr>
+                <a:latin typeface="Roboto"/>
+              </a:defRPr>
+            </a:pPr>
             <a:r>
               <a:rPr sz="900" b="0">
                 <a:solidFill>
                   <a:srgbClr val="5F6F63"/>
                 </a:solidFill>
-                <a:latin typeface="Arial"/>
+                <a:latin typeface="Roboto"/>
               </a:rPr>
               <a:t>Data retrieved 2pm, Tue 6 Oct 2026 · Sample data</a:t>
             </a:r>
@@ -4485,13 +4578,17 @@
           </a:bodyPr>
           <a:lstStyle/>
           <a:p>
-            <a:pPr algn="r"/>
+            <a:pPr algn="r">
+              <a:defRPr>
+                <a:latin typeface="Roboto"/>
+              </a:defRPr>
+            </a:pPr>
             <a:r>
               <a:rPr sz="900" b="0">
                 <a:solidFill>
                   <a:srgbClr val="5F6F63"/>
                 </a:solidFill>
-                <a:latin typeface="Arial"/>
+                <a:latin typeface="Roboto"/>
               </a:rPr>
               <a:t>Slide 2 of 9</a:t>
             </a:r>
@@ -4555,7 +4652,11 @@
           <a:bodyPr rtlCol="0" anchor="ctr"/>
           <a:lstStyle/>
           <a:p>
-            <a:pPr algn="ctr"/>
+            <a:pPr algn="ctr">
+              <a:defRPr>
+                <a:latin typeface="Roboto"/>
+              </a:defRPr>
+            </a:pPr>
           </a:p>
         </p:txBody>
       </p:sp>
@@ -4581,12 +4682,17 @@
           </a:bodyPr>
           <a:lstStyle/>
           <a:p>
+            <a:pPr>
+              <a:defRPr>
+                <a:latin typeface="Roboto"/>
+              </a:defRPr>
+            </a:pPr>
             <a:r>
               <a:rPr sz="1000" b="0">
                 <a:solidFill>
                   <a:srgbClr val="5F6F63"/>
                 </a:solidFill>
-                <a:latin typeface="Arial"/>
+                <a:latin typeface="Roboto"/>
               </a:rPr>
               <a:t>Sample Community Services Ltd · Which funding is worth chasing?</a:t>
             </a:r>
@@ -4615,12 +4721,17 @@
           </a:bodyPr>
           <a:lstStyle/>
           <a:p>
+            <a:pPr>
+              <a:defRPr>
+                <a:latin typeface="Roboto"/>
+              </a:defRPr>
+            </a:pPr>
             <a:r>
               <a:rPr sz="2400" b="1">
                 <a:solidFill>
                   <a:srgbClr val="25342A"/>
                 </a:solidFill>
-                <a:latin typeface="Arial"/>
+                <a:latin typeface="Roboto"/>
               </a:rPr>
               <a:t>What it shows · Source: All sources</a:t>
             </a:r>
@@ -4668,7 +4779,11 @@
           <a:bodyPr rtlCol="0" anchor="ctr"/>
           <a:lstStyle/>
           <a:p>
-            <a:pPr algn="ctr"/>
+            <a:pPr algn="ctr">
+              <a:defRPr>
+                <a:latin typeface="Roboto"/>
+              </a:defRPr>
+            </a:pPr>
           </a:p>
         </p:txBody>
       </p:sp>
@@ -4694,12 +4809,17 @@
           </a:bodyPr>
           <a:lstStyle/>
           <a:p>
+            <a:pPr>
+              <a:defRPr>
+                <a:latin typeface="Roboto"/>
+              </a:defRPr>
+            </a:pPr>
             <a:r>
               <a:rPr sz="1100" b="1">
                 <a:solidFill>
                   <a:srgbClr val="5F6F63"/>
                 </a:solidFill>
-                <a:latin typeface="Arial"/>
+                <a:latin typeface="Roboto"/>
               </a:rPr>
               <a:t>WHAT IT SHOWS</a:t>
             </a:r>
@@ -4728,12 +4848,17 @@
           </a:bodyPr>
           <a:lstStyle/>
           <a:p>
+            <a:pPr>
+              <a:defRPr>
+                <a:latin typeface="Roboto"/>
+              </a:defRPr>
+            </a:pPr>
             <a:r>
               <a:rPr sz="1600" b="0">
                 <a:solidFill>
                   <a:srgbClr val="25342A"/>
                 </a:solidFill>
-                <a:latin typeface="Arial"/>
+                <a:latin typeface="Roboto"/>
               </a:rPr>
               <a:t>In September it cost: Grants 9¢, donations 19¢ and fundraising events 41¢ to raise each dollar.</a:t>
             </a:r>
@@ -4781,7 +4906,11 @@
           <a:bodyPr rtlCol="0" anchor="ctr"/>
           <a:lstStyle/>
           <a:p>
-            <a:pPr algn="ctr"/>
+            <a:pPr algn="ctr">
+              <a:defRPr>
+                <a:latin typeface="Roboto"/>
+              </a:defRPr>
+            </a:pPr>
           </a:p>
         </p:txBody>
       </p:sp>
@@ -4807,12 +4936,17 @@
           </a:bodyPr>
           <a:lstStyle/>
           <a:p>
+            <a:pPr>
+              <a:defRPr>
+                <a:latin typeface="Roboto"/>
+              </a:defRPr>
+            </a:pPr>
             <a:r>
               <a:rPr sz="1100" b="1">
                 <a:solidFill>
                   <a:srgbClr val="5F6F63"/>
                 </a:solidFill>
-                <a:latin typeface="Arial"/>
+                <a:latin typeface="Roboto"/>
               </a:rPr>
               <a:t>WHAT YOU'D DO ABOUT IT</a:t>
             </a:r>
@@ -4841,12 +4975,17 @@
           </a:bodyPr>
           <a:lstStyle/>
           <a:p>
+            <a:pPr>
+              <a:defRPr>
+                <a:latin typeface="Roboto"/>
+              </a:defRPr>
+            </a:pPr>
             <a:r>
               <a:rPr sz="1600" b="0">
                 <a:solidFill>
                   <a:srgbClr val="25342A"/>
                 </a:solidFill>
-                <a:latin typeface="Arial"/>
+                <a:latin typeface="Roboto"/>
               </a:rPr>
               <a:t>Cheapest to raise in September: grants (9¢ a dollar). Dearest: fundraising events (41¢). Events are worth counting for what else they bring too (new donors, profile).</a:t>
             </a:r>
@@ -4875,12 +5014,17 @@
           </a:bodyPr>
           <a:lstStyle/>
           <a:p>
+            <a:pPr>
+              <a:defRPr>
+                <a:latin typeface="Roboto"/>
+              </a:defRPr>
+            </a:pPr>
             <a:r>
               <a:rPr sz="900" b="0">
                 <a:solidFill>
                   <a:srgbClr val="5F6F63"/>
                 </a:solidFill>
-                <a:latin typeface="Arial"/>
+                <a:latin typeface="Roboto"/>
               </a:rPr>
               <a:t>funding.pptx</a:t>
             </a:r>
@@ -4909,13 +5053,17 @@
           </a:bodyPr>
           <a:lstStyle/>
           <a:p>
-            <a:pPr algn="ctr"/>
+            <a:pPr algn="ctr">
+              <a:defRPr>
+                <a:latin typeface="Roboto"/>
+              </a:defRPr>
+            </a:pPr>
             <a:r>
               <a:rPr sz="900" b="0">
                 <a:solidFill>
                   <a:srgbClr val="5F6F63"/>
                 </a:solidFill>
-                <a:latin typeface="Arial"/>
+                <a:latin typeface="Roboto"/>
               </a:rPr>
               <a:t>Data retrieved 2pm, Tue 6 Oct 2026 · Sample data</a:t>
             </a:r>
@@ -4944,13 +5092,17 @@
           </a:bodyPr>
           <a:lstStyle/>
           <a:p>
-            <a:pPr algn="r"/>
+            <a:pPr algn="r">
+              <a:defRPr>
+                <a:latin typeface="Roboto"/>
+              </a:defRPr>
+            </a:pPr>
             <a:r>
               <a:rPr sz="900" b="0">
                 <a:solidFill>
                   <a:srgbClr val="5F6F63"/>
                 </a:solidFill>
-                <a:latin typeface="Arial"/>
+                <a:latin typeface="Roboto"/>
               </a:rPr>
               <a:t>Slide 3 of 9</a:t>
             </a:r>
@@ -5014,7 +5166,11 @@
           <a:bodyPr rtlCol="0" anchor="ctr"/>
           <a:lstStyle/>
           <a:p>
-            <a:pPr algn="ctr"/>
+            <a:pPr algn="ctr">
+              <a:defRPr>
+                <a:latin typeface="Roboto"/>
+              </a:defRPr>
+            </a:pPr>
           </a:p>
         </p:txBody>
       </p:sp>
@@ -5040,12 +5196,17 @@
           </a:bodyPr>
           <a:lstStyle/>
           <a:p>
+            <a:pPr>
+              <a:defRPr>
+                <a:latin typeface="Roboto"/>
+              </a:defRPr>
+            </a:pPr>
             <a:r>
               <a:rPr sz="1000" b="0">
                 <a:solidFill>
                   <a:srgbClr val="5F6F63"/>
                 </a:solidFill>
-                <a:latin typeface="Arial"/>
+                <a:latin typeface="Roboto"/>
               </a:rPr>
               <a:t>Sample Community Services Ltd · Which funding is worth chasing?</a:t>
             </a:r>
@@ -5074,12 +5235,17 @@
           </a:bodyPr>
           <a:lstStyle/>
           <a:p>
+            <a:pPr>
+              <a:defRPr>
+                <a:latin typeface="Roboto"/>
+              </a:defRPr>
+            </a:pPr>
             <a:r>
               <a:rPr sz="2400" b="1">
                 <a:solidFill>
                   <a:srgbClr val="25342A"/>
                 </a:solidFill>
-                <a:latin typeface="Arial"/>
+                <a:latin typeface="Roboto"/>
               </a:rPr>
               <a:t>What it shows · Source: Grants</a:t>
             </a:r>
@@ -5127,7 +5293,11 @@
           <a:bodyPr rtlCol="0" anchor="ctr"/>
           <a:lstStyle/>
           <a:p>
-            <a:pPr algn="ctr"/>
+            <a:pPr algn="ctr">
+              <a:defRPr>
+                <a:latin typeface="Roboto"/>
+              </a:defRPr>
+            </a:pPr>
           </a:p>
         </p:txBody>
       </p:sp>
@@ -5153,12 +5323,17 @@
           </a:bodyPr>
           <a:lstStyle/>
           <a:p>
+            <a:pPr>
+              <a:defRPr>
+                <a:latin typeface="Roboto"/>
+              </a:defRPr>
+            </a:pPr>
             <a:r>
               <a:rPr sz="1100" b="1">
                 <a:solidFill>
                   <a:srgbClr val="5F6F63"/>
                 </a:solidFill>
-                <a:latin typeface="Arial"/>
+                <a:latin typeface="Roboto"/>
               </a:rPr>
               <a:t>WHAT IT SHOWS</a:t>
             </a:r>
@@ -5187,12 +5362,17 @@
           </a:bodyPr>
           <a:lstStyle/>
           <a:p>
+            <a:pPr>
+              <a:defRPr>
+                <a:latin typeface="Roboto"/>
+              </a:defRPr>
+            </a:pPr>
             <a:r>
               <a:rPr sz="1600" b="0">
                 <a:solidFill>
                   <a:srgbClr val="25342A"/>
                 </a:solidFill>
-                <a:latin typeface="Arial"/>
+                <a:latin typeface="Roboto"/>
               </a:rPr>
               <a:t>Grants: $223,318 raised this financial year to date (68.6% of everything raised), $21,300 to raise it, so $202,018 left for programs: 10¢ per dollar.</a:t>
             </a:r>
@@ -5240,7 +5420,11 @@
           <a:bodyPr rtlCol="0" anchor="ctr"/>
           <a:lstStyle/>
           <a:p>
-            <a:pPr algn="ctr"/>
+            <a:pPr algn="ctr">
+              <a:defRPr>
+                <a:latin typeface="Roboto"/>
+              </a:defRPr>
+            </a:pPr>
           </a:p>
         </p:txBody>
       </p:sp>
@@ -5266,12 +5450,17 @@
           </a:bodyPr>
           <a:lstStyle/>
           <a:p>
+            <a:pPr>
+              <a:defRPr>
+                <a:latin typeface="Roboto"/>
+              </a:defRPr>
+            </a:pPr>
             <a:r>
               <a:rPr sz="1100" b="1">
                 <a:solidFill>
                   <a:srgbClr val="5F6F63"/>
                 </a:solidFill>
-                <a:latin typeface="Arial"/>
+                <a:latin typeface="Roboto"/>
               </a:rPr>
               <a:t>WHAT YOU'D DO ABOUT IT</a:t>
             </a:r>
@@ -5300,12 +5489,17 @@
           </a:bodyPr>
           <a:lstStyle/>
           <a:p>
+            <a:pPr>
+              <a:defRPr>
+                <a:latin typeface="Roboto"/>
+              </a:defRPr>
+            </a:pPr>
             <a:r>
               <a:rPr sz="1600" b="0">
                 <a:solidFill>
                   <a:srgbClr val="25342A"/>
                 </a:solidFill>
-                <a:latin typeface="Arial"/>
+                <a:latin typeface="Roboto"/>
               </a:rPr>
               <a:t>Most of the money, and usually the cheapest to raise, starting with grants that renew.</a:t>
             </a:r>
@@ -5334,12 +5528,17 @@
           </a:bodyPr>
           <a:lstStyle/>
           <a:p>
+            <a:pPr>
+              <a:defRPr>
+                <a:latin typeface="Roboto"/>
+              </a:defRPr>
+            </a:pPr>
             <a:r>
               <a:rPr sz="900" b="0">
                 <a:solidFill>
                   <a:srgbClr val="5F6F63"/>
                 </a:solidFill>
-                <a:latin typeface="Arial"/>
+                <a:latin typeface="Roboto"/>
               </a:rPr>
               <a:t>funding.pptx</a:t>
             </a:r>
@@ -5368,13 +5567,17 @@
           </a:bodyPr>
           <a:lstStyle/>
           <a:p>
-            <a:pPr algn="ctr"/>
+            <a:pPr algn="ctr">
+              <a:defRPr>
+                <a:latin typeface="Roboto"/>
+              </a:defRPr>
+            </a:pPr>
             <a:r>
               <a:rPr sz="900" b="0">
                 <a:solidFill>
                   <a:srgbClr val="5F6F63"/>
                 </a:solidFill>
-                <a:latin typeface="Arial"/>
+                <a:latin typeface="Roboto"/>
               </a:rPr>
               <a:t>Data retrieved 2pm, Tue 6 Oct 2026 · Sample data</a:t>
             </a:r>
@@ -5403,13 +5606,17 @@
           </a:bodyPr>
           <a:lstStyle/>
           <a:p>
-            <a:pPr algn="r"/>
+            <a:pPr algn="r">
+              <a:defRPr>
+                <a:latin typeface="Roboto"/>
+              </a:defRPr>
+            </a:pPr>
             <a:r>
               <a:rPr sz="900" b="0">
                 <a:solidFill>
                   <a:srgbClr val="5F6F63"/>
                 </a:solidFill>
-                <a:latin typeface="Arial"/>
+                <a:latin typeface="Roboto"/>
               </a:rPr>
               <a:t>Slide 4 of 9</a:t>
             </a:r>
@@ -5473,7 +5680,11 @@
           <a:bodyPr rtlCol="0" anchor="ctr"/>
           <a:lstStyle/>
           <a:p>
-            <a:pPr algn="ctr"/>
+            <a:pPr algn="ctr">
+              <a:defRPr>
+                <a:latin typeface="Roboto"/>
+              </a:defRPr>
+            </a:pPr>
           </a:p>
         </p:txBody>
       </p:sp>
@@ -5499,12 +5710,17 @@
           </a:bodyPr>
           <a:lstStyle/>
           <a:p>
+            <a:pPr>
+              <a:defRPr>
+                <a:latin typeface="Roboto"/>
+              </a:defRPr>
+            </a:pPr>
             <a:r>
               <a:rPr sz="1000" b="0">
                 <a:solidFill>
                   <a:srgbClr val="5F6F63"/>
                 </a:solidFill>
-                <a:latin typeface="Arial"/>
+                <a:latin typeface="Roboto"/>
               </a:rPr>
               <a:t>Sample Community Services Ltd · Which funding is worth chasing?</a:t>
             </a:r>
@@ -5533,12 +5749,17 @@
           </a:bodyPr>
           <a:lstStyle/>
           <a:p>
+            <a:pPr>
+              <a:defRPr>
+                <a:latin typeface="Roboto"/>
+              </a:defRPr>
+            </a:pPr>
             <a:r>
               <a:rPr sz="2400" b="1">
                 <a:solidFill>
                   <a:srgbClr val="25342A"/>
                 </a:solidFill>
-                <a:latin typeface="Arial"/>
+                <a:latin typeface="Roboto"/>
               </a:rPr>
               <a:t>What it shows · Source: Donations</a:t>
             </a:r>
@@ -5586,7 +5807,11 @@
           <a:bodyPr rtlCol="0" anchor="ctr"/>
           <a:lstStyle/>
           <a:p>
-            <a:pPr algn="ctr"/>
+            <a:pPr algn="ctr">
+              <a:defRPr>
+                <a:latin typeface="Roboto"/>
+              </a:defRPr>
+            </a:pPr>
           </a:p>
         </p:txBody>
       </p:sp>
@@ -5612,12 +5837,17 @@
           </a:bodyPr>
           <a:lstStyle/>
           <a:p>
+            <a:pPr>
+              <a:defRPr>
+                <a:latin typeface="Roboto"/>
+              </a:defRPr>
+            </a:pPr>
             <a:r>
               <a:rPr sz="1100" b="1">
                 <a:solidFill>
                   <a:srgbClr val="5F6F63"/>
                 </a:solidFill>
-                <a:latin typeface="Arial"/>
+                <a:latin typeface="Roboto"/>
               </a:rPr>
               <a:t>WHAT IT SHOWS</a:t>
             </a:r>
@@ -5646,12 +5876,17 @@
           </a:bodyPr>
           <a:lstStyle/>
           <a:p>
+            <a:pPr>
+              <a:defRPr>
+                <a:latin typeface="Roboto"/>
+              </a:defRPr>
+            </a:pPr>
             <a:r>
               <a:rPr sz="1600" b="0">
                 <a:solidFill>
                   <a:srgbClr val="25342A"/>
                 </a:solidFill>
-                <a:latin typeface="Arial"/>
+                <a:latin typeface="Roboto"/>
               </a:rPr>
               <a:t>Donations: $60,600 raised this financial year to date (18.6% of everything raised), $9,800 to raise it, so $50,800 left for programs: 16¢ per dollar.</a:t>
             </a:r>
@@ -5699,7 +5934,11 @@
           <a:bodyPr rtlCol="0" anchor="ctr"/>
           <a:lstStyle/>
           <a:p>
-            <a:pPr algn="ctr"/>
+            <a:pPr algn="ctr">
+              <a:defRPr>
+                <a:latin typeface="Roboto"/>
+              </a:defRPr>
+            </a:pPr>
           </a:p>
         </p:txBody>
       </p:sp>
@@ -5725,12 +5964,17 @@
           </a:bodyPr>
           <a:lstStyle/>
           <a:p>
+            <a:pPr>
+              <a:defRPr>
+                <a:latin typeface="Roboto"/>
+              </a:defRPr>
+            </a:pPr>
             <a:r>
               <a:rPr sz="1100" b="1">
                 <a:solidFill>
                   <a:srgbClr val="5F6F63"/>
                 </a:solidFill>
-                <a:latin typeface="Arial"/>
+                <a:latin typeface="Roboto"/>
               </a:rPr>
               <a:t>WHAT YOU'D DO ABOUT IT</a:t>
             </a:r>
@@ -5759,12 +6003,17 @@
           </a:bodyPr>
           <a:lstStyle/>
           <a:p>
+            <a:pPr>
+              <a:defRPr>
+                <a:latin typeface="Roboto"/>
+              </a:defRPr>
+            </a:pPr>
             <a:r>
               <a:rPr sz="1600" b="0">
                 <a:solidFill>
                   <a:srgbClr val="25342A"/>
                 </a:solidFill>
-                <a:latin typeface="Arial"/>
+                <a:latin typeface="Roboto"/>
               </a:rPr>
               <a:t>Cheap and flexible (untied): the money that builds reserves.</a:t>
             </a:r>
@@ -5793,12 +6042,17 @@
           </a:bodyPr>
           <a:lstStyle/>
           <a:p>
+            <a:pPr>
+              <a:defRPr>
+                <a:latin typeface="Roboto"/>
+              </a:defRPr>
+            </a:pPr>
             <a:r>
               <a:rPr sz="900" b="0">
                 <a:solidFill>
                   <a:srgbClr val="5F6F63"/>
                 </a:solidFill>
-                <a:latin typeface="Arial"/>
+                <a:latin typeface="Roboto"/>
               </a:rPr>
               <a:t>funding.pptx</a:t>
             </a:r>
@@ -5827,13 +6081,17 @@
           </a:bodyPr>
           <a:lstStyle/>
           <a:p>
-            <a:pPr algn="ctr"/>
+            <a:pPr algn="ctr">
+              <a:defRPr>
+                <a:latin typeface="Roboto"/>
+              </a:defRPr>
+            </a:pPr>
             <a:r>
               <a:rPr sz="900" b="0">
                 <a:solidFill>
                   <a:srgbClr val="5F6F63"/>
                 </a:solidFill>
-                <a:latin typeface="Arial"/>
+                <a:latin typeface="Roboto"/>
               </a:rPr>
               <a:t>Data retrieved 2pm, Tue 6 Oct 2026 · Sample data</a:t>
             </a:r>
@@ -5862,13 +6120,17 @@
           </a:bodyPr>
           <a:lstStyle/>
           <a:p>
-            <a:pPr algn="r"/>
+            <a:pPr algn="r">
+              <a:defRPr>
+                <a:latin typeface="Roboto"/>
+              </a:defRPr>
+            </a:pPr>
             <a:r>
               <a:rPr sz="900" b="0">
                 <a:solidFill>
                   <a:srgbClr val="5F6F63"/>
                 </a:solidFill>
-                <a:latin typeface="Arial"/>
+                <a:latin typeface="Roboto"/>
               </a:rPr>
               <a:t>Slide 5 of 9</a:t>
             </a:r>
@@ -5932,7 +6194,11 @@
           <a:bodyPr rtlCol="0" anchor="ctr"/>
           <a:lstStyle/>
           <a:p>
-            <a:pPr algn="ctr"/>
+            <a:pPr algn="ctr">
+              <a:defRPr>
+                <a:latin typeface="Roboto"/>
+              </a:defRPr>
+            </a:pPr>
           </a:p>
         </p:txBody>
       </p:sp>
@@ -5958,12 +6224,17 @@
           </a:bodyPr>
           <a:lstStyle/>
           <a:p>
+            <a:pPr>
+              <a:defRPr>
+                <a:latin typeface="Roboto"/>
+              </a:defRPr>
+            </a:pPr>
             <a:r>
               <a:rPr sz="1000" b="0">
                 <a:solidFill>
                   <a:srgbClr val="5F6F63"/>
                 </a:solidFill>
-                <a:latin typeface="Arial"/>
+                <a:latin typeface="Roboto"/>
               </a:rPr>
               <a:t>Sample Community Services Ltd · Which funding is worth chasing?</a:t>
             </a:r>
@@ -5992,12 +6263,17 @@
           </a:bodyPr>
           <a:lstStyle/>
           <a:p>
+            <a:pPr>
+              <a:defRPr>
+                <a:latin typeface="Roboto"/>
+              </a:defRPr>
+            </a:pPr>
             <a:r>
               <a:rPr sz="2400" b="1">
                 <a:solidFill>
                   <a:srgbClr val="25342A"/>
                 </a:solidFill>
-                <a:latin typeface="Arial"/>
+                <a:latin typeface="Roboto"/>
               </a:rPr>
               <a:t>What it shows · Source: Fundraising events</a:t>
             </a:r>
@@ -6045,7 +6321,11 @@
           <a:bodyPr rtlCol="0" anchor="ctr"/>
           <a:lstStyle/>
           <a:p>
-            <a:pPr algn="ctr"/>
+            <a:pPr algn="ctr">
+              <a:defRPr>
+                <a:latin typeface="Roboto"/>
+              </a:defRPr>
+            </a:pPr>
           </a:p>
         </p:txBody>
       </p:sp>
@@ -6071,12 +6351,17 @@
           </a:bodyPr>
           <a:lstStyle/>
           <a:p>
+            <a:pPr>
+              <a:defRPr>
+                <a:latin typeface="Roboto"/>
+              </a:defRPr>
+            </a:pPr>
             <a:r>
               <a:rPr sz="1100" b="1">
                 <a:solidFill>
                   <a:srgbClr val="5F6F63"/>
                 </a:solidFill>
-                <a:latin typeface="Arial"/>
+                <a:latin typeface="Roboto"/>
               </a:rPr>
               <a:t>WHAT IT SHOWS</a:t>
             </a:r>
@@ -6105,12 +6390,17 @@
           </a:bodyPr>
           <a:lstStyle/>
           <a:p>
+            <a:pPr>
+              <a:defRPr>
+                <a:latin typeface="Roboto"/>
+              </a:defRPr>
+            </a:pPr>
             <a:r>
               <a:rPr sz="1600" b="0">
                 <a:solidFill>
                   <a:srgbClr val="25342A"/>
                 </a:solidFill>
-                <a:latin typeface="Arial"/>
+                <a:latin typeface="Roboto"/>
               </a:rPr>
               <a:t>Fundraising events: $41,600 raised this financial year to date (12.8% of everything raised), $19,300 to raise it, so $22,300 left for programs: 46¢ per dollar.</a:t>
             </a:r>
@@ -6158,7 +6448,11 @@
           <a:bodyPr rtlCol="0" anchor="ctr"/>
           <a:lstStyle/>
           <a:p>
-            <a:pPr algn="ctr"/>
+            <a:pPr algn="ctr">
+              <a:defRPr>
+                <a:latin typeface="Roboto"/>
+              </a:defRPr>
+            </a:pPr>
           </a:p>
         </p:txBody>
       </p:sp>
@@ -6184,12 +6478,17 @@
           </a:bodyPr>
           <a:lstStyle/>
           <a:p>
+            <a:pPr>
+              <a:defRPr>
+                <a:latin typeface="Roboto"/>
+              </a:defRPr>
+            </a:pPr>
             <a:r>
               <a:rPr sz="1100" b="1">
                 <a:solidFill>
                   <a:srgbClr val="5F6F63"/>
                 </a:solidFill>
-                <a:latin typeface="Arial"/>
+                <a:latin typeface="Roboto"/>
               </a:rPr>
               <a:t>WHAT YOU'D DO ABOUT IT</a:t>
             </a:r>
@@ -6218,12 +6517,17 @@
           </a:bodyPr>
           <a:lstStyle/>
           <a:p>
+            <a:pPr>
+              <a:defRPr>
+                <a:latin typeface="Roboto"/>
+              </a:defRPr>
+            </a:pPr>
             <a:r>
               <a:rPr sz="1600" b="0">
                 <a:solidFill>
                   <a:srgbClr val="25342A"/>
                 </a:solidFill>
-                <a:latin typeface="Arial"/>
+                <a:latin typeface="Roboto"/>
               </a:rPr>
               <a:t>The dearest per dollar: worth measuring the new donors each event brings in too.</a:t>
             </a:r>
@@ -6252,12 +6556,17 @@
           </a:bodyPr>
           <a:lstStyle/>
           <a:p>
+            <a:pPr>
+              <a:defRPr>
+                <a:latin typeface="Roboto"/>
+              </a:defRPr>
+            </a:pPr>
             <a:r>
               <a:rPr sz="900" b="0">
                 <a:solidFill>
                   <a:srgbClr val="5F6F63"/>
                 </a:solidFill>
-                <a:latin typeface="Arial"/>
+                <a:latin typeface="Roboto"/>
               </a:rPr>
               <a:t>funding.pptx</a:t>
             </a:r>
@@ -6286,13 +6595,17 @@
           </a:bodyPr>
           <a:lstStyle/>
           <a:p>
-            <a:pPr algn="ctr"/>
+            <a:pPr algn="ctr">
+              <a:defRPr>
+                <a:latin typeface="Roboto"/>
+              </a:defRPr>
+            </a:pPr>
             <a:r>
               <a:rPr sz="900" b="0">
                 <a:solidFill>
                   <a:srgbClr val="5F6F63"/>
                 </a:solidFill>
-                <a:latin typeface="Arial"/>
+                <a:latin typeface="Roboto"/>
               </a:rPr>
               <a:t>Data retrieved 2pm, Tue 6 Oct 2026 · Sample data</a:t>
             </a:r>
@@ -6321,13 +6634,17 @@
           </a:bodyPr>
           <a:lstStyle/>
           <a:p>
-            <a:pPr algn="r"/>
+            <a:pPr algn="r">
+              <a:defRPr>
+                <a:latin typeface="Roboto"/>
+              </a:defRPr>
+            </a:pPr>
             <a:r>
               <a:rPr sz="900" b="0">
                 <a:solidFill>
                   <a:srgbClr val="5F6F63"/>
                 </a:solidFill>
-                <a:latin typeface="Arial"/>
+                <a:latin typeface="Roboto"/>
               </a:rPr>
               <a:t>Slide 6 of 9</a:t>
             </a:r>
@@ -6391,7 +6708,11 @@
           <a:bodyPr rtlCol="0" anchor="ctr"/>
           <a:lstStyle/>
           <a:p>
-            <a:pPr algn="ctr"/>
+            <a:pPr algn="ctr">
+              <a:defRPr>
+                <a:latin typeface="Roboto"/>
+              </a:defRPr>
+            </a:pPr>
           </a:p>
         </p:txBody>
       </p:sp>
@@ -6417,12 +6738,17 @@
           </a:bodyPr>
           <a:lstStyle/>
           <a:p>
+            <a:pPr>
+              <a:defRPr>
+                <a:latin typeface="Roboto"/>
+              </a:defRPr>
+            </a:pPr>
             <a:r>
               <a:rPr sz="1000" b="0">
                 <a:solidFill>
                   <a:srgbClr val="5F6F63"/>
                 </a:solidFill>
-                <a:latin typeface="Arial"/>
+                <a:latin typeface="Roboto"/>
               </a:rPr>
               <a:t>Sample Community Services Ltd · Which funding is worth chasing?</a:t>
             </a:r>
@@ -6451,12 +6777,17 @@
           </a:bodyPr>
           <a:lstStyle/>
           <a:p>
+            <a:pPr>
+              <a:defRPr>
+                <a:latin typeface="Roboto"/>
+              </a:defRPr>
+            </a:pPr>
             <a:r>
               <a:rPr sz="2400" b="1">
                 <a:solidFill>
                   <a:srgbClr val="25342A"/>
                 </a:solidFill>
-                <a:latin typeface="Arial"/>
+                <a:latin typeface="Roboto"/>
               </a:rPr>
               <a:t>Financial year to date (Jul to Sep 2026), by source · Every source at once</a:t>
             </a:r>
@@ -6493,7 +6824,13 @@
                   <a:txBody>
                     <a:bodyPr/>
                     <a:lstStyle/>
-                    <a:p/>
+                    <a:p>
+                      <a:pPr>
+                        <a:defRPr>
+                          <a:latin typeface="Roboto"/>
+                        </a:defRPr>
+                      </a:pPr>
+                    </a:p>
                   </a:txBody>
                   <a:tcPr>
                     <a:solidFill>
@@ -6506,12 +6843,17 @@
                     <a:bodyPr/>
                     <a:lstStyle/>
                     <a:p>
-                      <a:pPr algn="r"/>
+                      <a:pPr algn="r">
+                        <a:defRPr>
+                          <a:latin typeface="Roboto"/>
+                        </a:defRPr>
+                      </a:pPr>
                       <a:r>
                         <a:rPr sz="1100" b="1">
                           <a:solidFill>
                             <a:srgbClr val="FFFFFF"/>
                           </a:solidFill>
+                          <a:latin typeface="Roboto"/>
                         </a:rPr>
                         <a:t>Raised</a:t>
                       </a:r>
@@ -6528,12 +6870,17 @@
                     <a:bodyPr/>
                     <a:lstStyle/>
                     <a:p>
-                      <a:pPr algn="r"/>
+                      <a:pPr algn="r">
+                        <a:defRPr>
+                          <a:latin typeface="Roboto"/>
+                        </a:defRPr>
+                      </a:pPr>
                       <a:r>
                         <a:rPr sz="1100" b="1">
                           <a:solidFill>
                             <a:srgbClr val="FFFFFF"/>
                           </a:solidFill>
+                          <a:latin typeface="Roboto"/>
                         </a:rPr>
                         <a:t>Cost of raising it</a:t>
                       </a:r>
@@ -6550,12 +6897,17 @@
                     <a:bodyPr/>
                     <a:lstStyle/>
                     <a:p>
-                      <a:pPr algn="r"/>
+                      <a:pPr algn="r">
+                        <a:defRPr>
+                          <a:latin typeface="Roboto"/>
+                        </a:defRPr>
+                      </a:pPr>
                       <a:r>
                         <a:rPr sz="1100" b="1">
                           <a:solidFill>
                             <a:srgbClr val="FFFFFF"/>
                           </a:solidFill>
+                          <a:latin typeface="Roboto"/>
                         </a:rPr>
                         <a:t>Left after costs</a:t>
                       </a:r>
@@ -6572,12 +6924,17 @@
                     <a:bodyPr/>
                     <a:lstStyle/>
                     <a:p>
-                      <a:pPr algn="r"/>
+                      <a:pPr algn="r">
+                        <a:defRPr>
+                          <a:latin typeface="Roboto"/>
+                        </a:defRPr>
+                      </a:pPr>
                       <a:r>
                         <a:rPr sz="1100" b="1">
                           <a:solidFill>
                             <a:srgbClr val="FFFFFF"/>
                           </a:solidFill>
+                          <a:latin typeface="Roboto"/>
                         </a:rPr>
                         <a:t>Cost per $1</a:t>
                       </a:r>
@@ -6596,11 +6953,17 @@
                     <a:bodyPr/>
                     <a:lstStyle/>
                     <a:p>
+                      <a:pPr>
+                        <a:defRPr>
+                          <a:latin typeface="Roboto"/>
+                        </a:defRPr>
+                      </a:pPr>
                       <a:r>
                         <a:rPr sz="1050">
                           <a:solidFill>
                             <a:srgbClr val="25342A"/>
                           </a:solidFill>
+                          <a:latin typeface="Roboto"/>
                         </a:rPr>
                         <a:t>Grants</a:t>
                       </a:r>
@@ -6617,12 +6980,17 @@
                     <a:bodyPr/>
                     <a:lstStyle/>
                     <a:p>
-                      <a:pPr algn="r"/>
+                      <a:pPr algn="r">
+                        <a:defRPr>
+                          <a:latin typeface="Roboto"/>
+                        </a:defRPr>
+                      </a:pPr>
                       <a:r>
                         <a:rPr sz="1050">
                           <a:solidFill>
                             <a:srgbClr val="25342A"/>
                           </a:solidFill>
+                          <a:latin typeface="Roboto"/>
                         </a:rPr>
                         <a:t>$223,318</a:t>
                       </a:r>
@@ -6639,12 +7007,17 @@
                     <a:bodyPr/>
                     <a:lstStyle/>
                     <a:p>
-                      <a:pPr algn="r"/>
+                      <a:pPr algn="r">
+                        <a:defRPr>
+                          <a:latin typeface="Roboto"/>
+                        </a:defRPr>
+                      </a:pPr>
                       <a:r>
                         <a:rPr sz="1050">
                           <a:solidFill>
                             <a:srgbClr val="25342A"/>
                           </a:solidFill>
+                          <a:latin typeface="Roboto"/>
                         </a:rPr>
                         <a:t>$21,300</a:t>
                       </a:r>
@@ -6661,12 +7034,17 @@
                     <a:bodyPr/>
                     <a:lstStyle/>
                     <a:p>
-                      <a:pPr algn="r"/>
+                      <a:pPr algn="r">
+                        <a:defRPr>
+                          <a:latin typeface="Roboto"/>
+                        </a:defRPr>
+                      </a:pPr>
                       <a:r>
                         <a:rPr sz="1050">
                           <a:solidFill>
                             <a:srgbClr val="25342A"/>
                           </a:solidFill>
+                          <a:latin typeface="Roboto"/>
                         </a:rPr>
                         <a:t>$202,018</a:t>
                       </a:r>
@@ -6683,12 +7061,17 @@
                     <a:bodyPr/>
                     <a:lstStyle/>
                     <a:p>
-                      <a:pPr algn="r"/>
+                      <a:pPr algn="r">
+                        <a:defRPr>
+                          <a:latin typeface="Roboto"/>
+                        </a:defRPr>
+                      </a:pPr>
                       <a:r>
                         <a:rPr sz="1050">
                           <a:solidFill>
                             <a:srgbClr val="25342A"/>
                           </a:solidFill>
+                          <a:latin typeface="Roboto"/>
                         </a:rPr>
                         <a:t>10¢</a:t>
                       </a:r>
@@ -6707,11 +7090,17 @@
                     <a:bodyPr/>
                     <a:lstStyle/>
                     <a:p>
+                      <a:pPr>
+                        <a:defRPr>
+                          <a:latin typeface="Roboto"/>
+                        </a:defRPr>
+                      </a:pPr>
                       <a:r>
                         <a:rPr sz="1050">
                           <a:solidFill>
                             <a:srgbClr val="25342A"/>
                           </a:solidFill>
+                          <a:latin typeface="Roboto"/>
                         </a:rPr>
                         <a:t>Donations</a:t>
                       </a:r>
@@ -6728,12 +7117,17 @@
                     <a:bodyPr/>
                     <a:lstStyle/>
                     <a:p>
-                      <a:pPr algn="r"/>
+                      <a:pPr algn="r">
+                        <a:defRPr>
+                          <a:latin typeface="Roboto"/>
+                        </a:defRPr>
+                      </a:pPr>
                       <a:r>
                         <a:rPr sz="1050">
                           <a:solidFill>
                             <a:srgbClr val="25342A"/>
                           </a:solidFill>
+                          <a:latin typeface="Roboto"/>
                         </a:rPr>
                         <a:t>$60,600</a:t>
                       </a:r>
@@ -6750,12 +7144,17 @@
                     <a:bodyPr/>
                     <a:lstStyle/>
                     <a:p>
-                      <a:pPr algn="r"/>
+                      <a:pPr algn="r">
+                        <a:defRPr>
+                          <a:latin typeface="Roboto"/>
+                        </a:defRPr>
+                      </a:pPr>
                       <a:r>
                         <a:rPr sz="1050">
                           <a:solidFill>
                             <a:srgbClr val="25342A"/>
                           </a:solidFill>
+                          <a:latin typeface="Roboto"/>
                         </a:rPr>
                         <a:t>$9,800</a:t>
                       </a:r>
@@ -6772,12 +7171,17 @@
                     <a:bodyPr/>
                     <a:lstStyle/>
                     <a:p>
-                      <a:pPr algn="r"/>
+                      <a:pPr algn="r">
+                        <a:defRPr>
+                          <a:latin typeface="Roboto"/>
+                        </a:defRPr>
+                      </a:pPr>
                       <a:r>
                         <a:rPr sz="1050">
                           <a:solidFill>
                             <a:srgbClr val="25342A"/>
                           </a:solidFill>
+                          <a:latin typeface="Roboto"/>
                         </a:rPr>
                         <a:t>$50,800</a:t>
                       </a:r>
@@ -6794,12 +7198,17 @@
                     <a:bodyPr/>
                     <a:lstStyle/>
                     <a:p>
-                      <a:pPr algn="r"/>
+                      <a:pPr algn="r">
+                        <a:defRPr>
+                          <a:latin typeface="Roboto"/>
+                        </a:defRPr>
+                      </a:pPr>
                       <a:r>
                         <a:rPr sz="1050">
                           <a:solidFill>
                             <a:srgbClr val="25342A"/>
                           </a:solidFill>
+                          <a:latin typeface="Roboto"/>
                         </a:rPr>
                         <a:t>16¢</a:t>
                       </a:r>
@@ -6818,11 +7227,17 @@
                     <a:bodyPr/>
                     <a:lstStyle/>
                     <a:p>
+                      <a:pPr>
+                        <a:defRPr>
+                          <a:latin typeface="Roboto"/>
+                        </a:defRPr>
+                      </a:pPr>
                       <a:r>
                         <a:rPr sz="1050">
                           <a:solidFill>
                             <a:srgbClr val="25342A"/>
                           </a:solidFill>
+                          <a:latin typeface="Roboto"/>
                         </a:rPr>
                         <a:t>Fundraising events</a:t>
                       </a:r>
@@ -6839,12 +7254,17 @@
                     <a:bodyPr/>
                     <a:lstStyle/>
                     <a:p>
-                      <a:pPr algn="r"/>
+                      <a:pPr algn="r">
+                        <a:defRPr>
+                          <a:latin typeface="Roboto"/>
+                        </a:defRPr>
+                      </a:pPr>
                       <a:r>
                         <a:rPr sz="1050">
                           <a:solidFill>
                             <a:srgbClr val="25342A"/>
                           </a:solidFill>
+                          <a:latin typeface="Roboto"/>
                         </a:rPr>
                         <a:t>$41,600</a:t>
                       </a:r>
@@ -6861,12 +7281,17 @@
                     <a:bodyPr/>
                     <a:lstStyle/>
                     <a:p>
-                      <a:pPr algn="r"/>
+                      <a:pPr algn="r">
+                        <a:defRPr>
+                          <a:latin typeface="Roboto"/>
+                        </a:defRPr>
+                      </a:pPr>
                       <a:r>
                         <a:rPr sz="1050">
                           <a:solidFill>
                             <a:srgbClr val="25342A"/>
                           </a:solidFill>
+                          <a:latin typeface="Roboto"/>
                         </a:rPr>
                         <a:t>$19,300</a:t>
                       </a:r>
@@ -6883,12 +7308,17 @@
                     <a:bodyPr/>
                     <a:lstStyle/>
                     <a:p>
-                      <a:pPr algn="r"/>
+                      <a:pPr algn="r">
+                        <a:defRPr>
+                          <a:latin typeface="Roboto"/>
+                        </a:defRPr>
+                      </a:pPr>
                       <a:r>
                         <a:rPr sz="1050">
                           <a:solidFill>
                             <a:srgbClr val="25342A"/>
                           </a:solidFill>
+                          <a:latin typeface="Roboto"/>
                         </a:rPr>
                         <a:t>$22,300</a:t>
                       </a:r>
@@ -6905,12 +7335,17 @@
                     <a:bodyPr/>
                     <a:lstStyle/>
                     <a:p>
-                      <a:pPr algn="r"/>
+                      <a:pPr algn="r">
+                        <a:defRPr>
+                          <a:latin typeface="Roboto"/>
+                        </a:defRPr>
+                      </a:pPr>
                       <a:r>
                         <a:rPr sz="1050">
                           <a:solidFill>
                             <a:srgbClr val="25342A"/>
                           </a:solidFill>
+                          <a:latin typeface="Roboto"/>
                         </a:rPr>
                         <a:t>46¢</a:t>
                       </a:r>
@@ -6949,12 +7384,17 @@
           </a:bodyPr>
           <a:lstStyle/>
           <a:p>
+            <a:pPr>
+              <a:defRPr>
+                <a:latin typeface="Roboto"/>
+              </a:defRPr>
+            </a:pPr>
             <a:r>
               <a:rPr sz="900" b="0">
                 <a:solidFill>
                   <a:srgbClr val="5F6F63"/>
                 </a:solidFill>
-                <a:latin typeface="Arial"/>
+                <a:latin typeface="Roboto"/>
               </a:rPr>
               <a:t>funding.pptx</a:t>
             </a:r>
@@ -6983,13 +7423,17 @@
           </a:bodyPr>
           <a:lstStyle/>
           <a:p>
-            <a:pPr algn="ctr"/>
+            <a:pPr algn="ctr">
+              <a:defRPr>
+                <a:latin typeface="Roboto"/>
+              </a:defRPr>
+            </a:pPr>
             <a:r>
               <a:rPr sz="900" b="0">
                 <a:solidFill>
                   <a:srgbClr val="5F6F63"/>
                 </a:solidFill>
-                <a:latin typeface="Arial"/>
+                <a:latin typeface="Roboto"/>
               </a:rPr>
               <a:t>Data retrieved 2pm, Tue 6 Oct 2026 · Sample data</a:t>
             </a:r>
@@ -7018,13 +7462,17 @@
           </a:bodyPr>
           <a:lstStyle/>
           <a:p>
-            <a:pPr algn="r"/>
+            <a:pPr algn="r">
+              <a:defRPr>
+                <a:latin typeface="Roboto"/>
+              </a:defRPr>
+            </a:pPr>
             <a:r>
               <a:rPr sz="900" b="0">
                 <a:solidFill>
                   <a:srgbClr val="5F6F63"/>
                 </a:solidFill>
-                <a:latin typeface="Arial"/>
+                <a:latin typeface="Roboto"/>
               </a:rPr>
               <a:t>Slide 7 of 9</a:t>
             </a:r>
@@ -7088,7 +7536,11 @@
           <a:bodyPr rtlCol="0" anchor="ctr"/>
           <a:lstStyle/>
           <a:p>
-            <a:pPr algn="ctr"/>
+            <a:pPr algn="ctr">
+              <a:defRPr>
+                <a:latin typeface="Roboto"/>
+              </a:defRPr>
+            </a:pPr>
           </a:p>
         </p:txBody>
       </p:sp>
@@ -7114,12 +7566,17 @@
           </a:bodyPr>
           <a:lstStyle/>
           <a:p>
+            <a:pPr>
+              <a:defRPr>
+                <a:latin typeface="Roboto"/>
+              </a:defRPr>
+            </a:pPr>
             <a:r>
               <a:rPr sz="1000" b="0">
                 <a:solidFill>
                   <a:srgbClr val="5F6F63"/>
                 </a:solidFill>
-                <a:latin typeface="Arial"/>
+                <a:latin typeface="Roboto"/>
               </a:rPr>
               <a:t>Sample Community Services Ltd · Which funding is worth chasing?</a:t>
             </a:r>
@@ -7148,12 +7605,17 @@
           </a:bodyPr>
           <a:lstStyle/>
           <a:p>
+            <a:pPr>
+              <a:defRPr>
+                <a:latin typeface="Roboto"/>
+              </a:defRPr>
+            </a:pPr>
             <a:r>
               <a:rPr sz="2400" b="1">
                 <a:solidFill>
                   <a:srgbClr val="25342A"/>
                 </a:solidFill>
-                <a:latin typeface="Arial"/>
+                <a:latin typeface="Roboto"/>
               </a:rPr>
               <a:t>Raised and left after costs, by month · Raised $ · Every source at once</a:t>
             </a:r>
@@ -7182,12 +7644,17 @@
           </a:bodyPr>
           <a:lstStyle/>
           <a:p>
+            <a:pPr>
+              <a:defRPr>
+                <a:latin typeface="Roboto"/>
+              </a:defRPr>
+            </a:pPr>
             <a:r>
               <a:rPr sz="1200" b="0">
                 <a:solidFill>
                   <a:srgbClr val="5F6F63"/>
                 </a:solidFill>
-                <a:latin typeface="Arial"/>
+                <a:latin typeface="Roboto"/>
               </a:rPr>
               <a:t>Tap a month for its workings.</a:t>
             </a:r>
@@ -7234,12 +7701,17 @@
           </a:bodyPr>
           <a:lstStyle/>
           <a:p>
+            <a:pPr>
+              <a:defRPr>
+                <a:latin typeface="Roboto"/>
+              </a:defRPr>
+            </a:pPr>
             <a:r>
               <a:rPr sz="900" b="0">
                 <a:solidFill>
                   <a:srgbClr val="5F6F63"/>
                 </a:solidFill>
-                <a:latin typeface="Arial"/>
+                <a:latin typeface="Roboto"/>
               </a:rPr>
               <a:t>funding.pptx</a:t>
             </a:r>
@@ -7268,13 +7740,17 @@
           </a:bodyPr>
           <a:lstStyle/>
           <a:p>
-            <a:pPr algn="ctr"/>
+            <a:pPr algn="ctr">
+              <a:defRPr>
+                <a:latin typeface="Roboto"/>
+              </a:defRPr>
+            </a:pPr>
             <a:r>
               <a:rPr sz="900" b="0">
                 <a:solidFill>
                   <a:srgbClr val="5F6F63"/>
                 </a:solidFill>
-                <a:latin typeface="Arial"/>
+                <a:latin typeface="Roboto"/>
               </a:rPr>
               <a:t>Data retrieved 2pm, Tue 6 Oct 2026 · Sample data</a:t>
             </a:r>
@@ -7303,13 +7779,17 @@
           </a:bodyPr>
           <a:lstStyle/>
           <a:p>
-            <a:pPr algn="r"/>
+            <a:pPr algn="r">
+              <a:defRPr>
+                <a:latin typeface="Roboto"/>
+              </a:defRPr>
+            </a:pPr>
             <a:r>
               <a:rPr sz="900" b="0">
                 <a:solidFill>
                   <a:srgbClr val="5F6F63"/>
                 </a:solidFill>
-                <a:latin typeface="Arial"/>
+                <a:latin typeface="Roboto"/>
               </a:rPr>
               <a:t>Slide 8 of 9</a:t>
             </a:r>
@@ -7373,7 +7853,11 @@
           <a:bodyPr rtlCol="0" anchor="ctr"/>
           <a:lstStyle/>
           <a:p>
-            <a:pPr algn="ctr"/>
+            <a:pPr algn="ctr">
+              <a:defRPr>
+                <a:latin typeface="Roboto"/>
+              </a:defRPr>
+            </a:pPr>
           </a:p>
         </p:txBody>
       </p:sp>
@@ -7399,12 +7883,17 @@
           </a:bodyPr>
           <a:lstStyle/>
           <a:p>
+            <a:pPr>
+              <a:defRPr>
+                <a:latin typeface="Roboto"/>
+              </a:defRPr>
+            </a:pPr>
             <a:r>
               <a:rPr sz="1000" b="0">
                 <a:solidFill>
                   <a:srgbClr val="5F6F63"/>
                 </a:solidFill>
-                <a:latin typeface="Arial"/>
+                <a:latin typeface="Roboto"/>
               </a:rPr>
               <a:t>Sample Community Services Ltd · Which funding is worth chasing?</a:t>
             </a:r>
@@ -7433,12 +7922,17 @@
           </a:bodyPr>
           <a:lstStyle/>
           <a:p>
+            <a:pPr>
+              <a:defRPr>
+                <a:latin typeface="Roboto"/>
+              </a:defRPr>
+            </a:pPr>
             <a:r>
               <a:rPr sz="2400" b="1">
                 <a:solidFill>
                   <a:srgbClr val="25342A"/>
                 </a:solidFill>
-                <a:latin typeface="Arial"/>
+                <a:latin typeface="Roboto"/>
               </a:rPr>
               <a:t>Raised and left after costs, by month · Left after costs $ · Every source at once</a:t>
             </a:r>
@@ -7467,12 +7961,17 @@
           </a:bodyPr>
           <a:lstStyle/>
           <a:p>
+            <a:pPr>
+              <a:defRPr>
+                <a:latin typeface="Roboto"/>
+              </a:defRPr>
+            </a:pPr>
             <a:r>
               <a:rPr sz="1200" b="0">
                 <a:solidFill>
                   <a:srgbClr val="5F6F63"/>
                 </a:solidFill>
-                <a:latin typeface="Arial"/>
+                <a:latin typeface="Roboto"/>
               </a:rPr>
               <a:t>Tap a month for its workings.</a:t>
             </a:r>
@@ -7519,12 +8018,17 @@
           </a:bodyPr>
           <a:lstStyle/>
           <a:p>
+            <a:pPr>
+              <a:defRPr>
+                <a:latin typeface="Roboto"/>
+              </a:defRPr>
+            </a:pPr>
             <a:r>
               <a:rPr sz="900" b="0">
                 <a:solidFill>
                   <a:srgbClr val="5F6F63"/>
                 </a:solidFill>
-                <a:latin typeface="Arial"/>
+                <a:latin typeface="Roboto"/>
               </a:rPr>
               <a:t>funding.pptx</a:t>
             </a:r>
@@ -7553,13 +8057,17 @@
           </a:bodyPr>
           <a:lstStyle/>
           <a:p>
-            <a:pPr algn="ctr"/>
+            <a:pPr algn="ctr">
+              <a:defRPr>
+                <a:latin typeface="Roboto"/>
+              </a:defRPr>
+            </a:pPr>
             <a:r>
               <a:rPr sz="900" b="0">
                 <a:solidFill>
                   <a:srgbClr val="5F6F63"/>
                 </a:solidFill>
-                <a:latin typeface="Arial"/>
+                <a:latin typeface="Roboto"/>
               </a:rPr>
               <a:t>Data retrieved 2pm, Tue 6 Oct 2026 · Sample data</a:t>
             </a:r>
@@ -7588,13 +8096,17 @@
           </a:bodyPr>
           <a:lstStyle/>
           <a:p>
-            <a:pPr algn="r"/>
+            <a:pPr algn="r">
+              <a:defRPr>
+                <a:latin typeface="Roboto"/>
+              </a:defRPr>
+            </a:pPr>
             <a:r>
               <a:rPr sz="900" b="0">
                 <a:solidFill>
                   <a:srgbClr val="5F6F63"/>
                 </a:solidFill>
-                <a:latin typeface="Arial"/>
+                <a:latin typeface="Roboto"/>
               </a:rPr>
               <a:t>Slide 9 of 9</a:t>
             </a:r>

--- a/media/exports/reports/2026-09/funding.pptx
+++ b/media/exports/reports/2026-09/funding.pptx
@@ -14,6 +14,7 @@
     <p:sldId id="262" r:id="rId13"/>
     <p:sldId id="263" r:id="rId14"/>
     <p:sldId id="264" r:id="rId15"/>
+    <p:sldId id="265" r:id="rId16"/>
   </p:sldIdLst>
   <p:sldSz cx="12191695" cy="6858000" type="screen4x3"/>
   <p:notesSz cx="6858000" cy="9144000"/>
@@ -4312,7 +4313,324 @@
                 </a:solidFill>
                 <a:latin typeface="Roboto"/>
               </a:rPr>
-              <a:t>Slide 1 of 9</a:t>
+              <a:t>Slide 1 of 10</a:t>
+            </a:r>
+          </a:p>
+        </p:txBody>
+      </p:sp>
+    </p:spTree>
+  </p:cSld>
+  <p:clrMapOvr>
+    <a:masterClrMapping/>
+  </p:clrMapOvr>
+</p:sld>
+</file>
+
+<file path=ppt/slides/slide10.xml><?xml version="1.0" encoding="utf-8"?>
+<p:sld xmlns:a="http://schemas.openxmlformats.org/drawingml/2006/main" xmlns:p="http://schemas.openxmlformats.org/presentationml/2006/main" xmlns:r="http://schemas.openxmlformats.org/officeDocument/2006/relationships">
+  <p:cSld>
+    <p:spTree>
+      <p:nvGrpSpPr>
+        <p:cNvPr id="1" name=""/>
+        <p:cNvGrpSpPr/>
+        <p:nvPr/>
+      </p:nvGrpSpPr>
+      <p:grpSpPr/>
+      <p:sp>
+        <p:nvSpPr>
+          <p:cNvPr id="2" name="Rectangle 1"/>
+          <p:cNvSpPr/>
+          <p:nvPr/>
+        </p:nvSpPr>
+        <p:spPr>
+          <a:xfrm>
+            <a:off x="0" y="0"/>
+            <a:ext cx="12191695" cy="73152"/>
+          </a:xfrm>
+          <a:prstGeom prst="rect">
+            <a:avLst/>
+          </a:prstGeom>
+          <a:solidFill>
+            <a:srgbClr val="2F7A5D"/>
+          </a:solidFill>
+          <a:ln>
+            <a:noFill/>
+          </a:ln>
+        </p:spPr>
+        <p:style>
+          <a:lnRef idx="1">
+            <a:schemeClr val="accent1"/>
+          </a:lnRef>
+          <a:fillRef idx="3">
+            <a:schemeClr val="accent1"/>
+          </a:fillRef>
+          <a:effectRef idx="2">
+            <a:schemeClr val="accent1"/>
+          </a:effectRef>
+          <a:fontRef idx="minor">
+            <a:schemeClr val="lt1"/>
+          </a:fontRef>
+        </p:style>
+        <p:txBody>
+          <a:bodyPr rtlCol="0" anchor="ctr"/>
+          <a:lstStyle/>
+          <a:p>
+            <a:pPr algn="ctr">
+              <a:defRPr>
+                <a:latin typeface="Roboto"/>
+              </a:defRPr>
+            </a:pPr>
+          </a:p>
+        </p:txBody>
+      </p:sp>
+      <p:sp>
+        <p:nvSpPr>
+          <p:cNvPr id="3" name="TextBox 2"/>
+          <p:cNvSpPr txBox="1"/>
+          <p:nvPr/>
+        </p:nvSpPr>
+        <p:spPr>
+          <a:xfrm>
+            <a:off x="457200" y="164592"/>
+            <a:ext cx="7315200" cy="274320"/>
+          </a:xfrm>
+          <a:prstGeom prst="rect">
+            <a:avLst/>
+          </a:prstGeom>
+          <a:noFill/>
+        </p:spPr>
+        <p:txBody>
+          <a:bodyPr wrap="square">
+            <a:spAutoFit/>
+          </a:bodyPr>
+          <a:lstStyle/>
+          <a:p>
+            <a:pPr>
+              <a:defRPr>
+                <a:latin typeface="Roboto"/>
+              </a:defRPr>
+            </a:pPr>
+            <a:r>
+              <a:rPr sz="1000" b="0">
+                <a:solidFill>
+                  <a:srgbClr val="5F6F63"/>
+                </a:solidFill>
+                <a:latin typeface="Roboto"/>
+              </a:rPr>
+              <a:t>Sample Community Services Ltd · Which funding is worth chasing?</a:t>
+            </a:r>
+          </a:p>
+        </p:txBody>
+      </p:sp>
+      <p:sp>
+        <p:nvSpPr>
+          <p:cNvPr id="4" name="TextBox 3"/>
+          <p:cNvSpPr txBox="1"/>
+          <p:nvPr/>
+        </p:nvSpPr>
+        <p:spPr>
+          <a:xfrm>
+            <a:off x="457200" y="411480"/>
+            <a:ext cx="11247120" cy="548640"/>
+          </a:xfrm>
+          <a:prstGeom prst="rect">
+            <a:avLst/>
+          </a:prstGeom>
+          <a:noFill/>
+        </p:spPr>
+        <p:txBody>
+          <a:bodyPr wrap="square">
+            <a:spAutoFit/>
+          </a:bodyPr>
+          <a:lstStyle/>
+          <a:p>
+            <a:pPr>
+              <a:defRPr>
+                <a:latin typeface="Roboto"/>
+              </a:defRPr>
+            </a:pPr>
+            <a:r>
+              <a:rPr sz="2400" b="1">
+                <a:solidFill>
+                  <a:srgbClr val="25342A"/>
+                </a:solidFill>
+                <a:latin typeface="Roboto"/>
+              </a:rPr>
+              <a:t>Raised and left after costs, by month · Left after costs $ · Every source at once</a:t>
+            </a:r>
+          </a:p>
+        </p:txBody>
+      </p:sp>
+      <p:sp>
+        <p:nvSpPr>
+          <p:cNvPr id="5" name="TextBox 4"/>
+          <p:cNvSpPr txBox="1"/>
+          <p:nvPr/>
+        </p:nvSpPr>
+        <p:spPr>
+          <a:xfrm>
+            <a:off x="457200" y="960120"/>
+            <a:ext cx="11247120" cy="457200"/>
+          </a:xfrm>
+          <a:prstGeom prst="rect">
+            <a:avLst/>
+          </a:prstGeom>
+          <a:noFill/>
+        </p:spPr>
+        <p:txBody>
+          <a:bodyPr wrap="square">
+            <a:spAutoFit/>
+          </a:bodyPr>
+          <a:lstStyle/>
+          <a:p>
+            <a:pPr>
+              <a:defRPr>
+                <a:latin typeface="Roboto"/>
+              </a:defRPr>
+            </a:pPr>
+            <a:r>
+              <a:rPr sz="1200" b="0">
+                <a:solidFill>
+                  <a:srgbClr val="5F6F63"/>
+                </a:solidFill>
+                <a:latin typeface="Roboto"/>
+              </a:rPr>
+              <a:t>Tap a month for its workings.</a:t>
+            </a:r>
+          </a:p>
+        </p:txBody>
+      </p:sp>
+      <p:graphicFrame>
+        <p:nvGraphicFramePr>
+          <p:cNvPr id="6" name="Chart 5"/>
+          <p:cNvGraphicFramePr>
+            <a:graphicFrameLocks noGrp="1"/>
+          </p:cNvGraphicFramePr>
+          <p:nvPr/>
+        </p:nvGraphicFramePr>
+        <p:xfrm>
+          <a:off x="457200" y="1463040"/>
+          <a:ext cx="11247120" cy="4754880"/>
+        </p:xfrm>
+        <a:graphic>
+          <a:graphicData uri="http://schemas.openxmlformats.org/drawingml/2006/chart">
+            <c:chart xmlns:c="http://schemas.openxmlformats.org/drawingml/2006/chart" r:id="rId2"/>
+          </a:graphicData>
+        </a:graphic>
+      </p:graphicFrame>
+      <p:sp>
+        <p:nvSpPr>
+          <p:cNvPr id="7" name="TextBox 6"/>
+          <p:cNvSpPr txBox="1"/>
+          <p:nvPr/>
+        </p:nvSpPr>
+        <p:spPr>
+          <a:xfrm>
+            <a:off x="457200" y="6492240"/>
+            <a:ext cx="3657600" cy="274320"/>
+          </a:xfrm>
+          <a:prstGeom prst="rect">
+            <a:avLst/>
+          </a:prstGeom>
+          <a:noFill/>
+        </p:spPr>
+        <p:txBody>
+          <a:bodyPr wrap="square">
+            <a:spAutoFit/>
+          </a:bodyPr>
+          <a:lstStyle/>
+          <a:p>
+            <a:pPr>
+              <a:defRPr>
+                <a:latin typeface="Roboto"/>
+              </a:defRPr>
+            </a:pPr>
+            <a:r>
+              <a:rPr sz="900" b="0">
+                <a:solidFill>
+                  <a:srgbClr val="5F6F63"/>
+                </a:solidFill>
+                <a:latin typeface="Roboto"/>
+              </a:rPr>
+              <a:t>funding.pptx</a:t>
+            </a:r>
+          </a:p>
+        </p:txBody>
+      </p:sp>
+      <p:sp>
+        <p:nvSpPr>
+          <p:cNvPr id="8" name="TextBox 7"/>
+          <p:cNvSpPr txBox="1"/>
+          <p:nvPr/>
+        </p:nvSpPr>
+        <p:spPr>
+          <a:xfrm>
+            <a:off x="4297680" y="6492240"/>
+            <a:ext cx="3657600" cy="274320"/>
+          </a:xfrm>
+          <a:prstGeom prst="rect">
+            <a:avLst/>
+          </a:prstGeom>
+          <a:noFill/>
+        </p:spPr>
+        <p:txBody>
+          <a:bodyPr wrap="square">
+            <a:spAutoFit/>
+          </a:bodyPr>
+          <a:lstStyle/>
+          <a:p>
+            <a:pPr algn="ctr">
+              <a:defRPr>
+                <a:latin typeface="Roboto"/>
+              </a:defRPr>
+            </a:pPr>
+            <a:r>
+              <a:rPr sz="900" b="0">
+                <a:solidFill>
+                  <a:srgbClr val="5F6F63"/>
+                </a:solidFill>
+                <a:latin typeface="Roboto"/>
+              </a:rPr>
+              <a:t>Data retrieved 2pm, Tue 6 Oct 2026 · Sample data</a:t>
+            </a:r>
+          </a:p>
+        </p:txBody>
+      </p:sp>
+      <p:sp>
+        <p:nvSpPr>
+          <p:cNvPr id="9" name="TextBox 8"/>
+          <p:cNvSpPr txBox="1"/>
+          <p:nvPr/>
+        </p:nvSpPr>
+        <p:spPr>
+          <a:xfrm>
+            <a:off x="8503920" y="6492240"/>
+            <a:ext cx="3200400" cy="274320"/>
+          </a:xfrm>
+          <a:prstGeom prst="rect">
+            <a:avLst/>
+          </a:prstGeom>
+          <a:noFill/>
+        </p:spPr>
+        <p:txBody>
+          <a:bodyPr wrap="square">
+            <a:spAutoFit/>
+          </a:bodyPr>
+          <a:lstStyle/>
+          <a:p>
+            <a:pPr algn="r">
+              <a:defRPr>
+                <a:latin typeface="Roboto"/>
+              </a:defRPr>
+            </a:pPr>
+            <a:r>
+              <a:rPr sz="900" b="0">
+                <a:solidFill>
+                  <a:srgbClr val="5F6F63"/>
+                </a:solidFill>
+                <a:latin typeface="Roboto"/>
+              </a:rPr>
+              <a:t>Slide 10 of 10</a:t>
             </a:r>
           </a:p>
         </p:txBody>
@@ -4590,7 +4908,7 @@
                 </a:solidFill>
                 <a:latin typeface="Roboto"/>
               </a:rPr>
-              <a:t>Slide 2 of 9</a:t>
+              <a:t>Slide 2 of 10</a:t>
             </a:r>
           </a:p>
         </p:txBody>
@@ -5104,7 +5422,7 @@
                 </a:solidFill>
                 <a:latin typeface="Roboto"/>
               </a:rPr>
-              <a:t>Slide 3 of 9</a:t>
+              <a:t>Slide 3 of 10</a:t>
             </a:r>
           </a:p>
         </p:txBody>
@@ -5618,7 +5936,7 @@
                 </a:solidFill>
                 <a:latin typeface="Roboto"/>
               </a:rPr>
-              <a:t>Slide 4 of 9</a:t>
+              <a:t>Slide 4 of 10</a:t>
             </a:r>
           </a:p>
         </p:txBody>
@@ -6132,7 +6450,7 @@
                 </a:solidFill>
                 <a:latin typeface="Roboto"/>
               </a:rPr>
-              <a:t>Slide 5 of 9</a:t>
+              <a:t>Slide 5 of 10</a:t>
             </a:r>
           </a:p>
         </p:txBody>
@@ -6646,7 +6964,7 @@
                 </a:solidFill>
                 <a:latin typeface="Roboto"/>
               </a:rPr>
-              <a:t>Slide 6 of 9</a:t>
+              <a:t>Slide 6 of 10</a:t>
             </a:r>
           </a:p>
         </p:txBody>
@@ -6660,6 +6978,764 @@
 </file>
 
 <file path=ppt/slides/slide7.xml><?xml version="1.0" encoding="utf-8"?>
+<p:sld xmlns:a="http://schemas.openxmlformats.org/drawingml/2006/main" xmlns:p="http://schemas.openxmlformats.org/presentationml/2006/main" xmlns:r="http://schemas.openxmlformats.org/officeDocument/2006/relationships">
+  <p:cSld>
+    <p:spTree>
+      <p:nvGrpSpPr>
+        <p:cNvPr id="1" name=""/>
+        <p:cNvGrpSpPr/>
+        <p:nvPr/>
+      </p:nvGrpSpPr>
+      <p:grpSpPr/>
+      <p:sp>
+        <p:nvSpPr>
+          <p:cNvPr id="2" name="Rectangle 1"/>
+          <p:cNvSpPr/>
+          <p:nvPr/>
+        </p:nvSpPr>
+        <p:spPr>
+          <a:xfrm>
+            <a:off x="0" y="0"/>
+            <a:ext cx="12191695" cy="73152"/>
+          </a:xfrm>
+          <a:prstGeom prst="rect">
+            <a:avLst/>
+          </a:prstGeom>
+          <a:solidFill>
+            <a:srgbClr val="2F7A5D"/>
+          </a:solidFill>
+          <a:ln>
+            <a:noFill/>
+          </a:ln>
+        </p:spPr>
+        <p:style>
+          <a:lnRef idx="1">
+            <a:schemeClr val="accent1"/>
+          </a:lnRef>
+          <a:fillRef idx="3">
+            <a:schemeClr val="accent1"/>
+          </a:fillRef>
+          <a:effectRef idx="2">
+            <a:schemeClr val="accent1"/>
+          </a:effectRef>
+          <a:fontRef idx="minor">
+            <a:schemeClr val="lt1"/>
+          </a:fontRef>
+        </p:style>
+        <p:txBody>
+          <a:bodyPr rtlCol="0" anchor="ctr"/>
+          <a:lstStyle/>
+          <a:p>
+            <a:pPr algn="ctr">
+              <a:defRPr>
+                <a:latin typeface="Roboto"/>
+              </a:defRPr>
+            </a:pPr>
+          </a:p>
+        </p:txBody>
+      </p:sp>
+      <p:sp>
+        <p:nvSpPr>
+          <p:cNvPr id="3" name="TextBox 2"/>
+          <p:cNvSpPr txBox="1"/>
+          <p:nvPr/>
+        </p:nvSpPr>
+        <p:spPr>
+          <a:xfrm>
+            <a:off x="457200" y="164592"/>
+            <a:ext cx="7315200" cy="274320"/>
+          </a:xfrm>
+          <a:prstGeom prst="rect">
+            <a:avLst/>
+          </a:prstGeom>
+          <a:noFill/>
+        </p:spPr>
+        <p:txBody>
+          <a:bodyPr wrap="square">
+            <a:spAutoFit/>
+          </a:bodyPr>
+          <a:lstStyle/>
+          <a:p>
+            <a:pPr>
+              <a:defRPr>
+                <a:latin typeface="Roboto"/>
+              </a:defRPr>
+            </a:pPr>
+            <a:r>
+              <a:rPr sz="1000" b="0">
+                <a:solidFill>
+                  <a:srgbClr val="5F6F63"/>
+                </a:solidFill>
+                <a:latin typeface="Roboto"/>
+              </a:rPr>
+              <a:t>Sample Community Services Ltd · Which funding is worth chasing?</a:t>
+            </a:r>
+          </a:p>
+        </p:txBody>
+      </p:sp>
+      <p:sp>
+        <p:nvSpPr>
+          <p:cNvPr id="4" name="TextBox 3"/>
+          <p:cNvSpPr txBox="1"/>
+          <p:nvPr/>
+        </p:nvSpPr>
+        <p:spPr>
+          <a:xfrm>
+            <a:off x="457200" y="411480"/>
+            <a:ext cx="11247120" cy="548640"/>
+          </a:xfrm>
+          <a:prstGeom prst="rect">
+            <a:avLst/>
+          </a:prstGeom>
+          <a:noFill/>
+        </p:spPr>
+        <p:txBody>
+          <a:bodyPr wrap="square">
+            <a:spAutoFit/>
+          </a:bodyPr>
+          <a:lstStyle/>
+          <a:p>
+            <a:pPr>
+              <a:defRPr>
+                <a:latin typeface="Roboto"/>
+              </a:defRPr>
+            </a:pPr>
+            <a:r>
+              <a:rPr sz="2400" b="1">
+                <a:solidFill>
+                  <a:srgbClr val="25342A"/>
+                </a:solidFill>
+                <a:latin typeface="Roboto"/>
+              </a:rPr>
+              <a:t>Headline numbers · Every source at once</a:t>
+            </a:r>
+          </a:p>
+        </p:txBody>
+      </p:sp>
+      <p:sp>
+        <p:nvSpPr>
+          <p:cNvPr id="5" name="Rectangle 4"/>
+          <p:cNvSpPr/>
+          <p:nvPr/>
+        </p:nvSpPr>
+        <p:spPr>
+          <a:xfrm>
+            <a:off x="457200" y="1645920"/>
+            <a:ext cx="3576218" cy="2011680"/>
+          </a:xfrm>
+          <a:prstGeom prst="rect">
+            <a:avLst/>
+          </a:prstGeom>
+          <a:solidFill>
+            <a:srgbClr val="F7FAF7"/>
+          </a:solidFill>
+          <a:ln>
+            <a:solidFill>
+              <a:srgbClr val="DCE8DC"/>
+            </a:solidFill>
+          </a:ln>
+        </p:spPr>
+        <p:style>
+          <a:lnRef idx="1">
+            <a:schemeClr val="accent1"/>
+          </a:lnRef>
+          <a:fillRef idx="3">
+            <a:schemeClr val="accent1"/>
+          </a:fillRef>
+          <a:effectRef idx="2">
+            <a:schemeClr val="accent1"/>
+          </a:effectRef>
+          <a:fontRef idx="minor">
+            <a:schemeClr val="lt1"/>
+          </a:fontRef>
+        </p:style>
+        <p:txBody>
+          <a:bodyPr rtlCol="0" anchor="ctr"/>
+          <a:lstStyle/>
+          <a:p>
+            <a:pPr algn="ctr">
+              <a:defRPr>
+                <a:latin typeface="Roboto"/>
+              </a:defRPr>
+            </a:pPr>
+          </a:p>
+        </p:txBody>
+      </p:sp>
+      <p:sp>
+        <p:nvSpPr>
+          <p:cNvPr id="6" name="TextBox 5"/>
+          <p:cNvSpPr txBox="1"/>
+          <p:nvPr/>
+        </p:nvSpPr>
+        <p:spPr>
+          <a:xfrm>
+            <a:off x="640080" y="1783080"/>
+            <a:ext cx="3210458" cy="457200"/>
+          </a:xfrm>
+          <a:prstGeom prst="rect">
+            <a:avLst/>
+          </a:prstGeom>
+          <a:noFill/>
+        </p:spPr>
+        <p:txBody>
+          <a:bodyPr wrap="square">
+            <a:spAutoFit/>
+          </a:bodyPr>
+          <a:lstStyle/>
+          <a:p>
+            <a:pPr>
+              <a:defRPr>
+                <a:latin typeface="Roboto"/>
+              </a:defRPr>
+            </a:pPr>
+            <a:r>
+              <a:rPr sz="1200" b="0">
+                <a:solidFill>
+                  <a:srgbClr val="5F6F63"/>
+                </a:solidFill>
+                <a:latin typeface="Roboto"/>
+              </a:rPr>
+              <a:t>Cheapest to raise: Grants</a:t>
+            </a:r>
+          </a:p>
+        </p:txBody>
+      </p:sp>
+      <p:sp>
+        <p:nvSpPr>
+          <p:cNvPr id="7" name="TextBox 6"/>
+          <p:cNvSpPr txBox="1"/>
+          <p:nvPr/>
+        </p:nvSpPr>
+        <p:spPr>
+          <a:xfrm>
+            <a:off x="640080" y="2240280"/>
+            <a:ext cx="3210458" cy="731520"/>
+          </a:xfrm>
+          <a:prstGeom prst="rect">
+            <a:avLst/>
+          </a:prstGeom>
+          <a:noFill/>
+        </p:spPr>
+        <p:txBody>
+          <a:bodyPr wrap="square">
+            <a:spAutoFit/>
+          </a:bodyPr>
+          <a:lstStyle/>
+          <a:p>
+            <a:pPr>
+              <a:defRPr>
+                <a:latin typeface="Roboto"/>
+              </a:defRPr>
+            </a:pPr>
+            <a:r>
+              <a:rPr sz="3000" b="1">
+                <a:solidFill>
+                  <a:srgbClr val="2F7A5D"/>
+                </a:solidFill>
+                <a:latin typeface="Roboto"/>
+              </a:rPr>
+              <a:t>9¢</a:t>
+            </a:r>
+          </a:p>
+        </p:txBody>
+      </p:sp>
+      <p:sp>
+        <p:nvSpPr>
+          <p:cNvPr id="8" name="TextBox 7"/>
+          <p:cNvSpPr txBox="1"/>
+          <p:nvPr/>
+        </p:nvSpPr>
+        <p:spPr>
+          <a:xfrm>
+            <a:off x="640080" y="3017520"/>
+            <a:ext cx="3210458" cy="548640"/>
+          </a:xfrm>
+          <a:prstGeom prst="rect">
+            <a:avLst/>
+          </a:prstGeom>
+          <a:noFill/>
+        </p:spPr>
+        <p:txBody>
+          <a:bodyPr wrap="square">
+            <a:spAutoFit/>
+          </a:bodyPr>
+          <a:lstStyle/>
+          <a:p>
+            <a:pPr>
+              <a:defRPr>
+                <a:latin typeface="Roboto"/>
+              </a:defRPr>
+            </a:pPr>
+            <a:r>
+              <a:rPr sz="1100" b="0">
+                <a:solidFill>
+                  <a:srgbClr val="5F6F63"/>
+                </a:solidFill>
+                <a:latin typeface="Roboto"/>
+              </a:rPr>
+              <a:t>per $1 raised in September</a:t>
+            </a:r>
+          </a:p>
+        </p:txBody>
+      </p:sp>
+      <p:sp>
+        <p:nvSpPr>
+          <p:cNvPr id="9" name="Rectangle 8"/>
+          <p:cNvSpPr/>
+          <p:nvPr/>
+        </p:nvSpPr>
+        <p:spPr>
+          <a:xfrm>
+            <a:off x="4307738" y="1645920"/>
+            <a:ext cx="3576218" cy="2011680"/>
+          </a:xfrm>
+          <a:prstGeom prst="rect">
+            <a:avLst/>
+          </a:prstGeom>
+          <a:solidFill>
+            <a:srgbClr val="F7FAF7"/>
+          </a:solidFill>
+          <a:ln>
+            <a:solidFill>
+              <a:srgbClr val="DCE8DC"/>
+            </a:solidFill>
+          </a:ln>
+        </p:spPr>
+        <p:style>
+          <a:lnRef idx="1">
+            <a:schemeClr val="accent1"/>
+          </a:lnRef>
+          <a:fillRef idx="3">
+            <a:schemeClr val="accent1"/>
+          </a:fillRef>
+          <a:effectRef idx="2">
+            <a:schemeClr val="accent1"/>
+          </a:effectRef>
+          <a:fontRef idx="minor">
+            <a:schemeClr val="lt1"/>
+          </a:fontRef>
+        </p:style>
+        <p:txBody>
+          <a:bodyPr rtlCol="0" anchor="ctr"/>
+          <a:lstStyle/>
+          <a:p>
+            <a:pPr algn="ctr">
+              <a:defRPr>
+                <a:latin typeface="Roboto"/>
+              </a:defRPr>
+            </a:pPr>
+          </a:p>
+        </p:txBody>
+      </p:sp>
+      <p:sp>
+        <p:nvSpPr>
+          <p:cNvPr id="10" name="TextBox 9"/>
+          <p:cNvSpPr txBox="1"/>
+          <p:nvPr/>
+        </p:nvSpPr>
+        <p:spPr>
+          <a:xfrm>
+            <a:off x="4490618" y="1783080"/>
+            <a:ext cx="3210458" cy="457200"/>
+          </a:xfrm>
+          <a:prstGeom prst="rect">
+            <a:avLst/>
+          </a:prstGeom>
+          <a:noFill/>
+        </p:spPr>
+        <p:txBody>
+          <a:bodyPr wrap="square">
+            <a:spAutoFit/>
+          </a:bodyPr>
+          <a:lstStyle/>
+          <a:p>
+            <a:pPr>
+              <a:defRPr>
+                <a:latin typeface="Roboto"/>
+              </a:defRPr>
+            </a:pPr>
+            <a:r>
+              <a:rPr sz="1200" b="0">
+                <a:solidFill>
+                  <a:srgbClr val="5F6F63"/>
+                </a:solidFill>
+                <a:latin typeface="Roboto"/>
+              </a:rPr>
+              <a:t>Dearest to raise: Fundraising events</a:t>
+            </a:r>
+          </a:p>
+        </p:txBody>
+      </p:sp>
+      <p:sp>
+        <p:nvSpPr>
+          <p:cNvPr id="11" name="TextBox 10"/>
+          <p:cNvSpPr txBox="1"/>
+          <p:nvPr/>
+        </p:nvSpPr>
+        <p:spPr>
+          <a:xfrm>
+            <a:off x="4490618" y="2240280"/>
+            <a:ext cx="3210458" cy="731520"/>
+          </a:xfrm>
+          <a:prstGeom prst="rect">
+            <a:avLst/>
+          </a:prstGeom>
+          <a:noFill/>
+        </p:spPr>
+        <p:txBody>
+          <a:bodyPr wrap="square">
+            <a:spAutoFit/>
+          </a:bodyPr>
+          <a:lstStyle/>
+          <a:p>
+            <a:pPr>
+              <a:defRPr>
+                <a:latin typeface="Roboto"/>
+              </a:defRPr>
+            </a:pPr>
+            <a:r>
+              <a:rPr sz="3000" b="1">
+                <a:solidFill>
+                  <a:srgbClr val="2F7A5D"/>
+                </a:solidFill>
+                <a:latin typeface="Roboto"/>
+              </a:rPr>
+              <a:t>41¢</a:t>
+            </a:r>
+          </a:p>
+        </p:txBody>
+      </p:sp>
+      <p:sp>
+        <p:nvSpPr>
+          <p:cNvPr id="12" name="TextBox 11"/>
+          <p:cNvSpPr txBox="1"/>
+          <p:nvPr/>
+        </p:nvSpPr>
+        <p:spPr>
+          <a:xfrm>
+            <a:off x="4490618" y="3017520"/>
+            <a:ext cx="3210458" cy="548640"/>
+          </a:xfrm>
+          <a:prstGeom prst="rect">
+            <a:avLst/>
+          </a:prstGeom>
+          <a:noFill/>
+        </p:spPr>
+        <p:txBody>
+          <a:bodyPr wrap="square">
+            <a:spAutoFit/>
+          </a:bodyPr>
+          <a:lstStyle/>
+          <a:p>
+            <a:pPr>
+              <a:defRPr>
+                <a:latin typeface="Roboto"/>
+              </a:defRPr>
+            </a:pPr>
+            <a:r>
+              <a:rPr sz="1100" b="0">
+                <a:solidFill>
+                  <a:srgbClr val="5F6F63"/>
+                </a:solidFill>
+                <a:latin typeface="Roboto"/>
+              </a:rPr>
+              <a:t>per $1 raised in September</a:t>
+            </a:r>
+          </a:p>
+        </p:txBody>
+      </p:sp>
+      <p:sp>
+        <p:nvSpPr>
+          <p:cNvPr id="13" name="Rectangle 12"/>
+          <p:cNvSpPr/>
+          <p:nvPr/>
+        </p:nvSpPr>
+        <p:spPr>
+          <a:xfrm>
+            <a:off x="8158276" y="1645920"/>
+            <a:ext cx="3576218" cy="2011680"/>
+          </a:xfrm>
+          <a:prstGeom prst="rect">
+            <a:avLst/>
+          </a:prstGeom>
+          <a:solidFill>
+            <a:srgbClr val="F7FAF7"/>
+          </a:solidFill>
+          <a:ln>
+            <a:solidFill>
+              <a:srgbClr val="DCE8DC"/>
+            </a:solidFill>
+          </a:ln>
+        </p:spPr>
+        <p:style>
+          <a:lnRef idx="1">
+            <a:schemeClr val="accent1"/>
+          </a:lnRef>
+          <a:fillRef idx="3">
+            <a:schemeClr val="accent1"/>
+          </a:fillRef>
+          <a:effectRef idx="2">
+            <a:schemeClr val="accent1"/>
+          </a:effectRef>
+          <a:fontRef idx="minor">
+            <a:schemeClr val="lt1"/>
+          </a:fontRef>
+        </p:style>
+        <p:txBody>
+          <a:bodyPr rtlCol="0" anchor="ctr"/>
+          <a:lstStyle/>
+          <a:p>
+            <a:pPr algn="ctr">
+              <a:defRPr>
+                <a:latin typeface="Roboto"/>
+              </a:defRPr>
+            </a:pPr>
+          </a:p>
+        </p:txBody>
+      </p:sp>
+      <p:sp>
+        <p:nvSpPr>
+          <p:cNvPr id="14" name="TextBox 13"/>
+          <p:cNvSpPr txBox="1"/>
+          <p:nvPr/>
+        </p:nvSpPr>
+        <p:spPr>
+          <a:xfrm>
+            <a:off x="8341156" y="1783080"/>
+            <a:ext cx="3210458" cy="457200"/>
+          </a:xfrm>
+          <a:prstGeom prst="rect">
+            <a:avLst/>
+          </a:prstGeom>
+          <a:noFill/>
+        </p:spPr>
+        <p:txBody>
+          <a:bodyPr wrap="square">
+            <a:spAutoFit/>
+          </a:bodyPr>
+          <a:lstStyle/>
+          <a:p>
+            <a:pPr>
+              <a:defRPr>
+                <a:latin typeface="Roboto"/>
+              </a:defRPr>
+            </a:pPr>
+            <a:r>
+              <a:rPr sz="1200" b="0">
+                <a:solidFill>
+                  <a:srgbClr val="5F6F63"/>
+                </a:solidFill>
+                <a:latin typeface="Roboto"/>
+              </a:rPr>
+              <a:t>Raised, year to date</a:t>
+            </a:r>
+          </a:p>
+        </p:txBody>
+      </p:sp>
+      <p:sp>
+        <p:nvSpPr>
+          <p:cNvPr id="15" name="TextBox 14"/>
+          <p:cNvSpPr txBox="1"/>
+          <p:nvPr/>
+        </p:nvSpPr>
+        <p:spPr>
+          <a:xfrm>
+            <a:off x="8341156" y="2240280"/>
+            <a:ext cx="3210458" cy="731520"/>
+          </a:xfrm>
+          <a:prstGeom prst="rect">
+            <a:avLst/>
+          </a:prstGeom>
+          <a:noFill/>
+        </p:spPr>
+        <p:txBody>
+          <a:bodyPr wrap="square">
+            <a:spAutoFit/>
+          </a:bodyPr>
+          <a:lstStyle/>
+          <a:p>
+            <a:pPr>
+              <a:defRPr>
+                <a:latin typeface="Roboto"/>
+              </a:defRPr>
+            </a:pPr>
+            <a:r>
+              <a:rPr sz="3000" b="1">
+                <a:solidFill>
+                  <a:srgbClr val="2F7A5D"/>
+                </a:solidFill>
+                <a:latin typeface="Roboto"/>
+              </a:rPr>
+              <a:t>$325,518</a:t>
+            </a:r>
+          </a:p>
+        </p:txBody>
+      </p:sp>
+      <p:sp>
+        <p:nvSpPr>
+          <p:cNvPr id="16" name="TextBox 15"/>
+          <p:cNvSpPr txBox="1"/>
+          <p:nvPr/>
+        </p:nvSpPr>
+        <p:spPr>
+          <a:xfrm>
+            <a:off x="8341156" y="3017520"/>
+            <a:ext cx="3210458" cy="548640"/>
+          </a:xfrm>
+          <a:prstGeom prst="rect">
+            <a:avLst/>
+          </a:prstGeom>
+          <a:noFill/>
+        </p:spPr>
+        <p:txBody>
+          <a:bodyPr wrap="square">
+            <a:spAutoFit/>
+          </a:bodyPr>
+          <a:lstStyle/>
+          <a:p>
+            <a:pPr>
+              <a:defRPr>
+                <a:latin typeface="Roboto"/>
+              </a:defRPr>
+            </a:pPr>
+            <a:r>
+              <a:rPr sz="1100" b="0">
+                <a:solidFill>
+                  <a:srgbClr val="5F6F63"/>
+                </a:solidFill>
+                <a:latin typeface="Roboto"/>
+              </a:rPr>
+              <a:t>Jul to Sep 2026</a:t>
+            </a:r>
+          </a:p>
+        </p:txBody>
+      </p:sp>
+      <p:sp>
+        <p:nvSpPr>
+          <p:cNvPr id="17" name="TextBox 16"/>
+          <p:cNvSpPr txBox="1"/>
+          <p:nvPr/>
+        </p:nvSpPr>
+        <p:spPr>
+          <a:xfrm>
+            <a:off x="457200" y="6492240"/>
+            <a:ext cx="3657600" cy="274320"/>
+          </a:xfrm>
+          <a:prstGeom prst="rect">
+            <a:avLst/>
+          </a:prstGeom>
+          <a:noFill/>
+        </p:spPr>
+        <p:txBody>
+          <a:bodyPr wrap="square">
+            <a:spAutoFit/>
+          </a:bodyPr>
+          <a:lstStyle/>
+          <a:p>
+            <a:pPr>
+              <a:defRPr>
+                <a:latin typeface="Roboto"/>
+              </a:defRPr>
+            </a:pPr>
+            <a:r>
+              <a:rPr sz="900" b="0">
+                <a:solidFill>
+                  <a:srgbClr val="5F6F63"/>
+                </a:solidFill>
+                <a:latin typeface="Roboto"/>
+              </a:rPr>
+              <a:t>funding.pptx</a:t>
+            </a:r>
+          </a:p>
+        </p:txBody>
+      </p:sp>
+      <p:sp>
+        <p:nvSpPr>
+          <p:cNvPr id="18" name="TextBox 17"/>
+          <p:cNvSpPr txBox="1"/>
+          <p:nvPr/>
+        </p:nvSpPr>
+        <p:spPr>
+          <a:xfrm>
+            <a:off x="4297680" y="6492240"/>
+            <a:ext cx="3657600" cy="274320"/>
+          </a:xfrm>
+          <a:prstGeom prst="rect">
+            <a:avLst/>
+          </a:prstGeom>
+          <a:noFill/>
+        </p:spPr>
+        <p:txBody>
+          <a:bodyPr wrap="square">
+            <a:spAutoFit/>
+          </a:bodyPr>
+          <a:lstStyle/>
+          <a:p>
+            <a:pPr algn="ctr">
+              <a:defRPr>
+                <a:latin typeface="Roboto"/>
+              </a:defRPr>
+            </a:pPr>
+            <a:r>
+              <a:rPr sz="900" b="0">
+                <a:solidFill>
+                  <a:srgbClr val="5F6F63"/>
+                </a:solidFill>
+                <a:latin typeface="Roboto"/>
+              </a:rPr>
+              <a:t>Data retrieved 2pm, Tue 6 Oct 2026 · Sample data</a:t>
+            </a:r>
+          </a:p>
+        </p:txBody>
+      </p:sp>
+      <p:sp>
+        <p:nvSpPr>
+          <p:cNvPr id="19" name="TextBox 18"/>
+          <p:cNvSpPr txBox="1"/>
+          <p:nvPr/>
+        </p:nvSpPr>
+        <p:spPr>
+          <a:xfrm>
+            <a:off x="8503920" y="6492240"/>
+            <a:ext cx="3200400" cy="274320"/>
+          </a:xfrm>
+          <a:prstGeom prst="rect">
+            <a:avLst/>
+          </a:prstGeom>
+          <a:noFill/>
+        </p:spPr>
+        <p:txBody>
+          <a:bodyPr wrap="square">
+            <a:spAutoFit/>
+          </a:bodyPr>
+          <a:lstStyle/>
+          <a:p>
+            <a:pPr algn="r">
+              <a:defRPr>
+                <a:latin typeface="Roboto"/>
+              </a:defRPr>
+            </a:pPr>
+            <a:r>
+              <a:rPr sz="900" b="0">
+                <a:solidFill>
+                  <a:srgbClr val="5F6F63"/>
+                </a:solidFill>
+                <a:latin typeface="Roboto"/>
+              </a:rPr>
+              <a:t>Slide 7 of 10</a:t>
+            </a:r>
+          </a:p>
+        </p:txBody>
+      </p:sp>
+    </p:spTree>
+  </p:cSld>
+  <p:clrMapOvr>
+    <a:masterClrMapping/>
+  </p:clrMapOvr>
+</p:sld>
+</file>
+
+<file path=ppt/slides/slide8.xml><?xml version="1.0" encoding="utf-8"?>
 <p:sld xmlns:a="http://schemas.openxmlformats.org/drawingml/2006/main" xmlns:p="http://schemas.openxmlformats.org/presentationml/2006/main" xmlns:r="http://schemas.openxmlformats.org/officeDocument/2006/relationships">
   <p:cSld>
     <p:spTree>
@@ -7474,324 +8550,7 @@
                 </a:solidFill>
                 <a:latin typeface="Roboto"/>
               </a:rPr>
-              <a:t>Slide 7 of 9</a:t>
-            </a:r>
-          </a:p>
-        </p:txBody>
-      </p:sp>
-    </p:spTree>
-  </p:cSld>
-  <p:clrMapOvr>
-    <a:masterClrMapping/>
-  </p:clrMapOvr>
-</p:sld>
-</file>
-
-<file path=ppt/slides/slide8.xml><?xml version="1.0" encoding="utf-8"?>
-<p:sld xmlns:a="http://schemas.openxmlformats.org/drawingml/2006/main" xmlns:p="http://schemas.openxmlformats.org/presentationml/2006/main" xmlns:r="http://schemas.openxmlformats.org/officeDocument/2006/relationships">
-  <p:cSld>
-    <p:spTree>
-      <p:nvGrpSpPr>
-        <p:cNvPr id="1" name=""/>
-        <p:cNvGrpSpPr/>
-        <p:nvPr/>
-      </p:nvGrpSpPr>
-      <p:grpSpPr/>
-      <p:sp>
-        <p:nvSpPr>
-          <p:cNvPr id="2" name="Rectangle 1"/>
-          <p:cNvSpPr/>
-          <p:nvPr/>
-        </p:nvSpPr>
-        <p:spPr>
-          <a:xfrm>
-            <a:off x="0" y="0"/>
-            <a:ext cx="12191695" cy="73152"/>
-          </a:xfrm>
-          <a:prstGeom prst="rect">
-            <a:avLst/>
-          </a:prstGeom>
-          <a:solidFill>
-            <a:srgbClr val="2F7A5D"/>
-          </a:solidFill>
-          <a:ln>
-            <a:noFill/>
-          </a:ln>
-        </p:spPr>
-        <p:style>
-          <a:lnRef idx="1">
-            <a:schemeClr val="accent1"/>
-          </a:lnRef>
-          <a:fillRef idx="3">
-            <a:schemeClr val="accent1"/>
-          </a:fillRef>
-          <a:effectRef idx="2">
-            <a:schemeClr val="accent1"/>
-          </a:effectRef>
-          <a:fontRef idx="minor">
-            <a:schemeClr val="lt1"/>
-          </a:fontRef>
-        </p:style>
-        <p:txBody>
-          <a:bodyPr rtlCol="0" anchor="ctr"/>
-          <a:lstStyle/>
-          <a:p>
-            <a:pPr algn="ctr">
-              <a:defRPr>
-                <a:latin typeface="Roboto"/>
-              </a:defRPr>
-            </a:pPr>
-          </a:p>
-        </p:txBody>
-      </p:sp>
-      <p:sp>
-        <p:nvSpPr>
-          <p:cNvPr id="3" name="TextBox 2"/>
-          <p:cNvSpPr txBox="1"/>
-          <p:nvPr/>
-        </p:nvSpPr>
-        <p:spPr>
-          <a:xfrm>
-            <a:off x="457200" y="164592"/>
-            <a:ext cx="7315200" cy="274320"/>
-          </a:xfrm>
-          <a:prstGeom prst="rect">
-            <a:avLst/>
-          </a:prstGeom>
-          <a:noFill/>
-        </p:spPr>
-        <p:txBody>
-          <a:bodyPr wrap="square">
-            <a:spAutoFit/>
-          </a:bodyPr>
-          <a:lstStyle/>
-          <a:p>
-            <a:pPr>
-              <a:defRPr>
-                <a:latin typeface="Roboto"/>
-              </a:defRPr>
-            </a:pPr>
-            <a:r>
-              <a:rPr sz="1000" b="0">
-                <a:solidFill>
-                  <a:srgbClr val="5F6F63"/>
-                </a:solidFill>
-                <a:latin typeface="Roboto"/>
-              </a:rPr>
-              <a:t>Sample Community Services Ltd · Which funding is worth chasing?</a:t>
-            </a:r>
-          </a:p>
-        </p:txBody>
-      </p:sp>
-      <p:sp>
-        <p:nvSpPr>
-          <p:cNvPr id="4" name="TextBox 3"/>
-          <p:cNvSpPr txBox="1"/>
-          <p:nvPr/>
-        </p:nvSpPr>
-        <p:spPr>
-          <a:xfrm>
-            <a:off x="457200" y="411480"/>
-            <a:ext cx="11247120" cy="548640"/>
-          </a:xfrm>
-          <a:prstGeom prst="rect">
-            <a:avLst/>
-          </a:prstGeom>
-          <a:noFill/>
-        </p:spPr>
-        <p:txBody>
-          <a:bodyPr wrap="square">
-            <a:spAutoFit/>
-          </a:bodyPr>
-          <a:lstStyle/>
-          <a:p>
-            <a:pPr>
-              <a:defRPr>
-                <a:latin typeface="Roboto"/>
-              </a:defRPr>
-            </a:pPr>
-            <a:r>
-              <a:rPr sz="2400" b="1">
-                <a:solidFill>
-                  <a:srgbClr val="25342A"/>
-                </a:solidFill>
-                <a:latin typeface="Roboto"/>
-              </a:rPr>
-              <a:t>Raised and left after costs, by month · Raised $ · Every source at once</a:t>
-            </a:r>
-          </a:p>
-        </p:txBody>
-      </p:sp>
-      <p:sp>
-        <p:nvSpPr>
-          <p:cNvPr id="5" name="TextBox 4"/>
-          <p:cNvSpPr txBox="1"/>
-          <p:nvPr/>
-        </p:nvSpPr>
-        <p:spPr>
-          <a:xfrm>
-            <a:off x="457200" y="960120"/>
-            <a:ext cx="11247120" cy="457200"/>
-          </a:xfrm>
-          <a:prstGeom prst="rect">
-            <a:avLst/>
-          </a:prstGeom>
-          <a:noFill/>
-        </p:spPr>
-        <p:txBody>
-          <a:bodyPr wrap="square">
-            <a:spAutoFit/>
-          </a:bodyPr>
-          <a:lstStyle/>
-          <a:p>
-            <a:pPr>
-              <a:defRPr>
-                <a:latin typeface="Roboto"/>
-              </a:defRPr>
-            </a:pPr>
-            <a:r>
-              <a:rPr sz="1200" b="0">
-                <a:solidFill>
-                  <a:srgbClr val="5F6F63"/>
-                </a:solidFill>
-                <a:latin typeface="Roboto"/>
-              </a:rPr>
-              <a:t>Tap a month for its workings.</a:t>
-            </a:r>
-          </a:p>
-        </p:txBody>
-      </p:sp>
-      <p:graphicFrame>
-        <p:nvGraphicFramePr>
-          <p:cNvPr id="6" name="Chart 5"/>
-          <p:cNvGraphicFramePr>
-            <a:graphicFrameLocks noGrp="1"/>
-          </p:cNvGraphicFramePr>
-          <p:nvPr/>
-        </p:nvGraphicFramePr>
-        <p:xfrm>
-          <a:off x="457200" y="1463040"/>
-          <a:ext cx="11247120" cy="4754880"/>
-        </p:xfrm>
-        <a:graphic>
-          <a:graphicData uri="http://schemas.openxmlformats.org/drawingml/2006/chart">
-            <c:chart xmlns:c="http://schemas.openxmlformats.org/drawingml/2006/chart" r:id="rId2"/>
-          </a:graphicData>
-        </a:graphic>
-      </p:graphicFrame>
-      <p:sp>
-        <p:nvSpPr>
-          <p:cNvPr id="7" name="TextBox 6"/>
-          <p:cNvSpPr txBox="1"/>
-          <p:nvPr/>
-        </p:nvSpPr>
-        <p:spPr>
-          <a:xfrm>
-            <a:off x="457200" y="6492240"/>
-            <a:ext cx="3657600" cy="274320"/>
-          </a:xfrm>
-          <a:prstGeom prst="rect">
-            <a:avLst/>
-          </a:prstGeom>
-          <a:noFill/>
-        </p:spPr>
-        <p:txBody>
-          <a:bodyPr wrap="square">
-            <a:spAutoFit/>
-          </a:bodyPr>
-          <a:lstStyle/>
-          <a:p>
-            <a:pPr>
-              <a:defRPr>
-                <a:latin typeface="Roboto"/>
-              </a:defRPr>
-            </a:pPr>
-            <a:r>
-              <a:rPr sz="900" b="0">
-                <a:solidFill>
-                  <a:srgbClr val="5F6F63"/>
-                </a:solidFill>
-                <a:latin typeface="Roboto"/>
-              </a:rPr>
-              <a:t>funding.pptx</a:t>
-            </a:r>
-          </a:p>
-        </p:txBody>
-      </p:sp>
-      <p:sp>
-        <p:nvSpPr>
-          <p:cNvPr id="8" name="TextBox 7"/>
-          <p:cNvSpPr txBox="1"/>
-          <p:nvPr/>
-        </p:nvSpPr>
-        <p:spPr>
-          <a:xfrm>
-            <a:off x="4297680" y="6492240"/>
-            <a:ext cx="3657600" cy="274320"/>
-          </a:xfrm>
-          <a:prstGeom prst="rect">
-            <a:avLst/>
-          </a:prstGeom>
-          <a:noFill/>
-        </p:spPr>
-        <p:txBody>
-          <a:bodyPr wrap="square">
-            <a:spAutoFit/>
-          </a:bodyPr>
-          <a:lstStyle/>
-          <a:p>
-            <a:pPr algn="ctr">
-              <a:defRPr>
-                <a:latin typeface="Roboto"/>
-              </a:defRPr>
-            </a:pPr>
-            <a:r>
-              <a:rPr sz="900" b="0">
-                <a:solidFill>
-                  <a:srgbClr val="5F6F63"/>
-                </a:solidFill>
-                <a:latin typeface="Roboto"/>
-              </a:rPr>
-              <a:t>Data retrieved 2pm, Tue 6 Oct 2026 · Sample data</a:t>
-            </a:r>
-          </a:p>
-        </p:txBody>
-      </p:sp>
-      <p:sp>
-        <p:nvSpPr>
-          <p:cNvPr id="9" name="TextBox 8"/>
-          <p:cNvSpPr txBox="1"/>
-          <p:nvPr/>
-        </p:nvSpPr>
-        <p:spPr>
-          <a:xfrm>
-            <a:off x="8503920" y="6492240"/>
-            <a:ext cx="3200400" cy="274320"/>
-          </a:xfrm>
-          <a:prstGeom prst="rect">
-            <a:avLst/>
-          </a:prstGeom>
-          <a:noFill/>
-        </p:spPr>
-        <p:txBody>
-          <a:bodyPr wrap="square">
-            <a:spAutoFit/>
-          </a:bodyPr>
-          <a:lstStyle/>
-          <a:p>
-            <a:pPr algn="r">
-              <a:defRPr>
-                <a:latin typeface="Roboto"/>
-              </a:defRPr>
-            </a:pPr>
-            <a:r>
-              <a:rPr sz="900" b="0">
-                <a:solidFill>
-                  <a:srgbClr val="5F6F63"/>
-                </a:solidFill>
-                <a:latin typeface="Roboto"/>
-              </a:rPr>
-              <a:t>Slide 8 of 9</a:t>
+              <a:t>Slide 8 of 10</a:t>
             </a:r>
           </a:p>
         </p:txBody>
@@ -7934,7 +8693,7 @@
                 </a:solidFill>
                 <a:latin typeface="Roboto"/>
               </a:rPr>
-              <a:t>Raised and left after costs, by month · Left after costs $ · Every source at once</a:t>
+              <a:t>Raised and left after costs, by month · Raised $ · Every source at once</a:t>
             </a:r>
           </a:p>
         </p:txBody>
@@ -8108,7 +8867,7 @@
                 </a:solidFill>
                 <a:latin typeface="Roboto"/>
               </a:rPr>
-              <a:t>Slide 9 of 9</a:t>
+              <a:t>Slide 9 of 10</a:t>
             </a:r>
           </a:p>
         </p:txBody>

--- a/media/exports/reports/2026-09/funding.pptx
+++ b/media/exports/reports/2026-09/funding.pptx
@@ -6,15 +6,11 @@
   </p:sldMasterIdLst>
   <p:sldIdLst>
     <p:sldId id="256" r:id="rId7"/>
-    <p:sldId id="257" r:id="rId8"/>
-    <p:sldId id="258" r:id="rId9"/>
-    <p:sldId id="259" r:id="rId10"/>
-    <p:sldId id="260" r:id="rId11"/>
-    <p:sldId id="261" r:id="rId12"/>
-    <p:sldId id="262" r:id="rId13"/>
-    <p:sldId id="263" r:id="rId14"/>
-    <p:sldId id="264" r:id="rId15"/>
-    <p:sldId id="265" r:id="rId16"/>
+    <p:sldId id="257" r:id="rId9"/>
+    <p:sldId id="258" r:id="rId10"/>
+    <p:sldId id="259" r:id="rId11"/>
+    <p:sldId id="260" r:id="rId12"/>
+    <p:sldId id="261" r:id="rId13"/>
   </p:sldIdLst>
   <p:sldSz cx="12191695" cy="6858000" type="screen4x3"/>
   <p:notesSz cx="6858000" cy="9144000"/>
@@ -120,8 +116,19 @@
 <c:chartSpace xmlns:c="http://schemas.openxmlformats.org/drawingml/2006/chart" xmlns:a="http://schemas.openxmlformats.org/drawingml/2006/main" xmlns:r="http://schemas.openxmlformats.org/officeDocument/2006/relationships">
   <c:date1904 val="0"/>
   <c:chart>
-    <c:autoTitleDeleted val="0"/>
+    <c:autoTitleDeleted val="1"/>
     <c:plotArea>
+      <c:layout>
+        <c:manualLayout>
+          <c:layoutTarget val="inner"/>
+          <c:xMode val="edge"/>
+          <c:yMode val="edge"/>
+          <c:x val="0.3"/>
+          <c:y val="0.03"/>
+          <c:w val="0.58"/>
+          <c:h val="0.88"/>
+        </c:manualLayout>
+      </c:layout>
       <c:barChart>
         <c:barDir val="bar"/>
         <c:grouping val="clustered"/>
@@ -134,7 +141,7 @@
               <c:strCache>
                 <c:ptCount val="1"/>
                 <c:pt idx="0">
-                  <c:v>Value</c:v>
+                  <c:v>Cost to raise a dollar</c:v>
                 </c:pt>
               </c:strCache>
             </c:strRef>
@@ -206,7 +213,7 @@
             <a:lstStyle/>
             <a:p>
               <a:pPr>
-                <a:defRPr sz="1100"/>
+                <a:defRPr sz="1000"/>
               </a:pPr>
             </a:p>
           </c:txPr>
@@ -243,7 +250,7 @@
           <a:lstStyle/>
           <a:p>
             <a:pPr>
-              <a:defRPr sz="1200"/>
+              <a:defRPr sz="1100"/>
             </a:pPr>
           </a:p>
         </c:txPr>
@@ -256,7 +263,10 @@
       </c:catAx>
       <c:valAx>
         <c:axId val="-2113994440"/>
-        <c:scaling/>
+        <c:scaling>
+          <c:max val="47.15"/>
+          <c:min val="0.0"/>
+        </c:scaling>
         <c:delete/>
         <c:axPos val="b"/>
         <c:majorTickMark val="out"/>
@@ -291,9 +301,19 @@
   <c:date1904 val="0"/>
   <c:roundedCorners val="0"/>
   <c:chart>
-    <c:autoTitleDeleted val="0"/>
+    <c:autoTitleDeleted val="1"/>
     <c:plotArea>
-      <c:layout/>
+      <c:layout>
+        <c:manualLayout>
+          <c:layoutTarget val="inner"/>
+          <c:xMode val="edge"/>
+          <c:yMode val="edge"/>
+          <c:x val="0.11"/>
+          <c:y val="0.05"/>
+          <c:w val="0.86"/>
+          <c:h val="0.8"/>
+        </c:manualLayout>
+      </c:layout>
       <c:areaChart>
         <c:grouping val="standard"/>
         <c:varyColors val="0"/>
@@ -306,7 +326,7 @@
               <c:strCache>
                 <c:ptCount val="1"/>
                 <c:pt idx="0">
-                  <c:v>Value</c:v>
+                  <c:v>Raised $</c:v>
                 </c:pt>
               </c:strCache>
             </c:strRef>
@@ -410,76 +430,76 @@
                 <c:formatCode>$#,##0;[Red]($#,##0);"-"</c:formatCode>
                 <c:ptCount val="24"/>
                 <c:pt idx="0">
-                  <c:v>41900</c:v>
+                  <c:v>26600</c:v>
                 </c:pt>
                 <c:pt idx="1">
-                  <c:v>49500</c:v>
+                  <c:v>31800</c:v>
                 </c:pt>
                 <c:pt idx="2">
-                  <c:v>60600</c:v>
+                  <c:v>29700</c:v>
                 </c:pt>
                 <c:pt idx="3">
-                  <c:v>75100</c:v>
+                  <c:v>62700</c:v>
                 </c:pt>
                 <c:pt idx="4">
-                  <c:v>77300</c:v>
+                  <c:v>61700</c:v>
                 </c:pt>
                 <c:pt idx="5">
-                  <c:v>70200</c:v>
+                  <c:v>54500</c:v>
                 </c:pt>
                 <c:pt idx="6">
-                  <c:v>77200</c:v>
+                  <c:v>61500</c:v>
                 </c:pt>
                 <c:pt idx="7">
-                  <c:v>77500</c:v>
+                  <c:v>61700</c:v>
                 </c:pt>
                 <c:pt idx="8">
-                  <c:v>90300</c:v>
+                  <c:v>52200</c:v>
                 </c:pt>
                 <c:pt idx="9">
-                  <c:v>72563</c:v>
+                  <c:v>59063</c:v>
                 </c:pt>
                 <c:pt idx="10">
-                  <c:v>77544</c:v>
+                  <c:v>61544</c:v>
                 </c:pt>
                 <c:pt idx="11">
-                  <c:v>115037</c:v>
+                  <c:v>62137</c:v>
                 </c:pt>
                 <c:pt idx="12">
-                  <c:v>85385</c:v>
+                  <c:v>69185</c:v>
                 </c:pt>
                 <c:pt idx="13">
-                  <c:v>88864</c:v>
+                  <c:v>70164</c:v>
                 </c:pt>
                 <c:pt idx="14">
-                  <c:v>101093</c:v>
+                  <c:v>68793</c:v>
                 </c:pt>
                 <c:pt idx="15">
-                  <c:v>72885</c:v>
+                  <c:v>59785</c:v>
                 </c:pt>
                 <c:pt idx="16">
-                  <c:v>72159</c:v>
+                  <c:v>55759</c:v>
                 </c:pt>
                 <c:pt idx="17">
-                  <c:v>70306</c:v>
+                  <c:v>53806</c:v>
                 </c:pt>
                 <c:pt idx="18">
-                  <c:v>83329</c:v>
+                  <c:v>66729</c:v>
                 </c:pt>
                 <c:pt idx="19">
-                  <c:v>88845</c:v>
+                  <c:v>72245</c:v>
                 </c:pt>
                 <c:pt idx="20">
-                  <c:v>110972</c:v>
+                  <c:v>70872</c:v>
                 </c:pt>
                 <c:pt idx="21">
-                  <c:v>86918</c:v>
+                  <c:v>72618</c:v>
                 </c:pt>
                 <c:pt idx="22">
-                  <c:v>92100</c:v>
+                  <c:v>73700</c:v>
                 </c:pt>
                 <c:pt idx="23">
-                  <c:v>146500</c:v>
+                  <c:v>77000</c:v>
                 </c:pt>
               </c:numCache>
             </c:numRef>
@@ -521,12 +541,15 @@
         <c:auto val="1"/>
         <c:lblAlgn val="ctr"/>
         <c:lblOffset val="100"/>
+        <c:tickLblSkip val="3"/>
         <c:noMultiLvlLbl val="0"/>
       </c:catAx>
       <c:valAx>
         <c:axId val="-2100718248"/>
         <c:scaling>
           <c:orientation val="minMax"/>
+          <c:max val="100000.0"/>
+          <c:min val="0.0"/>
         </c:scaling>
         <c:delete val="0"/>
         <c:axPos val="l"/>
@@ -560,6 +583,7 @@
         <c:crossAx val="-2101159928"/>
         <c:crosses val="autoZero"/>
         <c:crossBetween val="midCat"/>
+        <c:majorUnit val="20000.0"/>
       </c:valAx>
     </c:plotArea>
     <c:plotVisOnly val="1"/>
@@ -589,9 +613,19 @@
   <c:date1904 val="0"/>
   <c:roundedCorners val="0"/>
   <c:chart>
-    <c:autoTitleDeleted val="0"/>
+    <c:autoTitleDeleted val="1"/>
     <c:plotArea>
-      <c:layout/>
+      <c:layout>
+        <c:manualLayout>
+          <c:layoutTarget val="inner"/>
+          <c:xMode val="edge"/>
+          <c:yMode val="edge"/>
+          <c:x val="0.11"/>
+          <c:y val="0.05"/>
+          <c:w val="0.86"/>
+          <c:h val="0.8"/>
+        </c:manualLayout>
+      </c:layout>
       <c:areaChart>
         <c:grouping val="standard"/>
         <c:varyColors val="0"/>
@@ -604,7 +638,7 @@
               <c:strCache>
                 <c:ptCount val="1"/>
                 <c:pt idx="0">
-                  <c:v>Value</c:v>
+                  <c:v>Raised $</c:v>
                 </c:pt>
               </c:strCache>
             </c:strRef>
@@ -708,76 +742,76 @@
                 <c:formatCode>$#,##0;[Red]($#,##0);"-"</c:formatCode>
                 <c:ptCount val="24"/>
                 <c:pt idx="0">
-                  <c:v>33200</c:v>
+                  <c:v>15300</c:v>
                 </c:pt>
                 <c:pt idx="1">
-                  <c:v>39900</c:v>
+                  <c:v>17700</c:v>
                 </c:pt>
                 <c:pt idx="2">
-                  <c:v>47100</c:v>
+                  <c:v>24700</c:v>
                 </c:pt>
                 <c:pt idx="3">
-                  <c:v>66400</c:v>
+                  <c:v>12400</c:v>
                 </c:pt>
                 <c:pt idx="4">
-                  <c:v>68600</c:v>
+                  <c:v>15600</c:v>
                 </c:pt>
                 <c:pt idx="5">
-                  <c:v>61500</c:v>
+                  <c:v>15700</c:v>
                 </c:pt>
                 <c:pt idx="6">
-                  <c:v>68500</c:v>
+                  <c:v>15700</c:v>
                 </c:pt>
                 <c:pt idx="7">
-                  <c:v>68800</c:v>
+                  <c:v>15800</c:v>
                 </c:pt>
                 <c:pt idx="8">
-                  <c:v>78300</c:v>
+                  <c:v>38100</c:v>
                 </c:pt>
                 <c:pt idx="9">
-                  <c:v>63263</c:v>
+                  <c:v>13500</c:v>
                 </c:pt>
                 <c:pt idx="10">
-                  <c:v>68244</c:v>
+                  <c:v>16000</c:v>
                 </c:pt>
                 <c:pt idx="11">
-                  <c:v>90537</c:v>
+                  <c:v>16100</c:v>
                 </c:pt>
                 <c:pt idx="12">
-                  <c:v>76085</c:v>
+                  <c:v>16200</c:v>
                 </c:pt>
                 <c:pt idx="13">
-                  <c:v>78664</c:v>
+                  <c:v>18700</c:v>
                 </c:pt>
                 <c:pt idx="14">
-                  <c:v>86993</c:v>
+                  <c:v>26100</c:v>
                 </c:pt>
                 <c:pt idx="15">
-                  <c:v>63585</c:v>
+                  <c:v>13100</c:v>
                 </c:pt>
                 <c:pt idx="16">
-                  <c:v>62859</c:v>
+                  <c:v>16400</c:v>
                 </c:pt>
                 <c:pt idx="17">
-                  <c:v>61006</c:v>
+                  <c:v>16500</c:v>
                 </c:pt>
                 <c:pt idx="18">
-                  <c:v>74029</c:v>
+                  <c:v>16600</c:v>
                 </c:pt>
                 <c:pt idx="19">
-                  <c:v>79545</c:v>
+                  <c:v>16600</c:v>
                 </c:pt>
                 <c:pt idx="20">
-                  <c:v>98372</c:v>
+                  <c:v>40100</c:v>
                 </c:pt>
                 <c:pt idx="21">
-                  <c:v>77618</c:v>
+                  <c:v>14300</c:v>
                 </c:pt>
                 <c:pt idx="22">
-                  <c:v>80400</c:v>
+                  <c:v>18400</c:v>
                 </c:pt>
                 <c:pt idx="23">
-                  <c:v>117100</c:v>
+                  <c:v>27900</c:v>
                 </c:pt>
               </c:numCache>
             </c:numRef>
@@ -819,12 +853,15 @@
         <c:auto val="1"/>
         <c:lblAlgn val="ctr"/>
         <c:lblOffset val="100"/>
+        <c:tickLblSkip val="3"/>
         <c:noMultiLvlLbl val="0"/>
       </c:catAx>
       <c:valAx>
         <c:axId val="-2100718248"/>
         <c:scaling>
           <c:orientation val="minMax"/>
+          <c:max val="50000.0"/>
+          <c:min val="0.0"/>
         </c:scaling>
         <c:delete val="0"/>
         <c:axPos val="l"/>
@@ -858,6 +895,7 @@
         <c:crossAx val="-2101159928"/>
         <c:crosses val="autoZero"/>
         <c:crossBetween val="midCat"/>
+        <c:majorUnit val="10000.0"/>
       </c:valAx>
     </c:plotArea>
     <c:plotVisOnly val="1"/>
@@ -880,6 +918,1088 @@
     <c:autoUpdate val="0"/>
   </c:externalData>
 </c:chartSpace>
+</file>
+
+<file path=ppt/charts/chart4.xml><?xml version="1.0" encoding="utf-8"?>
+<c:chartSpace xmlns:c="http://schemas.openxmlformats.org/drawingml/2006/chart" xmlns:a="http://schemas.openxmlformats.org/drawingml/2006/main" xmlns:r="http://schemas.openxmlformats.org/officeDocument/2006/relationships">
+  <c:date1904 val="0"/>
+  <c:roundedCorners val="0"/>
+  <c:chart>
+    <c:autoTitleDeleted val="1"/>
+    <c:plotArea>
+      <c:layout>
+        <c:manualLayout>
+          <c:layoutTarget val="inner"/>
+          <c:xMode val="edge"/>
+          <c:yMode val="edge"/>
+          <c:x val="0.11"/>
+          <c:y val="0.05"/>
+          <c:w val="0.86"/>
+          <c:h val="0.8"/>
+        </c:manualLayout>
+      </c:layout>
+      <c:areaChart>
+        <c:grouping val="standard"/>
+        <c:varyColors val="0"/>
+        <c:ser>
+          <c:idx val="0"/>
+          <c:order val="0"/>
+          <c:tx>
+            <c:strRef>
+              <c:f>Sheet1!$B$1</c:f>
+              <c:strCache>
+                <c:ptCount val="1"/>
+                <c:pt idx="0">
+                  <c:v>Raised $</c:v>
+                </c:pt>
+              </c:strCache>
+            </c:strRef>
+          </c:tx>
+          <c:spPr>
+            <a:solidFill>
+              <a:srgbClr val="0E9F6E">
+                <a:alpha val="25000"/>
+              </a:srgbClr>
+            </a:solidFill>
+            <a:ln w="31750">
+              <a:solidFill>
+                <a:srgbClr val="0E9F6E"/>
+              </a:solidFill>
+            </a:ln>
+          </c:spPr>
+          <c:cat>
+            <c:strRef>
+              <c:f>Sheet1!$A$2:$A$25</c:f>
+              <c:strCache>
+                <c:ptCount val="24"/>
+                <c:pt idx="0">
+                  <c:v>Oct 24</c:v>
+                </c:pt>
+                <c:pt idx="1">
+                  <c:v>Nov 24</c:v>
+                </c:pt>
+                <c:pt idx="2">
+                  <c:v>Dec 24</c:v>
+                </c:pt>
+                <c:pt idx="3">
+                  <c:v>Jan 25</c:v>
+                </c:pt>
+                <c:pt idx="4">
+                  <c:v>Feb 25</c:v>
+                </c:pt>
+                <c:pt idx="5">
+                  <c:v>Mar 25</c:v>
+                </c:pt>
+                <c:pt idx="6">
+                  <c:v>Apr 25</c:v>
+                </c:pt>
+                <c:pt idx="7">
+                  <c:v>May 25</c:v>
+                </c:pt>
+                <c:pt idx="8">
+                  <c:v>Jun 25</c:v>
+                </c:pt>
+                <c:pt idx="9">
+                  <c:v>Jul 25</c:v>
+                </c:pt>
+                <c:pt idx="10">
+                  <c:v>Aug 25</c:v>
+                </c:pt>
+                <c:pt idx="11">
+                  <c:v>Sep 25</c:v>
+                </c:pt>
+                <c:pt idx="12">
+                  <c:v>Oct 25</c:v>
+                </c:pt>
+                <c:pt idx="13">
+                  <c:v>Nov 25</c:v>
+                </c:pt>
+                <c:pt idx="14">
+                  <c:v>Dec 25</c:v>
+                </c:pt>
+                <c:pt idx="15">
+                  <c:v>Jan 26</c:v>
+                </c:pt>
+                <c:pt idx="16">
+                  <c:v>Feb 26</c:v>
+                </c:pt>
+                <c:pt idx="17">
+                  <c:v>Mar 26</c:v>
+                </c:pt>
+                <c:pt idx="18">
+                  <c:v>Apr 26</c:v>
+                </c:pt>
+                <c:pt idx="19">
+                  <c:v>May 26</c:v>
+                </c:pt>
+                <c:pt idx="20">
+                  <c:v>Jun 26</c:v>
+                </c:pt>
+                <c:pt idx="21">
+                  <c:v>Jul 26</c:v>
+                </c:pt>
+                <c:pt idx="22">
+                  <c:v>Aug 26</c:v>
+                </c:pt>
+                <c:pt idx="23">
+                  <c:v>Sep 26</c:v>
+                </c:pt>
+              </c:strCache>
+            </c:strRef>
+          </c:cat>
+          <c:val>
+            <c:numRef>
+              <c:f>Sheet1!$B$2:$B$25</c:f>
+              <c:numCache>
+                <c:formatCode>$#,##0;[Red]($#,##0);"-"</c:formatCode>
+                <c:ptCount val="24"/>
+                <c:pt idx="0">
+                  <c:v>0</c:v>
+                </c:pt>
+                <c:pt idx="1">
+                  <c:v>0</c:v>
+                </c:pt>
+                <c:pt idx="2">
+                  <c:v>6200</c:v>
+                </c:pt>
+                <c:pt idx="3">
+                  <c:v>0</c:v>
+                </c:pt>
+                <c:pt idx="4">
+                  <c:v>0</c:v>
+                </c:pt>
+                <c:pt idx="5">
+                  <c:v>0</c:v>
+                </c:pt>
+                <c:pt idx="6">
+                  <c:v>0</c:v>
+                </c:pt>
+                <c:pt idx="7">
+                  <c:v>0</c:v>
+                </c:pt>
+                <c:pt idx="8">
+                  <c:v>0</c:v>
+                </c:pt>
+                <c:pt idx="9">
+                  <c:v>0</c:v>
+                </c:pt>
+                <c:pt idx="10">
+                  <c:v>0</c:v>
+                </c:pt>
+                <c:pt idx="11">
+                  <c:v>36800</c:v>
+                </c:pt>
+                <c:pt idx="12">
+                  <c:v>0</c:v>
+                </c:pt>
+                <c:pt idx="13">
+                  <c:v>0</c:v>
+                </c:pt>
+                <c:pt idx="14">
+                  <c:v>6200</c:v>
+                </c:pt>
+                <c:pt idx="15">
+                  <c:v>0</c:v>
+                </c:pt>
+                <c:pt idx="16">
+                  <c:v>0</c:v>
+                </c:pt>
+                <c:pt idx="17">
+                  <c:v>0</c:v>
+                </c:pt>
+                <c:pt idx="18">
+                  <c:v>0</c:v>
+                </c:pt>
+                <c:pt idx="19">
+                  <c:v>0</c:v>
+                </c:pt>
+                <c:pt idx="20">
+                  <c:v>0</c:v>
+                </c:pt>
+                <c:pt idx="21">
+                  <c:v>0</c:v>
+                </c:pt>
+                <c:pt idx="22">
+                  <c:v>0</c:v>
+                </c:pt>
+                <c:pt idx="23">
+                  <c:v>41600</c:v>
+                </c:pt>
+              </c:numCache>
+            </c:numRef>
+          </c:val>
+        </c:ser>
+        <c:dLbls>
+          <c:showLegendKey val="0"/>
+          <c:showVal val="0"/>
+          <c:showCatName val="0"/>
+          <c:showSerName val="0"/>
+          <c:showPercent val="0"/>
+          <c:showBubbleSize val="0"/>
+        </c:dLbls>
+        <c:axId val="-2101159928"/>
+        <c:axId val="-2100718248"/>
+      </c:areaChart>
+      <c:catAx>
+        <c:axId val="-2101159928"/>
+        <c:scaling>
+          <c:orientation val="minMax"/>
+        </c:scaling>
+        <c:delete val="0"/>
+        <c:axPos val="b"/>
+        <c:numFmt formatCode="General" sourceLinked="1"/>
+        <c:majorTickMark val="out"/>
+        <c:minorTickMark val="none"/>
+        <c:tickLblPos val="nextTo"/>
+        <c:txPr>
+          <a:bodyPr/>
+          <a:lstStyle/>
+          <a:p>
+            <a:pPr>
+              <a:defRPr sz="1000"/>
+            </a:pPr>
+          </a:p>
+        </c:txPr>
+        <c:crossAx val="-2100718248"/>
+        <c:crosses val="autoZero"/>
+        <c:auto val="1"/>
+        <c:lblAlgn val="ctr"/>
+        <c:lblOffset val="100"/>
+        <c:tickLblSkip val="3"/>
+        <c:noMultiLvlLbl val="0"/>
+      </c:catAx>
+      <c:valAx>
+        <c:axId val="-2100718248"/>
+        <c:scaling>
+          <c:orientation val="minMax"/>
+          <c:max val="50000.0"/>
+          <c:min val="0.0"/>
+        </c:scaling>
+        <c:delete val="0"/>
+        <c:axPos val="l"/>
+        <c:majorGridlines>
+          <c:spPr>
+            <a:ln>
+              <a:solidFill>
+                <a:srgbClr val="E6EAE7"/>
+              </a:solidFill>
+            </a:ln>
+          </c:spPr>
+        </c:majorGridlines>
+        <c:numFmt formatCode="$#,##0;[Red]($#,##0);&quot;-&quot;" sourceLinked="0"/>
+        <c:majorTickMark val="out"/>
+        <c:minorTickMark val="none"/>
+        <c:tickLblPos val="nextTo"/>
+        <c:spPr>
+          <a:ln>
+            <a:noFill/>
+          </a:ln>
+        </c:spPr>
+        <c:txPr>
+          <a:bodyPr/>
+          <a:lstStyle/>
+          <a:p>
+            <a:pPr>
+              <a:defRPr sz="1000"/>
+            </a:pPr>
+          </a:p>
+        </c:txPr>
+        <c:crossAx val="-2101159928"/>
+        <c:crosses val="autoZero"/>
+        <c:crossBetween val="midCat"/>
+        <c:majorUnit val="10000.0"/>
+      </c:valAx>
+    </c:plotArea>
+    <c:plotVisOnly val="1"/>
+    <c:dispBlanksAs val="zero"/>
+    <c:showDLblsOverMax val="0"/>
+  </c:chart>
+  <c:txPr>
+    <a:bodyPr/>
+    <a:lstStyle/>
+    <a:p>
+      <a:pPr>
+        <a:defRPr sz="1800">
+          <a:latin typeface="Roboto"/>
+        </a:defRPr>
+      </a:pPr>
+      <a:endParaRPr/>
+    </a:p>
+  </c:txPr>
+  <c:externalData r:id="rId1">
+    <c:autoUpdate val="0"/>
+  </c:externalData>
+</c:chartSpace>
+</file>
+
+<file path=ppt/notesMasters/notesMaster1.xml><?xml version="1.0" encoding="utf-8"?>
+<p:notesMaster xmlns:a="http://schemas.openxmlformats.org/drawingml/2006/main" xmlns:p="http://schemas.openxmlformats.org/presentationml/2006/main" xmlns:r="http://schemas.openxmlformats.org/officeDocument/2006/relationships">
+  <p:cSld>
+    <p:bg>
+      <p:bgRef idx="1001">
+        <a:schemeClr val="bg1"/>
+      </p:bgRef>
+    </p:bg>
+    <p:spTree>
+      <p:nvGrpSpPr>
+        <p:cNvPr id="1" name=""/>
+        <p:cNvGrpSpPr/>
+        <p:nvPr/>
+      </p:nvGrpSpPr>
+      <p:grpSpPr>
+        <a:xfrm>
+          <a:off x="0" y="0"/>
+          <a:ext cx="0" cy="0"/>
+          <a:chOff x="0" y="0"/>
+          <a:chExt cx="0" cy="0"/>
+        </a:xfrm>
+      </p:grpSpPr>
+      <p:sp>
+        <p:nvSpPr>
+          <p:cNvPr id="2" name="Header Placeholder 1"/>
+          <p:cNvSpPr>
+            <a:spLocks noGrp="1"/>
+          </p:cNvSpPr>
+          <p:nvPr>
+            <p:ph type="hdr" sz="quarter"/>
+          </p:nvPr>
+        </p:nvSpPr>
+        <p:spPr>
+          <a:xfrm>
+            <a:off x="0" y="0"/>
+            <a:ext cx="2971800" cy="457200"/>
+          </a:xfrm>
+          <a:prstGeom prst="rect">
+            <a:avLst/>
+          </a:prstGeom>
+        </p:spPr>
+        <p:txBody>
+          <a:bodyPr vert="horz" lIns="91440" tIns="45720" rIns="91440" bIns="45720" rtlCol="0"/>
+          <a:lstStyle>
+            <a:lvl1pPr algn="l">
+              <a:defRPr sz="1200"/>
+            </a:lvl1pPr>
+          </a:lstStyle>
+          <a:p>
+            <a:endParaRPr lang="en-US"/>
+          </a:p>
+        </p:txBody>
+      </p:sp>
+      <p:sp>
+        <p:nvSpPr>
+          <p:cNvPr id="3" name="Date Placeholder 2"/>
+          <p:cNvSpPr>
+            <a:spLocks noGrp="1"/>
+          </p:cNvSpPr>
+          <p:nvPr>
+            <p:ph type="dt" idx="1"/>
+          </p:nvPr>
+        </p:nvSpPr>
+        <p:spPr>
+          <a:xfrm>
+            <a:off x="3884613" y="0"/>
+            <a:ext cx="2971800" cy="457200"/>
+          </a:xfrm>
+          <a:prstGeom prst="rect">
+            <a:avLst/>
+          </a:prstGeom>
+        </p:spPr>
+        <p:txBody>
+          <a:bodyPr vert="horz" lIns="91440" tIns="45720" rIns="91440" bIns="45720" rtlCol="0"/>
+          <a:lstStyle>
+            <a:lvl1pPr algn="r">
+              <a:defRPr sz="1200"/>
+            </a:lvl1pPr>
+          </a:lstStyle>
+          <a:p>
+            <a:fld id="{0F89C1C7-3DCD-1040-A9CF-14679D8B5DDD}" type="datetimeFigureOut">
+              <a:rPr lang="en-US" smtClean="0"/>
+              <a:t>10/17/16</a:t>
+            </a:fld>
+            <a:endParaRPr lang="en-US"/>
+          </a:p>
+        </p:txBody>
+      </p:sp>
+      <p:sp>
+        <p:nvSpPr>
+          <p:cNvPr id="4" name="Slide Image Placeholder 3"/>
+          <p:cNvSpPr>
+            <a:spLocks noGrp="1" noRot="1" noChangeAspect="1"/>
+          </p:cNvSpPr>
+          <p:nvPr>
+            <p:ph type="sldImg" idx="2"/>
+          </p:nvPr>
+        </p:nvSpPr>
+        <p:spPr>
+          <a:xfrm>
+            <a:off x="1143000" y="685800"/>
+            <a:ext cx="4572000" cy="3429000"/>
+          </a:xfrm>
+          <a:prstGeom prst="rect">
+            <a:avLst/>
+          </a:prstGeom>
+          <a:noFill/>
+          <a:ln w="12700">
+            <a:solidFill>
+              <a:prstClr val="black"/>
+            </a:solidFill>
+          </a:ln>
+        </p:spPr>
+        <p:txBody>
+          <a:bodyPr vert="horz" lIns="91440" tIns="45720" rIns="91440" bIns="45720" rtlCol="0" anchor="ctr"/>
+          <a:lstStyle/>
+          <a:p>
+            <a:endParaRPr lang="en-US"/>
+          </a:p>
+        </p:txBody>
+      </p:sp>
+      <p:sp>
+        <p:nvSpPr>
+          <p:cNvPr id="5" name="Notes Placeholder 4"/>
+          <p:cNvSpPr>
+            <a:spLocks noGrp="1"/>
+          </p:cNvSpPr>
+          <p:nvPr>
+            <p:ph type="body" sz="quarter" idx="3"/>
+          </p:nvPr>
+        </p:nvSpPr>
+        <p:spPr>
+          <a:xfrm>
+            <a:off x="685800" y="4343400"/>
+            <a:ext cx="5486400" cy="4114800"/>
+          </a:xfrm>
+          <a:prstGeom prst="rect">
+            <a:avLst/>
+          </a:prstGeom>
+        </p:spPr>
+        <p:txBody>
+          <a:bodyPr vert="horz" lIns="91440" tIns="45720" rIns="91440" bIns="45720" rtlCol="0"/>
+          <a:lstStyle/>
+          <a:p>
+            <a:pPr lvl="0"/>
+            <a:r>
+              <a:rPr lang="en-US" smtClean="0"/>
+              <a:t>Click to edit Master text styles</a:t>
+            </a:r>
+          </a:p>
+          <a:p>
+            <a:pPr lvl="1"/>
+            <a:r>
+              <a:rPr lang="en-US" smtClean="0"/>
+              <a:t>Second level</a:t>
+            </a:r>
+          </a:p>
+          <a:p>
+            <a:pPr lvl="2"/>
+            <a:r>
+              <a:rPr lang="en-US" smtClean="0"/>
+              <a:t>Third level</a:t>
+            </a:r>
+          </a:p>
+          <a:p>
+            <a:pPr lvl="3"/>
+            <a:r>
+              <a:rPr lang="en-US" smtClean="0"/>
+              <a:t>Fourth level</a:t>
+            </a:r>
+          </a:p>
+          <a:p>
+            <a:pPr lvl="4"/>
+            <a:r>
+              <a:rPr lang="en-US" smtClean="0"/>
+              <a:t>Fifth level</a:t>
+            </a:r>
+            <a:endParaRPr lang="en-US"/>
+          </a:p>
+        </p:txBody>
+      </p:sp>
+      <p:sp>
+        <p:nvSpPr>
+          <p:cNvPr id="6" name="Footer Placeholder 5"/>
+          <p:cNvSpPr>
+            <a:spLocks noGrp="1"/>
+          </p:cNvSpPr>
+          <p:nvPr>
+            <p:ph type="ftr" sz="quarter" idx="4"/>
+          </p:nvPr>
+        </p:nvSpPr>
+        <p:spPr>
+          <a:xfrm>
+            <a:off x="0" y="8685213"/>
+            <a:ext cx="2971800" cy="457200"/>
+          </a:xfrm>
+          <a:prstGeom prst="rect">
+            <a:avLst/>
+          </a:prstGeom>
+        </p:spPr>
+        <p:txBody>
+          <a:bodyPr vert="horz" lIns="91440" tIns="45720" rIns="91440" bIns="45720" rtlCol="0" anchor="b"/>
+          <a:lstStyle>
+            <a:lvl1pPr algn="l">
+              <a:defRPr sz="1200"/>
+            </a:lvl1pPr>
+          </a:lstStyle>
+          <a:p>
+            <a:endParaRPr lang="en-US"/>
+          </a:p>
+        </p:txBody>
+      </p:sp>
+      <p:sp>
+        <p:nvSpPr>
+          <p:cNvPr id="7" name="Slide Number Placeholder 6"/>
+          <p:cNvSpPr>
+            <a:spLocks noGrp="1"/>
+          </p:cNvSpPr>
+          <p:nvPr>
+            <p:ph type="sldNum" sz="quarter" idx="5"/>
+          </p:nvPr>
+        </p:nvSpPr>
+        <p:spPr>
+          <a:xfrm>
+            <a:off x="3884613" y="8685213"/>
+            <a:ext cx="2971800" cy="457200"/>
+          </a:xfrm>
+          <a:prstGeom prst="rect">
+            <a:avLst/>
+          </a:prstGeom>
+        </p:spPr>
+        <p:txBody>
+          <a:bodyPr vert="horz" lIns="91440" tIns="45720" rIns="91440" bIns="45720" rtlCol="0" anchor="b"/>
+          <a:lstStyle>
+            <a:lvl1pPr algn="r">
+              <a:defRPr sz="1200"/>
+            </a:lvl1pPr>
+          </a:lstStyle>
+          <a:p>
+            <a:fld id="{BB5E49A5-4136-284D-997B-48E1D791AD67}" type="slidenum">
+              <a:rPr lang="en-US" smtClean="0"/>
+              <a:t>‹#›</a:t>
+            </a:fld>
+            <a:endParaRPr lang="en-US"/>
+          </a:p>
+        </p:txBody>
+      </p:sp>
+    </p:spTree>
+    <p:extLst>
+      <p:ext uri="{BB962C8B-B14F-4D97-AF65-F5344CB8AC3E}">
+        <p14:creationId xmlns:p14="http://schemas.microsoft.com/office/powerpoint/2010/main" val="2623252185"/>
+      </p:ext>
+    </p:extLst>
+  </p:cSld>
+  <p:clrMap bg1="lt1" tx1="dk1" bg2="lt2" tx2="dk2" accent1="accent1" accent2="accent2" accent3="accent3" accent4="accent4" accent5="accent5" accent6="accent6" hlink="hlink" folHlink="folHlink"/>
+  <p:notesStyle>
+    <a:lvl1pPr marL="0" algn="l" defTabSz="457200" rtl="0" eaLnBrk="1" latinLnBrk="0" hangingPunct="1">
+      <a:defRPr sz="1200" kern="1200">
+        <a:solidFill>
+          <a:schemeClr val="tx1"/>
+        </a:solidFill>
+        <a:latin typeface="+mn-lt"/>
+        <a:ea typeface="+mn-ea"/>
+        <a:cs typeface="+mn-cs"/>
+      </a:defRPr>
+    </a:lvl1pPr>
+    <a:lvl2pPr marL="457200" algn="l" defTabSz="457200" rtl="0" eaLnBrk="1" latinLnBrk="0" hangingPunct="1">
+      <a:defRPr sz="1200" kern="1200">
+        <a:solidFill>
+          <a:schemeClr val="tx1"/>
+        </a:solidFill>
+        <a:latin typeface="+mn-lt"/>
+        <a:ea typeface="+mn-ea"/>
+        <a:cs typeface="+mn-cs"/>
+      </a:defRPr>
+    </a:lvl2pPr>
+    <a:lvl3pPr marL="914400" algn="l" defTabSz="457200" rtl="0" eaLnBrk="1" latinLnBrk="0" hangingPunct="1">
+      <a:defRPr sz="1200" kern="1200">
+        <a:solidFill>
+          <a:schemeClr val="tx1"/>
+        </a:solidFill>
+        <a:latin typeface="+mn-lt"/>
+        <a:ea typeface="+mn-ea"/>
+        <a:cs typeface="+mn-cs"/>
+      </a:defRPr>
+    </a:lvl3pPr>
+    <a:lvl4pPr marL="1371600" algn="l" defTabSz="457200" rtl="0" eaLnBrk="1" latinLnBrk="0" hangingPunct="1">
+      <a:defRPr sz="1200" kern="1200">
+        <a:solidFill>
+          <a:schemeClr val="tx1"/>
+        </a:solidFill>
+        <a:latin typeface="+mn-lt"/>
+        <a:ea typeface="+mn-ea"/>
+        <a:cs typeface="+mn-cs"/>
+      </a:defRPr>
+    </a:lvl4pPr>
+    <a:lvl5pPr marL="1828800" algn="l" defTabSz="457200" rtl="0" eaLnBrk="1" latinLnBrk="0" hangingPunct="1">
+      <a:defRPr sz="1200" kern="1200">
+        <a:solidFill>
+          <a:schemeClr val="tx1"/>
+        </a:solidFill>
+        <a:latin typeface="+mn-lt"/>
+        <a:ea typeface="+mn-ea"/>
+        <a:cs typeface="+mn-cs"/>
+      </a:defRPr>
+    </a:lvl5pPr>
+    <a:lvl6pPr marL="2286000" algn="l" defTabSz="457200" rtl="0" eaLnBrk="1" latinLnBrk="0" hangingPunct="1">
+      <a:defRPr sz="1200" kern="1200">
+        <a:solidFill>
+          <a:schemeClr val="tx1"/>
+        </a:solidFill>
+        <a:latin typeface="+mn-lt"/>
+        <a:ea typeface="+mn-ea"/>
+        <a:cs typeface="+mn-cs"/>
+      </a:defRPr>
+    </a:lvl6pPr>
+    <a:lvl7pPr marL="2743200" algn="l" defTabSz="457200" rtl="0" eaLnBrk="1" latinLnBrk="0" hangingPunct="1">
+      <a:defRPr sz="1200" kern="1200">
+        <a:solidFill>
+          <a:schemeClr val="tx1"/>
+        </a:solidFill>
+        <a:latin typeface="+mn-lt"/>
+        <a:ea typeface="+mn-ea"/>
+        <a:cs typeface="+mn-cs"/>
+      </a:defRPr>
+    </a:lvl7pPr>
+    <a:lvl8pPr marL="3200400" algn="l" defTabSz="457200" rtl="0" eaLnBrk="1" latinLnBrk="0" hangingPunct="1">
+      <a:defRPr sz="1200" kern="1200">
+        <a:solidFill>
+          <a:schemeClr val="tx1"/>
+        </a:solidFill>
+        <a:latin typeface="+mn-lt"/>
+        <a:ea typeface="+mn-ea"/>
+        <a:cs typeface="+mn-cs"/>
+      </a:defRPr>
+    </a:lvl8pPr>
+    <a:lvl9pPr marL="3657600" algn="l" defTabSz="457200" rtl="0" eaLnBrk="1" latinLnBrk="0" hangingPunct="1">
+      <a:defRPr sz="1200" kern="1200">
+        <a:solidFill>
+          <a:schemeClr val="tx1"/>
+        </a:solidFill>
+        <a:latin typeface="+mn-lt"/>
+        <a:ea typeface="+mn-ea"/>
+        <a:cs typeface="+mn-cs"/>
+      </a:defRPr>
+    </a:lvl9pPr>
+  </p:notesStyle>
+</p:notesMaster>
+</file>
+
+<file path=ppt/notesSlides/notesSlide1.xml><?xml version="1.0" encoding="utf-8"?>
+<p:notes xmlns:a="http://schemas.openxmlformats.org/drawingml/2006/main" xmlns:p="http://schemas.openxmlformats.org/presentationml/2006/main" xmlns:r="http://schemas.openxmlformats.org/officeDocument/2006/relationships">
+  <p:cSld>
+    <p:spTree>
+      <p:nvGrpSpPr>
+        <p:cNvPr id="1" name=""/>
+        <p:cNvGrpSpPr/>
+        <p:nvPr/>
+      </p:nvGrpSpPr>
+      <p:grpSpPr>
+        <a:xfrm>
+          <a:off x="0" y="0"/>
+          <a:ext cx="0" cy="0"/>
+          <a:chOff x="0" y="0"/>
+          <a:chExt cx="0" cy="0"/>
+        </a:xfrm>
+      </p:grpSpPr>
+      <p:sp>
+        <p:nvSpPr>
+          <p:cNvPr id="2" name="Slide Image Placeholder 1"/>
+          <p:cNvSpPr>
+            <a:spLocks noGrp="1"/>
+          </p:cNvSpPr>
+          <p:nvPr>
+            <p:ph type="sldImg" idx="2"/>
+          </p:nvPr>
+        </p:nvSpPr>
+        <p:spPr/>
+      </p:sp>
+      <p:sp>
+        <p:nvSpPr>
+          <p:cNvPr id="3" name="Notes Placeholder 2"/>
+          <p:cNvSpPr>
+            <a:spLocks noGrp="1"/>
+          </p:cNvSpPr>
+          <p:nvPr>
+            <p:ph type="body" idx="3" sz="quarter"/>
+          </p:nvPr>
+        </p:nvSpPr>
+        <p:spPr/>
+        <p:txBody>
+          <a:bodyPr/>
+          <a:lstStyle/>
+          <a:p>
+            <a:r>
+              <a:t>Which funding is worth chasing?. Sample Community Services Ltd. Period: September 2026. Each source of money compared on what it raises and what it costs to raise. Pick a source and every chart, table row and note follows it.</a:t>
+            </a:r>
+          </a:p>
+        </p:txBody>
+      </p:sp>
+      <p:sp>
+        <p:nvSpPr>
+          <p:cNvPr id="4" name="Slide Number Placeholder 3"/>
+          <p:cNvSpPr>
+            <a:spLocks noGrp="1"/>
+          </p:cNvSpPr>
+          <p:nvPr>
+            <p:ph type="sldNum" idx="5" sz="quarter"/>
+          </p:nvPr>
+        </p:nvSpPr>
+        <p:spPr/>
+      </p:sp>
+    </p:spTree>
+  </p:cSld>
+  <p:clrMapOvr>
+    <a:masterClrMapping/>
+  </p:clrMapOvr>
+</p:notes>
+</file>
+
+<file path=ppt/notesSlides/notesSlide2.xml><?xml version="1.0" encoding="utf-8"?>
+<p:notes xmlns:a="http://schemas.openxmlformats.org/drawingml/2006/main" xmlns:p="http://schemas.openxmlformats.org/presentationml/2006/main" xmlns:r="http://schemas.openxmlformats.org/officeDocument/2006/relationships">
+  <p:cSld>
+    <p:spTree>
+      <p:nvGrpSpPr>
+        <p:cNvPr id="1" name=""/>
+        <p:cNvGrpSpPr/>
+        <p:nvPr/>
+      </p:nvGrpSpPr>
+      <p:grpSpPr>
+        <a:xfrm>
+          <a:off x="0" y="0"/>
+          <a:ext cx="0" cy="0"/>
+          <a:chOff x="0" y="0"/>
+          <a:chExt cx="0" cy="0"/>
+        </a:xfrm>
+      </p:grpSpPr>
+      <p:sp>
+        <p:nvSpPr>
+          <p:cNvPr id="2" name="Slide Image Placeholder 1"/>
+          <p:cNvSpPr>
+            <a:spLocks noGrp="1"/>
+          </p:cNvSpPr>
+          <p:nvPr>
+            <p:ph type="sldImg" idx="2"/>
+          </p:nvPr>
+        </p:nvSpPr>
+        <p:spPr/>
+      </p:sp>
+      <p:sp>
+        <p:nvSpPr>
+          <p:cNvPr id="3" name="Notes Placeholder 2"/>
+          <p:cNvSpPr>
+            <a:spLocks noGrp="1"/>
+          </p:cNvSpPr>
+          <p:nvPr>
+            <p:ph type="body" idx="3" sz="quarter"/>
+          </p:nvPr>
+        </p:nvSpPr>
+        <p:spPr/>
+        <p:txBody>
+          <a:bodyPr/>
+          <a:lstStyle/>
+          <a:p>
+            <a:r>
+              <a:t>All sources. In September it cost: Grants 9¢, donations 19¢ and fundraising events 41¢ to raise each dollar. Cheapest to raise in September: grants (9¢ a dollar). Dearest: fundraising events (41¢). Events are worth counting for what else they bring too (new donors, profile).</a:t>
+            </a:r>
+          </a:p>
+        </p:txBody>
+      </p:sp>
+      <p:sp>
+        <p:nvSpPr>
+          <p:cNvPr id="4" name="Slide Number Placeholder 3"/>
+          <p:cNvSpPr>
+            <a:spLocks noGrp="1"/>
+          </p:cNvSpPr>
+          <p:nvPr>
+            <p:ph type="sldNum" idx="5" sz="quarter"/>
+          </p:nvPr>
+        </p:nvSpPr>
+        <p:spPr/>
+      </p:sp>
+    </p:spTree>
+  </p:cSld>
+  <p:clrMapOvr>
+    <a:masterClrMapping/>
+  </p:clrMapOvr>
+</p:notes>
+</file>
+
+<file path=ppt/notesSlides/notesSlide3.xml><?xml version="1.0" encoding="utf-8"?>
+<p:notes xmlns:a="http://schemas.openxmlformats.org/drawingml/2006/main" xmlns:p="http://schemas.openxmlformats.org/presentationml/2006/main" xmlns:r="http://schemas.openxmlformats.org/officeDocument/2006/relationships">
+  <p:cSld>
+    <p:spTree>
+      <p:nvGrpSpPr>
+        <p:cNvPr id="1" name=""/>
+        <p:cNvGrpSpPr/>
+        <p:nvPr/>
+      </p:nvGrpSpPr>
+      <p:grpSpPr>
+        <a:xfrm>
+          <a:off x="0" y="0"/>
+          <a:ext cx="0" cy="0"/>
+          <a:chOff x="0" y="0"/>
+          <a:chExt cx="0" cy="0"/>
+        </a:xfrm>
+      </p:grpSpPr>
+      <p:sp>
+        <p:nvSpPr>
+          <p:cNvPr id="2" name="Slide Image Placeholder 1"/>
+          <p:cNvSpPr>
+            <a:spLocks noGrp="1"/>
+          </p:cNvSpPr>
+          <p:nvPr>
+            <p:ph type="sldImg" idx="2"/>
+          </p:nvPr>
+        </p:nvSpPr>
+        <p:spPr/>
+      </p:sp>
+      <p:sp>
+        <p:nvSpPr>
+          <p:cNvPr id="3" name="Notes Placeholder 2"/>
+          <p:cNvSpPr>
+            <a:spLocks noGrp="1"/>
+          </p:cNvSpPr>
+          <p:nvPr>
+            <p:ph type="body" idx="3" sz="quarter"/>
+          </p:nvPr>
+        </p:nvSpPr>
+        <p:spPr/>
+        <p:txBody>
+          <a:bodyPr/>
+          <a:lstStyle/>
+          <a:p>
+            <a:r>
+              <a:t>Grants. Grants: $223,318 raised this financial year to date (68.6% of everything raised), $21,300 to raise it, so $202,018 left for programs: 10¢ per dollar. Most of the money, and usually the cheapest to raise, starting with grants that renew.</a:t>
+            </a:r>
+          </a:p>
+        </p:txBody>
+      </p:sp>
+      <p:sp>
+        <p:nvSpPr>
+          <p:cNvPr id="4" name="Slide Number Placeholder 3"/>
+          <p:cNvSpPr>
+            <a:spLocks noGrp="1"/>
+          </p:cNvSpPr>
+          <p:nvPr>
+            <p:ph type="sldNum" idx="5" sz="quarter"/>
+          </p:nvPr>
+        </p:nvSpPr>
+        <p:spPr/>
+      </p:sp>
+    </p:spTree>
+  </p:cSld>
+  <p:clrMapOvr>
+    <a:masterClrMapping/>
+  </p:clrMapOvr>
+</p:notes>
+</file>
+
+<file path=ppt/notesSlides/notesSlide4.xml><?xml version="1.0" encoding="utf-8"?>
+<p:notes xmlns:a="http://schemas.openxmlformats.org/drawingml/2006/main" xmlns:p="http://schemas.openxmlformats.org/presentationml/2006/main" xmlns:r="http://schemas.openxmlformats.org/officeDocument/2006/relationships">
+  <p:cSld>
+    <p:spTree>
+      <p:nvGrpSpPr>
+        <p:cNvPr id="1" name=""/>
+        <p:cNvGrpSpPr/>
+        <p:nvPr/>
+      </p:nvGrpSpPr>
+      <p:grpSpPr>
+        <a:xfrm>
+          <a:off x="0" y="0"/>
+          <a:ext cx="0" cy="0"/>
+          <a:chOff x="0" y="0"/>
+          <a:chExt cx="0" cy="0"/>
+        </a:xfrm>
+      </p:grpSpPr>
+      <p:sp>
+        <p:nvSpPr>
+          <p:cNvPr id="2" name="Slide Image Placeholder 1"/>
+          <p:cNvSpPr>
+            <a:spLocks noGrp="1"/>
+          </p:cNvSpPr>
+          <p:nvPr>
+            <p:ph type="sldImg" idx="2"/>
+          </p:nvPr>
+        </p:nvSpPr>
+        <p:spPr/>
+      </p:sp>
+      <p:sp>
+        <p:nvSpPr>
+          <p:cNvPr id="3" name="Notes Placeholder 2"/>
+          <p:cNvSpPr>
+            <a:spLocks noGrp="1"/>
+          </p:cNvSpPr>
+          <p:nvPr>
+            <p:ph type="body" idx="3" sz="quarter"/>
+          </p:nvPr>
+        </p:nvSpPr>
+        <p:spPr/>
+        <p:txBody>
+          <a:bodyPr/>
+          <a:lstStyle/>
+          <a:p>
+            <a:r>
+              <a:t>Donations. Donations: $60,600 raised this financial year to date (18.6% of everything raised), $9,800 to raise it, so $50,800 left for programs: 16¢ per dollar. Cheap and flexible (untied): the money that builds reserves.</a:t>
+            </a:r>
+          </a:p>
+        </p:txBody>
+      </p:sp>
+      <p:sp>
+        <p:nvSpPr>
+          <p:cNvPr id="4" name="Slide Number Placeholder 3"/>
+          <p:cNvSpPr>
+            <a:spLocks noGrp="1"/>
+          </p:cNvSpPr>
+          <p:nvPr>
+            <p:ph type="sldNum" idx="5" sz="quarter"/>
+          </p:nvPr>
+        </p:nvSpPr>
+        <p:spPr/>
+      </p:sp>
+    </p:spTree>
+  </p:cSld>
+  <p:clrMapOvr>
+    <a:masterClrMapping/>
+  </p:clrMapOvr>
+</p:notes>
+</file>
+
+<file path=ppt/notesSlides/notesSlide5.xml><?xml version="1.0" encoding="utf-8"?>
+<p:notes xmlns:a="http://schemas.openxmlformats.org/drawingml/2006/main" xmlns:p="http://schemas.openxmlformats.org/presentationml/2006/main" xmlns:r="http://schemas.openxmlformats.org/officeDocument/2006/relationships">
+  <p:cSld>
+    <p:spTree>
+      <p:nvGrpSpPr>
+        <p:cNvPr id="1" name=""/>
+        <p:cNvGrpSpPr/>
+        <p:nvPr/>
+      </p:nvGrpSpPr>
+      <p:grpSpPr>
+        <a:xfrm>
+          <a:off x="0" y="0"/>
+          <a:ext cx="0" cy="0"/>
+          <a:chOff x="0" y="0"/>
+          <a:chExt cx="0" cy="0"/>
+        </a:xfrm>
+      </p:grpSpPr>
+      <p:sp>
+        <p:nvSpPr>
+          <p:cNvPr id="2" name="Slide Image Placeholder 1"/>
+          <p:cNvSpPr>
+            <a:spLocks noGrp="1"/>
+          </p:cNvSpPr>
+          <p:nvPr>
+            <p:ph type="sldImg" idx="2"/>
+          </p:nvPr>
+        </p:nvSpPr>
+        <p:spPr/>
+      </p:sp>
+      <p:sp>
+        <p:nvSpPr>
+          <p:cNvPr id="3" name="Notes Placeholder 2"/>
+          <p:cNvSpPr>
+            <a:spLocks noGrp="1"/>
+          </p:cNvSpPr>
+          <p:nvPr>
+            <p:ph type="body" idx="3" sz="quarter"/>
+          </p:nvPr>
+        </p:nvSpPr>
+        <p:spPr/>
+        <p:txBody>
+          <a:bodyPr/>
+          <a:lstStyle/>
+          <a:p>
+            <a:r>
+              <a:t>Fundraising events. Fundraising events: $41,600 raised this financial year to date (12.8% of everything raised), $19,300 to raise it, so $22,300 left for programs: 46¢ per dollar. The dearest per dollar: worth measuring the new donors each event brings in too.</a:t>
+            </a:r>
+          </a:p>
+        </p:txBody>
+      </p:sp>
+      <p:sp>
+        <p:nvSpPr>
+          <p:cNvPr id="4" name="Slide Number Placeholder 3"/>
+          <p:cNvSpPr>
+            <a:spLocks noGrp="1"/>
+          </p:cNvSpPr>
+          <p:nvPr>
+            <p:ph type="sldNum" idx="5" sz="quarter"/>
+          </p:nvPr>
+        </p:nvSpPr>
+        <p:spPr/>
+      </p:sp>
+    </p:spTree>
+  </p:cSld>
+  <p:clrMapOvr>
+    <a:masterClrMapping/>
+  </p:clrMapOvr>
+</p:notes>
+</file>
+
+<file path=ppt/notesSlides/notesSlide6.xml><?xml version="1.0" encoding="utf-8"?>
+<p:notes xmlns:a="http://schemas.openxmlformats.org/drawingml/2006/main" xmlns:p="http://schemas.openxmlformats.org/presentationml/2006/main" xmlns:r="http://schemas.openxmlformats.org/officeDocument/2006/relationships">
+  <p:cSld>
+    <p:spTree>
+      <p:nvGrpSpPr>
+        <p:cNvPr id="1" name=""/>
+        <p:cNvGrpSpPr/>
+        <p:nvPr/>
+      </p:nvGrpSpPr>
+      <p:grpSpPr>
+        <a:xfrm>
+          <a:off x="0" y="0"/>
+          <a:ext cx="0" cy="0"/>
+          <a:chOff x="0" y="0"/>
+          <a:chExt cx="0" cy="0"/>
+        </a:xfrm>
+      </p:grpSpPr>
+      <p:sp>
+        <p:nvSpPr>
+          <p:cNvPr id="2" name="Slide Image Placeholder 1"/>
+          <p:cNvSpPr>
+            <a:spLocks noGrp="1"/>
+          </p:cNvSpPr>
+          <p:nvPr>
+            <p:ph type="sldImg" idx="2"/>
+          </p:nvPr>
+        </p:nvSpPr>
+        <p:spPr/>
+      </p:sp>
+      <p:sp>
+        <p:nvSpPr>
+          <p:cNvPr id="3" name="Notes Placeholder 2"/>
+          <p:cNvSpPr>
+            <a:spLocks noGrp="1"/>
+          </p:cNvSpPr>
+          <p:nvPr>
+            <p:ph type="body" idx="3" sz="quarter"/>
+          </p:nvPr>
+        </p:nvSpPr>
+        <p:spPr/>
+        <p:txBody>
+          <a:bodyPr/>
+          <a:lstStyle/>
+          <a:p>
+            <a:r>
+              <a:t>Financial year to date (Jul to Sep 2026), by source</a:t>
+            </a:r>
+          </a:p>
+        </p:txBody>
+      </p:sp>
+      <p:sp>
+        <p:nvSpPr>
+          <p:cNvPr id="4" name="Slide Number Placeholder 3"/>
+          <p:cNvSpPr>
+            <a:spLocks noGrp="1"/>
+          </p:cNvSpPr>
+          <p:nvPr>
+            <p:ph type="sldNum" idx="5" sz="quarter"/>
+          </p:nvPr>
+        </p:nvSpPr>
+        <p:spPr/>
+      </p:sp>
+    </p:spTree>
+  </p:cSld>
+  <p:clrMapOvr>
+    <a:masterClrMapping/>
+  </p:clrMapOvr>
+</p:notes>
 </file>
 
 <file path=ppt/slideLayouts/slideLayout1.xml><?xml version="1.0" encoding="utf-8"?>
@@ -3865,7 +4985,44 @@
       <p:grpSpPr/>
       <p:sp>
         <p:nvSpPr>
-          <p:cNvPr id="2" name="Rectangle 1"/>
+          <p:cNvPr id="2" name="Title 1"/>
+          <p:cNvSpPr>
+            <a:spLocks noGrp="1"/>
+          </p:cNvSpPr>
+          <p:nvPr>
+            <p:ph type="ctrTitle"/>
+          </p:nvPr>
+        </p:nvSpPr>
+        <p:spPr>
+          <a:xfrm>
+            <a:off x="457200" y="1965960"/>
+            <a:ext cx="11277295" cy="1097280"/>
+          </a:xfrm>
+        </p:spPr>
+        <p:txBody>
+          <a:bodyPr wrap="square"/>
+          <a:lstStyle/>
+          <a:p>
+            <a:pPr algn="l">
+              <a:defRPr>
+                <a:latin typeface="Roboto"/>
+              </a:defRPr>
+            </a:pPr>
+            <a:r>
+              <a:rPr sz="3400" b="1">
+                <a:solidFill>
+                  <a:srgbClr val="25342A"/>
+                </a:solidFill>
+                <a:latin typeface="Roboto"/>
+              </a:rPr>
+              <a:t>Which funding is worth chasing?</a:t>
+            </a:r>
+          </a:p>
+        </p:txBody>
+      </p:sp>
+      <p:sp>
+        <p:nvSpPr>
+          <p:cNvPr id="3" name="Rectangle 2"/>
           <p:cNvSpPr/>
           <p:nvPr/>
         </p:nvSpPr>
@@ -3921,7 +5078,7 @@
       </p:sp>
       <p:sp>
         <p:nvSpPr>
-          <p:cNvPr id="3" name="TextBox 2"/>
+          <p:cNvPr id="4" name="TextBox 3"/>
           <p:cNvSpPr txBox="1"/>
           <p:nvPr/>
         </p:nvSpPr>
@@ -3936,7 +5093,7 @@
           <a:noFill/>
         </p:spPr>
         <p:txBody>
-          <a:bodyPr wrap="square">
+          <a:bodyPr wrap="square" lIns="45720" rIns="45720">
             <a:spAutoFit/>
           </a:bodyPr>
           <a:lstStyle/>
@@ -3960,7 +5117,7 @@
       </p:sp>
       <p:sp>
         <p:nvSpPr>
-          <p:cNvPr id="4" name="TextBox 3"/>
+          <p:cNvPr id="5" name="TextBox 4"/>
           <p:cNvSpPr txBox="1"/>
           <p:nvPr/>
         </p:nvSpPr>
@@ -3975,7 +5132,7 @@
           <a:noFill/>
         </p:spPr>
         <p:txBody>
-          <a:bodyPr wrap="square">
+          <a:bodyPr wrap="square" lIns="45720" rIns="45720">
             <a:spAutoFit/>
           </a:bodyPr>
           <a:lstStyle/>
@@ -3999,14 +5156,14 @@
       </p:sp>
       <p:sp>
         <p:nvSpPr>
-          <p:cNvPr id="5" name="TextBox 4"/>
+          <p:cNvPr id="6" name="TextBox 5"/>
           <p:cNvSpPr txBox="1"/>
           <p:nvPr/>
         </p:nvSpPr>
         <p:spPr>
           <a:xfrm>
-            <a:off x="457200" y="2011680"/>
-            <a:ext cx="11247120" cy="1097280"/>
+            <a:off x="457200" y="3154680"/>
+            <a:ext cx="11277295" cy="457200"/>
           </a:xfrm>
           <a:prstGeom prst="rect">
             <a:avLst/>
@@ -4014,7 +5171,7 @@
           <a:noFill/>
         </p:spPr>
         <p:txBody>
-          <a:bodyPr wrap="square">
+          <a:bodyPr wrap="square" lIns="45720" rIns="45720">
             <a:spAutoFit/>
           </a:bodyPr>
           <a:lstStyle/>
@@ -4025,27 +5182,27 @@
               </a:defRPr>
             </a:pPr>
             <a:r>
-              <a:rPr sz="3400" b="1">
+              <a:rPr sz="1600" b="0">
                 <a:solidFill>
-                  <a:srgbClr val="25342A"/>
+                  <a:srgbClr val="5F6F63"/>
                 </a:solidFill>
                 <a:latin typeface="Roboto"/>
               </a:rPr>
-              <a:t>Which funding is worth chasing?</a:t>
-            </a:r>
-          </a:p>
-        </p:txBody>
-      </p:sp>
-      <p:sp>
-        <p:nvSpPr>
-          <p:cNvPr id="6" name="TextBox 5"/>
+              <a:t>Sample Community Services Ltd</a:t>
+            </a:r>
+          </a:p>
+        </p:txBody>
+      </p:sp>
+      <p:sp>
+        <p:nvSpPr>
+          <p:cNvPr id="7" name="TextBox 6"/>
           <p:cNvSpPr txBox="1"/>
           <p:nvPr/>
         </p:nvSpPr>
         <p:spPr>
           <a:xfrm>
-            <a:off x="457200" y="3154680"/>
-            <a:ext cx="11247120" cy="457200"/>
+            <a:off x="457200" y="3703320"/>
+            <a:ext cx="11277295" cy="535940"/>
           </a:xfrm>
           <a:prstGeom prst="rect">
             <a:avLst/>
@@ -4053,7 +5210,7 @@
           <a:noFill/>
         </p:spPr>
         <p:txBody>
-          <a:bodyPr wrap="square">
+          <a:bodyPr wrap="square" lIns="45720" rIns="45720">
             <a:spAutoFit/>
           </a:bodyPr>
           <a:lstStyle/>
@@ -4064,27 +5221,27 @@
               </a:defRPr>
             </a:pPr>
             <a:r>
-              <a:rPr sz="1600" b="0">
+              <a:rPr sz="1400" b="0">
                 <a:solidFill>
-                  <a:srgbClr val="5F6F63"/>
+                  <a:srgbClr val="25342A"/>
                 </a:solidFill>
                 <a:latin typeface="Roboto"/>
               </a:rPr>
-              <a:t>Sample Community Services Ltd</a:t>
-            </a:r>
-          </a:p>
-        </p:txBody>
-      </p:sp>
-      <p:sp>
-        <p:nvSpPr>
-          <p:cNvPr id="7" name="TextBox 6"/>
+              <a:t>Period: September 2026. Each source of money compared on what it raises and what it costs to raise. Pick a source and every chart, table row and note follows it.</a:t>
+            </a:r>
+          </a:p>
+        </p:txBody>
+      </p:sp>
+      <p:sp>
+        <p:nvSpPr>
+          <p:cNvPr id="8" name="TextBox 7"/>
           <p:cNvSpPr txBox="1"/>
           <p:nvPr/>
         </p:nvSpPr>
         <p:spPr>
           <a:xfrm>
-            <a:off x="457200" y="3703320"/>
-            <a:ext cx="11247120" cy="1097280"/>
+            <a:off x="457200" y="4330700"/>
+            <a:ext cx="11277295" cy="1097280"/>
           </a:xfrm>
           <a:prstGeom prst="rect">
             <a:avLst/>
@@ -4092,7 +5249,7 @@
           <a:noFill/>
         </p:spPr>
         <p:txBody>
-          <a:bodyPr wrap="square">
+          <a:bodyPr wrap="square" lIns="45720" rIns="45720">
             <a:spAutoFit/>
           </a:bodyPr>
           <a:lstStyle/>
@@ -4103,27 +5260,75 @@
               </a:defRPr>
             </a:pPr>
             <a:r>
-              <a:rPr sz="1400" b="0">
+              <a:rPr sz="1100" b="0">
                 <a:solidFill>
-                  <a:srgbClr val="25342A"/>
+                  <a:srgbClr val="5F6F63"/>
                 </a:solidFill>
                 <a:latin typeface="Roboto"/>
               </a:rPr>
-              <a:t>Period: September 2026. Each source of money compared on what it raises and what it costs to raise. Pick a source and every chart, table row and note follows it.</a:t>
-            </a:r>
-          </a:p>
-        </p:txBody>
-      </p:sp>
-      <p:sp>
-        <p:nvSpPr>
-          <p:cNvPr id="8" name="TextBox 7"/>
+              <a:t>How final is this data?</a:t>
+            </a:r>
+          </a:p>
+          <a:p>
+            <a:pPr>
+              <a:defRPr>
+                <a:latin typeface="Roboto"/>
+              </a:defRPr>
+            </a:pPr>
+            <a:r>
+              <a:rPr sz="1100" b="0">
+                <a:solidFill>
+                  <a:srgbClr val="5F6F63"/>
+                </a:solidFill>
+                <a:latin typeface="Roboto"/>
+              </a:rPr>
+              <a:t>August 2026: Locked. August 2026 is locked (closed 2 Sep 2026). These numbers won't change.</a:t>
+            </a:r>
+          </a:p>
+          <a:p>
+            <a:pPr>
+              <a:defRPr>
+                <a:latin typeface="Roboto"/>
+              </a:defRPr>
+            </a:pPr>
+            <a:r>
+              <a:rPr sz="1100" b="0">
+                <a:solidFill>
+                  <a:srgbClr val="5F6F63"/>
+                </a:solidFill>
+                <a:latin typeface="Roboto"/>
+              </a:rPr>
+              <a:t>September 2026: Locked. September 2026 is locked (closed 2 Oct 2026). These numbers won't change.</a:t>
+            </a:r>
+          </a:p>
+          <a:p>
+            <a:pPr>
+              <a:defRPr>
+                <a:latin typeface="Roboto"/>
+              </a:defRPr>
+            </a:pPr>
+            <a:r>
+              <a:rPr sz="1100" b="0">
+                <a:solidFill>
+                  <a:srgbClr val="5F6F63"/>
+                </a:solidFill>
+                <a:latin typeface="Roboto"/>
+              </a:rPr>
+              <a:t>October 2026: Incomplete. October 2026 is still in progress: figures to 6 Oct only.</a:t>
+            </a:r>
+          </a:p>
+        </p:txBody>
+      </p:sp>
+      <p:sp>
+        <p:nvSpPr>
+          <p:cNvPr id="9" name="TextBox 8"/>
           <p:cNvSpPr txBox="1"/>
           <p:nvPr/>
         </p:nvSpPr>
         <p:spPr>
           <a:xfrm>
-            <a:off x="457200" y="4937760"/>
-            <a:ext cx="11247120" cy="1097280"/>
+            <a:off x="457200" y="6492240"/>
+            <a:ext cx="2926080" cy="274320"/>
           </a:xfrm>
           <a:prstGeom prst="rect">
             <a:avLst/>
@@ -4131,7 +5336,7 @@
           <a:noFill/>
         </p:spPr>
         <p:txBody>
-          <a:bodyPr wrap="square">
+          <a:bodyPr wrap="square" lIns="45720" rIns="45720">
             <a:spAutoFit/>
           </a:bodyPr>
           <a:lstStyle/>
@@ -4142,75 +5347,27 @@
               </a:defRPr>
             </a:pPr>
             <a:r>
-              <a:rPr sz="1100" b="0">
+              <a:rPr sz="900" b="0">
                 <a:solidFill>
                   <a:srgbClr val="5F6F63"/>
                 </a:solidFill>
                 <a:latin typeface="Roboto"/>
               </a:rPr>
-              <a:t>How final is this data?</a:t>
-            </a:r>
-          </a:p>
-          <a:p>
-            <a:pPr>
-              <a:defRPr>
-                <a:latin typeface="Roboto"/>
-              </a:defRPr>
-            </a:pPr>
-            <a:r>
-              <a:rPr sz="1100" b="0">
-                <a:solidFill>
-                  <a:srgbClr val="5F6F63"/>
-                </a:solidFill>
-                <a:latin typeface="Roboto"/>
-              </a:rPr>
-              <a:t>August 2026: Locked. August 2026 is locked (closed 2 Sep 2026). These numbers won't change.</a:t>
-            </a:r>
-          </a:p>
-          <a:p>
-            <a:pPr>
-              <a:defRPr>
-                <a:latin typeface="Roboto"/>
-              </a:defRPr>
-            </a:pPr>
-            <a:r>
-              <a:rPr sz="1100" b="0">
-                <a:solidFill>
-                  <a:srgbClr val="5F6F63"/>
-                </a:solidFill>
-                <a:latin typeface="Roboto"/>
-              </a:rPr>
-              <a:t>September 2026: Locked. September 2026 is locked (closed 2 Oct 2026). These numbers won't change.</a:t>
-            </a:r>
-          </a:p>
-          <a:p>
-            <a:pPr>
-              <a:defRPr>
-                <a:latin typeface="Roboto"/>
-              </a:defRPr>
-            </a:pPr>
-            <a:r>
-              <a:rPr sz="1100" b="0">
-                <a:solidFill>
-                  <a:srgbClr val="5F6F63"/>
-                </a:solidFill>
-                <a:latin typeface="Roboto"/>
-              </a:rPr>
-              <a:t>October 2026: Incomplete. October 2026 is still in progress: figures to 6 Oct only.</a:t>
-            </a:r>
-          </a:p>
-        </p:txBody>
-      </p:sp>
-      <p:sp>
-        <p:nvSpPr>
-          <p:cNvPr id="9" name="TextBox 8"/>
+              <a:t>funding.pptx</a:t>
+            </a:r>
+          </a:p>
+        </p:txBody>
+      </p:sp>
+      <p:sp>
+        <p:nvSpPr>
+          <p:cNvPr id="10" name="TextBox 9"/>
           <p:cNvSpPr txBox="1"/>
           <p:nvPr/>
         </p:nvSpPr>
         <p:spPr>
           <a:xfrm>
-            <a:off x="457200" y="6492240"/>
-            <a:ext cx="3657600" cy="274320"/>
+            <a:off x="3108960" y="6492240"/>
+            <a:ext cx="5943600" cy="274320"/>
           </a:xfrm>
           <a:prstGeom prst="rect">
             <a:avLst/>
@@ -4218,12 +5375,12 @@
           <a:noFill/>
         </p:spPr>
         <p:txBody>
-          <a:bodyPr wrap="square">
+          <a:bodyPr wrap="square" lIns="45720" rIns="45720">
             <a:spAutoFit/>
           </a:bodyPr>
           <a:lstStyle/>
           <a:p>
-            <a:pPr>
+            <a:pPr algn="ctr">
               <a:defRPr>
                 <a:latin typeface="Roboto"/>
               </a:defRPr>
@@ -4235,21 +5392,21 @@
                 </a:solidFill>
                 <a:latin typeface="Roboto"/>
               </a:rPr>
-              <a:t>funding.pptx</a:t>
-            </a:r>
-          </a:p>
-        </p:txBody>
-      </p:sp>
-      <p:sp>
-        <p:nvSpPr>
-          <p:cNvPr id="10" name="TextBox 9"/>
+              <a:t>Data retrieved 2pm, Tue 6 Oct 2026 · Generated 8 Oct 2026, 9:35am · Sample data · Made with Python (python-pptx)</a:t>
+            </a:r>
+          </a:p>
+        </p:txBody>
+      </p:sp>
+      <p:sp>
+        <p:nvSpPr>
+          <p:cNvPr id="11" name="TextBox 10"/>
           <p:cNvSpPr txBox="1"/>
           <p:nvPr/>
         </p:nvSpPr>
         <p:spPr>
           <a:xfrm>
-            <a:off x="4297680" y="6492240"/>
-            <a:ext cx="3657600" cy="274320"/>
+            <a:off x="8503920" y="6492240"/>
+            <a:ext cx="3200400" cy="274320"/>
           </a:xfrm>
           <a:prstGeom prst="rect">
             <a:avLst/>
@@ -4257,12 +5414,12 @@
           <a:noFill/>
         </p:spPr>
         <p:txBody>
-          <a:bodyPr wrap="square">
+          <a:bodyPr wrap="square" lIns="45720" rIns="45720">
             <a:spAutoFit/>
           </a:bodyPr>
           <a:lstStyle/>
           <a:p>
-            <a:pPr algn="ctr">
+            <a:pPr algn="r">
               <a:defRPr>
                 <a:latin typeface="Roboto"/>
               </a:defRPr>
@@ -4274,363 +5431,7 @@
                 </a:solidFill>
                 <a:latin typeface="Roboto"/>
               </a:rPr>
-              <a:t>Data retrieved 2pm, Tue 6 Oct 2026 · Sample data</a:t>
-            </a:r>
-          </a:p>
-        </p:txBody>
-      </p:sp>
-      <p:sp>
-        <p:nvSpPr>
-          <p:cNvPr id="11" name="TextBox 10"/>
-          <p:cNvSpPr txBox="1"/>
-          <p:nvPr/>
-        </p:nvSpPr>
-        <p:spPr>
-          <a:xfrm>
-            <a:off x="8503920" y="6492240"/>
-            <a:ext cx="3200400" cy="274320"/>
-          </a:xfrm>
-          <a:prstGeom prst="rect">
-            <a:avLst/>
-          </a:prstGeom>
-          <a:noFill/>
-        </p:spPr>
-        <p:txBody>
-          <a:bodyPr wrap="square">
-            <a:spAutoFit/>
-          </a:bodyPr>
-          <a:lstStyle/>
-          <a:p>
-            <a:pPr algn="r">
-              <a:defRPr>
-                <a:latin typeface="Roboto"/>
-              </a:defRPr>
-            </a:pPr>
-            <a:r>
-              <a:rPr sz="900" b="0">
-                <a:solidFill>
-                  <a:srgbClr val="5F6F63"/>
-                </a:solidFill>
-                <a:latin typeface="Roboto"/>
-              </a:rPr>
-              <a:t>Slide 1 of 10</a:t>
-            </a:r>
-          </a:p>
-        </p:txBody>
-      </p:sp>
-    </p:spTree>
-  </p:cSld>
-  <p:clrMapOvr>
-    <a:masterClrMapping/>
-  </p:clrMapOvr>
-</p:sld>
-</file>
-
-<file path=ppt/slides/slide10.xml><?xml version="1.0" encoding="utf-8"?>
-<p:sld xmlns:a="http://schemas.openxmlformats.org/drawingml/2006/main" xmlns:p="http://schemas.openxmlformats.org/presentationml/2006/main" xmlns:r="http://schemas.openxmlformats.org/officeDocument/2006/relationships">
-  <p:cSld>
-    <p:spTree>
-      <p:nvGrpSpPr>
-        <p:cNvPr id="1" name=""/>
-        <p:cNvGrpSpPr/>
-        <p:nvPr/>
-      </p:nvGrpSpPr>
-      <p:grpSpPr/>
-      <p:sp>
-        <p:nvSpPr>
-          <p:cNvPr id="2" name="Rectangle 1"/>
-          <p:cNvSpPr/>
-          <p:nvPr/>
-        </p:nvSpPr>
-        <p:spPr>
-          <a:xfrm>
-            <a:off x="0" y="0"/>
-            <a:ext cx="12191695" cy="73152"/>
-          </a:xfrm>
-          <a:prstGeom prst="rect">
-            <a:avLst/>
-          </a:prstGeom>
-          <a:solidFill>
-            <a:srgbClr val="2F7A5D"/>
-          </a:solidFill>
-          <a:ln>
-            <a:noFill/>
-          </a:ln>
-        </p:spPr>
-        <p:style>
-          <a:lnRef idx="1">
-            <a:schemeClr val="accent1"/>
-          </a:lnRef>
-          <a:fillRef idx="3">
-            <a:schemeClr val="accent1"/>
-          </a:fillRef>
-          <a:effectRef idx="2">
-            <a:schemeClr val="accent1"/>
-          </a:effectRef>
-          <a:fontRef idx="minor">
-            <a:schemeClr val="lt1"/>
-          </a:fontRef>
-        </p:style>
-        <p:txBody>
-          <a:bodyPr rtlCol="0" anchor="ctr"/>
-          <a:lstStyle/>
-          <a:p>
-            <a:pPr algn="ctr">
-              <a:defRPr>
-                <a:latin typeface="Roboto"/>
-              </a:defRPr>
-            </a:pPr>
-          </a:p>
-        </p:txBody>
-      </p:sp>
-      <p:sp>
-        <p:nvSpPr>
-          <p:cNvPr id="3" name="TextBox 2"/>
-          <p:cNvSpPr txBox="1"/>
-          <p:nvPr/>
-        </p:nvSpPr>
-        <p:spPr>
-          <a:xfrm>
-            <a:off x="457200" y="164592"/>
-            <a:ext cx="7315200" cy="274320"/>
-          </a:xfrm>
-          <a:prstGeom prst="rect">
-            <a:avLst/>
-          </a:prstGeom>
-          <a:noFill/>
-        </p:spPr>
-        <p:txBody>
-          <a:bodyPr wrap="square">
-            <a:spAutoFit/>
-          </a:bodyPr>
-          <a:lstStyle/>
-          <a:p>
-            <a:pPr>
-              <a:defRPr>
-                <a:latin typeface="Roboto"/>
-              </a:defRPr>
-            </a:pPr>
-            <a:r>
-              <a:rPr sz="1000" b="0">
-                <a:solidFill>
-                  <a:srgbClr val="5F6F63"/>
-                </a:solidFill>
-                <a:latin typeface="Roboto"/>
-              </a:rPr>
-              <a:t>Sample Community Services Ltd · Which funding is worth chasing?</a:t>
-            </a:r>
-          </a:p>
-        </p:txBody>
-      </p:sp>
-      <p:sp>
-        <p:nvSpPr>
-          <p:cNvPr id="4" name="TextBox 3"/>
-          <p:cNvSpPr txBox="1"/>
-          <p:nvPr/>
-        </p:nvSpPr>
-        <p:spPr>
-          <a:xfrm>
-            <a:off x="457200" y="411480"/>
-            <a:ext cx="11247120" cy="548640"/>
-          </a:xfrm>
-          <a:prstGeom prst="rect">
-            <a:avLst/>
-          </a:prstGeom>
-          <a:noFill/>
-        </p:spPr>
-        <p:txBody>
-          <a:bodyPr wrap="square">
-            <a:spAutoFit/>
-          </a:bodyPr>
-          <a:lstStyle/>
-          <a:p>
-            <a:pPr>
-              <a:defRPr>
-                <a:latin typeface="Roboto"/>
-              </a:defRPr>
-            </a:pPr>
-            <a:r>
-              <a:rPr sz="2400" b="1">
-                <a:solidFill>
-                  <a:srgbClr val="25342A"/>
-                </a:solidFill>
-                <a:latin typeface="Roboto"/>
-              </a:rPr>
-              <a:t>Raised and left after costs, by month · Left after costs $ · Every source at once</a:t>
-            </a:r>
-          </a:p>
-        </p:txBody>
-      </p:sp>
-      <p:sp>
-        <p:nvSpPr>
-          <p:cNvPr id="5" name="TextBox 4"/>
-          <p:cNvSpPr txBox="1"/>
-          <p:nvPr/>
-        </p:nvSpPr>
-        <p:spPr>
-          <a:xfrm>
-            <a:off x="457200" y="960120"/>
-            <a:ext cx="11247120" cy="457200"/>
-          </a:xfrm>
-          <a:prstGeom prst="rect">
-            <a:avLst/>
-          </a:prstGeom>
-          <a:noFill/>
-        </p:spPr>
-        <p:txBody>
-          <a:bodyPr wrap="square">
-            <a:spAutoFit/>
-          </a:bodyPr>
-          <a:lstStyle/>
-          <a:p>
-            <a:pPr>
-              <a:defRPr>
-                <a:latin typeface="Roboto"/>
-              </a:defRPr>
-            </a:pPr>
-            <a:r>
-              <a:rPr sz="1200" b="0">
-                <a:solidFill>
-                  <a:srgbClr val="5F6F63"/>
-                </a:solidFill>
-                <a:latin typeface="Roboto"/>
-              </a:rPr>
-              <a:t>Tap a month for its workings.</a:t>
-            </a:r>
-          </a:p>
-        </p:txBody>
-      </p:sp>
-      <p:graphicFrame>
-        <p:nvGraphicFramePr>
-          <p:cNvPr id="6" name="Chart 5"/>
-          <p:cNvGraphicFramePr>
-            <a:graphicFrameLocks noGrp="1"/>
-          </p:cNvGraphicFramePr>
-          <p:nvPr/>
-        </p:nvGraphicFramePr>
-        <p:xfrm>
-          <a:off x="457200" y="1463040"/>
-          <a:ext cx="11247120" cy="4754880"/>
-        </p:xfrm>
-        <a:graphic>
-          <a:graphicData uri="http://schemas.openxmlformats.org/drawingml/2006/chart">
-            <c:chart xmlns:c="http://schemas.openxmlformats.org/drawingml/2006/chart" r:id="rId2"/>
-          </a:graphicData>
-        </a:graphic>
-      </p:graphicFrame>
-      <p:sp>
-        <p:nvSpPr>
-          <p:cNvPr id="7" name="TextBox 6"/>
-          <p:cNvSpPr txBox="1"/>
-          <p:nvPr/>
-        </p:nvSpPr>
-        <p:spPr>
-          <a:xfrm>
-            <a:off x="457200" y="6492240"/>
-            <a:ext cx="3657600" cy="274320"/>
-          </a:xfrm>
-          <a:prstGeom prst="rect">
-            <a:avLst/>
-          </a:prstGeom>
-          <a:noFill/>
-        </p:spPr>
-        <p:txBody>
-          <a:bodyPr wrap="square">
-            <a:spAutoFit/>
-          </a:bodyPr>
-          <a:lstStyle/>
-          <a:p>
-            <a:pPr>
-              <a:defRPr>
-                <a:latin typeface="Roboto"/>
-              </a:defRPr>
-            </a:pPr>
-            <a:r>
-              <a:rPr sz="900" b="0">
-                <a:solidFill>
-                  <a:srgbClr val="5F6F63"/>
-                </a:solidFill>
-                <a:latin typeface="Roboto"/>
-              </a:rPr>
-              <a:t>funding.pptx</a:t>
-            </a:r>
-          </a:p>
-        </p:txBody>
-      </p:sp>
-      <p:sp>
-        <p:nvSpPr>
-          <p:cNvPr id="8" name="TextBox 7"/>
-          <p:cNvSpPr txBox="1"/>
-          <p:nvPr/>
-        </p:nvSpPr>
-        <p:spPr>
-          <a:xfrm>
-            <a:off x="4297680" y="6492240"/>
-            <a:ext cx="3657600" cy="274320"/>
-          </a:xfrm>
-          <a:prstGeom prst="rect">
-            <a:avLst/>
-          </a:prstGeom>
-          <a:noFill/>
-        </p:spPr>
-        <p:txBody>
-          <a:bodyPr wrap="square">
-            <a:spAutoFit/>
-          </a:bodyPr>
-          <a:lstStyle/>
-          <a:p>
-            <a:pPr algn="ctr">
-              <a:defRPr>
-                <a:latin typeface="Roboto"/>
-              </a:defRPr>
-            </a:pPr>
-            <a:r>
-              <a:rPr sz="900" b="0">
-                <a:solidFill>
-                  <a:srgbClr val="5F6F63"/>
-                </a:solidFill>
-                <a:latin typeface="Roboto"/>
-              </a:rPr>
-              <a:t>Data retrieved 2pm, Tue 6 Oct 2026 · Sample data</a:t>
-            </a:r>
-          </a:p>
-        </p:txBody>
-      </p:sp>
-      <p:sp>
-        <p:nvSpPr>
-          <p:cNvPr id="9" name="TextBox 8"/>
-          <p:cNvSpPr txBox="1"/>
-          <p:nvPr/>
-        </p:nvSpPr>
-        <p:spPr>
-          <a:xfrm>
-            <a:off x="8503920" y="6492240"/>
-            <a:ext cx="3200400" cy="274320"/>
-          </a:xfrm>
-          <a:prstGeom prst="rect">
-            <a:avLst/>
-          </a:prstGeom>
-          <a:noFill/>
-        </p:spPr>
-        <p:txBody>
-          <a:bodyPr wrap="square">
-            <a:spAutoFit/>
-          </a:bodyPr>
-          <a:lstStyle/>
-          <a:p>
-            <a:pPr algn="r">
-              <a:defRPr>
-                <a:latin typeface="Roboto"/>
-              </a:defRPr>
-            </a:pPr>
-            <a:r>
-              <a:rPr sz="900" b="0">
-                <a:solidFill>
-                  <a:srgbClr val="5F6F63"/>
-                </a:solidFill>
-                <a:latin typeface="Roboto"/>
-              </a:rPr>
-              <a:t>Slide 10 of 10</a:t>
+              <a:t>Slide 1 of 6</a:t>
             </a:r>
           </a:p>
         </p:txBody>
@@ -4655,7 +5456,44 @@
       <p:grpSpPr/>
       <p:sp>
         <p:nvSpPr>
-          <p:cNvPr id="2" name="Rectangle 1"/>
+          <p:cNvPr id="2" name="Title 1"/>
+          <p:cNvSpPr>
+            <a:spLocks noGrp="1"/>
+          </p:cNvSpPr>
+          <p:nvPr>
+            <p:ph type="title"/>
+          </p:nvPr>
+        </p:nvSpPr>
+        <p:spPr>
+          <a:xfrm>
+            <a:off x="457200" y="384048"/>
+            <a:ext cx="11277295" cy="475488"/>
+          </a:xfrm>
+        </p:spPr>
+        <p:txBody>
+          <a:bodyPr wrap="square" lIns="45720" rIns="45720" tIns="0" bIns="0" anchor="t"/>
+          <a:lstStyle/>
+          <a:p>
+            <a:pPr algn="l">
+              <a:defRPr>
+                <a:latin typeface="Roboto"/>
+              </a:defRPr>
+            </a:pPr>
+            <a:r>
+              <a:rPr sz="2400" b="1">
+                <a:solidFill>
+                  <a:srgbClr val="25342A"/>
+                </a:solidFill>
+                <a:latin typeface="Roboto"/>
+              </a:rPr>
+              <a:t>All sources</a:t>
+            </a:r>
+          </a:p>
+        </p:txBody>
+      </p:sp>
+      <p:sp>
+        <p:nvSpPr>
+          <p:cNvPr id="3" name="Rectangle 2"/>
           <p:cNvSpPr/>
           <p:nvPr/>
         </p:nvSpPr>
@@ -4702,14 +5540,14 @@
       </p:sp>
       <p:sp>
         <p:nvSpPr>
-          <p:cNvPr id="3" name="TextBox 2"/>
+          <p:cNvPr id="4" name="TextBox 3"/>
           <p:cNvSpPr txBox="1"/>
           <p:nvPr/>
         </p:nvSpPr>
         <p:spPr>
           <a:xfrm>
-            <a:off x="457200" y="164592"/>
-            <a:ext cx="7315200" cy="274320"/>
+            <a:off x="457200" y="146304"/>
+            <a:ext cx="8229600" cy="256032"/>
           </a:xfrm>
           <a:prstGeom prst="rect">
             <a:avLst/>
@@ -4717,7 +5555,7 @@
           <a:noFill/>
         </p:spPr>
         <p:txBody>
-          <a:bodyPr wrap="square">
+          <a:bodyPr wrap="square" lIns="45720" rIns="45720">
             <a:spAutoFit/>
           </a:bodyPr>
           <a:lstStyle/>
@@ -4741,14 +5579,14 @@
       </p:sp>
       <p:sp>
         <p:nvSpPr>
-          <p:cNvPr id="4" name="TextBox 3"/>
+          <p:cNvPr id="5" name="TextBox 4"/>
           <p:cNvSpPr txBox="1"/>
           <p:nvPr/>
         </p:nvSpPr>
         <p:spPr>
           <a:xfrm>
-            <a:off x="457200" y="411480"/>
-            <a:ext cx="11247120" cy="548640"/>
+            <a:off x="457200" y="914400"/>
+            <a:ext cx="11277295" cy="263652"/>
           </a:xfrm>
           <a:prstGeom prst="rect">
             <a:avLst/>
@@ -4756,7 +5594,7 @@
           <a:noFill/>
         </p:spPr>
         <p:txBody>
-          <a:bodyPr wrap="square">
+          <a:bodyPr wrap="square" lIns="45720" rIns="45720">
             <a:spAutoFit/>
           </a:bodyPr>
           <a:lstStyle/>
@@ -4767,45 +5605,94 @@
               </a:defRPr>
             </a:pPr>
             <a:r>
-              <a:rPr sz="2400" b="1">
+              <a:rPr sz="1200" b="0">
                 <a:solidFill>
-                  <a:srgbClr val="25342A"/>
+                  <a:srgbClr val="5F6F63"/>
                 </a:solidFill>
                 <a:latin typeface="Roboto"/>
               </a:rPr>
-              <a:t>Cost to raise a dollar, by source, September 2026 (cents) · Source: All sources</a:t>
+              <a:t>Cost to raise a dollar, by source, September 2026 (cents)</a:t>
             </a:r>
           </a:p>
         </p:txBody>
       </p:sp>
       <p:graphicFrame>
         <p:nvGraphicFramePr>
-          <p:cNvPr id="5" name="Chart 4"/>
+          <p:cNvPr id="6" name="Chart 5"/>
           <p:cNvGraphicFramePr>
             <a:graphicFrameLocks noGrp="1"/>
           </p:cNvGraphicFramePr>
           <p:nvPr/>
         </p:nvGraphicFramePr>
         <p:xfrm>
-          <a:off x="457200" y="1188720"/>
-          <a:ext cx="11247120" cy="5029200"/>
+          <a:off x="457200" y="1278636"/>
+          <a:ext cx="11277295" cy="1883664"/>
         </p:xfrm>
         <a:graphic>
           <a:graphicData uri="http://schemas.openxmlformats.org/drawingml/2006/chart">
-            <c:chart xmlns:c="http://schemas.openxmlformats.org/drawingml/2006/chart" r:id="rId2"/>
+            <c:chart xmlns:c="http://schemas.openxmlformats.org/drawingml/2006/chart" r:id="rId3"/>
           </a:graphicData>
         </a:graphic>
       </p:graphicFrame>
       <p:sp>
         <p:nvSpPr>
-          <p:cNvPr id="6" name="TextBox 5"/>
+          <p:cNvPr id="7" name="Rectangle 6"/>
+          <p:cNvSpPr/>
+          <p:nvPr/>
+        </p:nvSpPr>
+        <p:spPr>
+          <a:xfrm>
+            <a:off x="457200" y="3253740"/>
+            <a:ext cx="5501487" cy="1097280"/>
+          </a:xfrm>
+          <a:prstGeom prst="rect">
+            <a:avLst/>
+          </a:prstGeom>
+          <a:solidFill>
+            <a:srgbClr val="FFFFFF"/>
+          </a:solidFill>
+          <a:ln>
+            <a:solidFill>
+              <a:srgbClr val="DCE8DC"/>
+            </a:solidFill>
+          </a:ln>
+        </p:spPr>
+        <p:style>
+          <a:lnRef idx="1">
+            <a:schemeClr val="accent1"/>
+          </a:lnRef>
+          <a:fillRef idx="3">
+            <a:schemeClr val="accent1"/>
+          </a:fillRef>
+          <a:effectRef idx="2">
+            <a:schemeClr val="accent1"/>
+          </a:effectRef>
+          <a:fontRef idx="minor">
+            <a:schemeClr val="lt1"/>
+          </a:fontRef>
+        </p:style>
+        <p:txBody>
+          <a:bodyPr rtlCol="0" anchor="ctr"/>
+          <a:lstStyle/>
+          <a:p>
+            <a:pPr algn="ctr">
+              <a:defRPr>
+                <a:latin typeface="Roboto"/>
+              </a:defRPr>
+            </a:pPr>
+          </a:p>
+        </p:txBody>
+      </p:sp>
+      <p:sp>
+        <p:nvSpPr>
+          <p:cNvPr id="8" name="TextBox 7"/>
           <p:cNvSpPr txBox="1"/>
           <p:nvPr/>
         </p:nvSpPr>
         <p:spPr>
           <a:xfrm>
-            <a:off x="457200" y="6492240"/>
-            <a:ext cx="3657600" cy="274320"/>
+            <a:off x="594360" y="3308604"/>
+            <a:ext cx="5227167" cy="274320"/>
           </a:xfrm>
           <a:prstGeom prst="rect">
             <a:avLst/>
@@ -4813,7 +5700,212 @@
           <a:noFill/>
         </p:spPr>
         <p:txBody>
-          <a:bodyPr wrap="square">
+          <a:bodyPr wrap="square" lIns="45720" rIns="45720">
+            <a:spAutoFit/>
+          </a:bodyPr>
+          <a:lstStyle/>
+          <a:p>
+            <a:pPr>
+              <a:defRPr>
+                <a:latin typeface="Roboto"/>
+              </a:defRPr>
+            </a:pPr>
+            <a:r>
+              <a:rPr sz="1000" b="1">
+                <a:solidFill>
+                  <a:srgbClr val="5F6F63"/>
+                </a:solidFill>
+                <a:latin typeface="Roboto"/>
+              </a:rPr>
+              <a:t>WHAT IT SHOWS</a:t>
+            </a:r>
+          </a:p>
+        </p:txBody>
+      </p:sp>
+      <p:sp>
+        <p:nvSpPr>
+          <p:cNvPr id="9" name="TextBox 8"/>
+          <p:cNvSpPr txBox="1"/>
+          <p:nvPr/>
+        </p:nvSpPr>
+        <p:spPr>
+          <a:xfrm>
+            <a:off x="594360" y="3582924"/>
+            <a:ext cx="5227167" cy="731520"/>
+          </a:xfrm>
+          <a:prstGeom prst="rect">
+            <a:avLst/>
+          </a:prstGeom>
+          <a:noFill/>
+        </p:spPr>
+        <p:txBody>
+          <a:bodyPr wrap="square" lIns="45720" rIns="45720">
+            <a:spAutoFit/>
+          </a:bodyPr>
+          <a:lstStyle/>
+          <a:p>
+            <a:pPr>
+              <a:defRPr>
+                <a:latin typeface="Roboto"/>
+              </a:defRPr>
+            </a:pPr>
+            <a:r>
+              <a:rPr sz="1200" b="0">
+                <a:solidFill>
+                  <a:srgbClr val="25342A"/>
+                </a:solidFill>
+                <a:latin typeface="Roboto"/>
+              </a:rPr>
+              <a:t>In September it cost: Grants 9¢, donations 19¢ and fundraising events 41¢ to raise each dollar.</a:t>
+            </a:r>
+          </a:p>
+        </p:txBody>
+      </p:sp>
+      <p:sp>
+        <p:nvSpPr>
+          <p:cNvPr id="10" name="Rectangle 9"/>
+          <p:cNvSpPr/>
+          <p:nvPr/>
+        </p:nvSpPr>
+        <p:spPr>
+          <a:xfrm>
+            <a:off x="6233007" y="3253740"/>
+            <a:ext cx="5501487" cy="1097280"/>
+          </a:xfrm>
+          <a:prstGeom prst="rect">
+            <a:avLst/>
+          </a:prstGeom>
+          <a:solidFill>
+            <a:srgbClr val="EEF5F0"/>
+          </a:solidFill>
+          <a:ln>
+            <a:solidFill>
+              <a:srgbClr val="DCE8DC"/>
+            </a:solidFill>
+          </a:ln>
+        </p:spPr>
+        <p:style>
+          <a:lnRef idx="1">
+            <a:schemeClr val="accent1"/>
+          </a:lnRef>
+          <a:fillRef idx="3">
+            <a:schemeClr val="accent1"/>
+          </a:fillRef>
+          <a:effectRef idx="2">
+            <a:schemeClr val="accent1"/>
+          </a:effectRef>
+          <a:fontRef idx="minor">
+            <a:schemeClr val="lt1"/>
+          </a:fontRef>
+        </p:style>
+        <p:txBody>
+          <a:bodyPr rtlCol="0" anchor="ctr"/>
+          <a:lstStyle/>
+          <a:p>
+            <a:pPr algn="ctr">
+              <a:defRPr>
+                <a:latin typeface="Roboto"/>
+              </a:defRPr>
+            </a:pPr>
+          </a:p>
+        </p:txBody>
+      </p:sp>
+      <p:sp>
+        <p:nvSpPr>
+          <p:cNvPr id="11" name="TextBox 10"/>
+          <p:cNvSpPr txBox="1"/>
+          <p:nvPr/>
+        </p:nvSpPr>
+        <p:spPr>
+          <a:xfrm>
+            <a:off x="6370167" y="3308604"/>
+            <a:ext cx="5227167" cy="274320"/>
+          </a:xfrm>
+          <a:prstGeom prst="rect">
+            <a:avLst/>
+          </a:prstGeom>
+          <a:noFill/>
+        </p:spPr>
+        <p:txBody>
+          <a:bodyPr wrap="square" lIns="45720" rIns="45720">
+            <a:spAutoFit/>
+          </a:bodyPr>
+          <a:lstStyle/>
+          <a:p>
+            <a:pPr>
+              <a:defRPr>
+                <a:latin typeface="Roboto"/>
+              </a:defRPr>
+            </a:pPr>
+            <a:r>
+              <a:rPr sz="1000" b="1">
+                <a:solidFill>
+                  <a:srgbClr val="5F6F63"/>
+                </a:solidFill>
+                <a:latin typeface="Roboto"/>
+              </a:rPr>
+              <a:t>WHAT YOU'D DO ABOUT IT</a:t>
+            </a:r>
+          </a:p>
+        </p:txBody>
+      </p:sp>
+      <p:sp>
+        <p:nvSpPr>
+          <p:cNvPr id="12" name="TextBox 11"/>
+          <p:cNvSpPr txBox="1"/>
+          <p:nvPr/>
+        </p:nvSpPr>
+        <p:spPr>
+          <a:xfrm>
+            <a:off x="6370167" y="3582924"/>
+            <a:ext cx="5227167" cy="731520"/>
+          </a:xfrm>
+          <a:prstGeom prst="rect">
+            <a:avLst/>
+          </a:prstGeom>
+          <a:noFill/>
+        </p:spPr>
+        <p:txBody>
+          <a:bodyPr wrap="square" lIns="45720" rIns="45720">
+            <a:spAutoFit/>
+          </a:bodyPr>
+          <a:lstStyle/>
+          <a:p>
+            <a:pPr>
+              <a:defRPr>
+                <a:latin typeface="Roboto"/>
+              </a:defRPr>
+            </a:pPr>
+            <a:r>
+              <a:rPr sz="1200" b="0">
+                <a:solidFill>
+                  <a:srgbClr val="25342A"/>
+                </a:solidFill>
+                <a:latin typeface="Roboto"/>
+              </a:rPr>
+              <a:t>Cheapest to raise in September: grants (9¢ a dollar). Dearest: fundraising events (41¢). Events are worth counting for what else they bring too (new donors, profile).</a:t>
+            </a:r>
+          </a:p>
+        </p:txBody>
+      </p:sp>
+      <p:sp>
+        <p:nvSpPr>
+          <p:cNvPr id="13" name="TextBox 12"/>
+          <p:cNvSpPr txBox="1"/>
+          <p:nvPr/>
+        </p:nvSpPr>
+        <p:spPr>
+          <a:xfrm>
+            <a:off x="457200" y="6492240"/>
+            <a:ext cx="2926080" cy="274320"/>
+          </a:xfrm>
+          <a:prstGeom prst="rect">
+            <a:avLst/>
+          </a:prstGeom>
+          <a:noFill/>
+        </p:spPr>
+        <p:txBody>
+          <a:bodyPr wrap="square" lIns="45720" rIns="45720">
             <a:spAutoFit/>
           </a:bodyPr>
           <a:lstStyle/>
@@ -4837,14 +5929,14 @@
       </p:sp>
       <p:sp>
         <p:nvSpPr>
-          <p:cNvPr id="7" name="TextBox 6"/>
+          <p:cNvPr id="14" name="TextBox 13"/>
           <p:cNvSpPr txBox="1"/>
           <p:nvPr/>
         </p:nvSpPr>
         <p:spPr>
           <a:xfrm>
-            <a:off x="4297680" y="6492240"/>
-            <a:ext cx="3657600" cy="274320"/>
+            <a:off x="3108960" y="6492240"/>
+            <a:ext cx="5943600" cy="274320"/>
           </a:xfrm>
           <a:prstGeom prst="rect">
             <a:avLst/>
@@ -4852,7 +5944,7 @@
           <a:noFill/>
         </p:spPr>
         <p:txBody>
-          <a:bodyPr wrap="square">
+          <a:bodyPr wrap="square" lIns="45720" rIns="45720">
             <a:spAutoFit/>
           </a:bodyPr>
           <a:lstStyle/>
@@ -4869,14 +5961,14 @@
                 </a:solidFill>
                 <a:latin typeface="Roboto"/>
               </a:rPr>
-              <a:t>Data retrieved 2pm, Tue 6 Oct 2026 · Sample data</a:t>
-            </a:r>
-          </a:p>
-        </p:txBody>
-      </p:sp>
-      <p:sp>
-        <p:nvSpPr>
-          <p:cNvPr id="8" name="TextBox 7"/>
+              <a:t>Data retrieved 2pm, Tue 6 Oct 2026 · Generated 8 Oct 2026, 9:35am · Sample data · Made with Python (python-pptx)</a:t>
+            </a:r>
+          </a:p>
+        </p:txBody>
+      </p:sp>
+      <p:sp>
+        <p:nvSpPr>
+          <p:cNvPr id="15" name="TextBox 14"/>
           <p:cNvSpPr txBox="1"/>
           <p:nvPr/>
         </p:nvSpPr>
@@ -4891,7 +5983,7 @@
           <a:noFill/>
         </p:spPr>
         <p:txBody>
-          <a:bodyPr wrap="square">
+          <a:bodyPr wrap="square" lIns="45720" rIns="45720">
             <a:spAutoFit/>
           </a:bodyPr>
           <a:lstStyle/>
@@ -4908,7 +6000,7 @@
                 </a:solidFill>
                 <a:latin typeface="Roboto"/>
               </a:rPr>
-              <a:t>Slide 2 of 10</a:t>
+              <a:t>Slide 2 of 6</a:t>
             </a:r>
           </a:p>
         </p:txBody>
@@ -4933,7 +6025,44 @@
       <p:grpSpPr/>
       <p:sp>
         <p:nvSpPr>
-          <p:cNvPr id="2" name="Rectangle 1"/>
+          <p:cNvPr id="2" name="Title 1"/>
+          <p:cNvSpPr>
+            <a:spLocks noGrp="1"/>
+          </p:cNvSpPr>
+          <p:nvPr>
+            <p:ph type="title"/>
+          </p:nvPr>
+        </p:nvSpPr>
+        <p:spPr>
+          <a:xfrm>
+            <a:off x="457200" y="384048"/>
+            <a:ext cx="11277295" cy="475488"/>
+          </a:xfrm>
+        </p:spPr>
+        <p:txBody>
+          <a:bodyPr wrap="square" lIns="45720" rIns="45720" tIns="0" bIns="0" anchor="t"/>
+          <a:lstStyle/>
+          <a:p>
+            <a:pPr algn="l">
+              <a:defRPr>
+                <a:latin typeface="Roboto"/>
+              </a:defRPr>
+            </a:pPr>
+            <a:r>
+              <a:rPr sz="2400" b="1">
+                <a:solidFill>
+                  <a:srgbClr val="25342A"/>
+                </a:solidFill>
+                <a:latin typeface="Roboto"/>
+              </a:rPr>
+              <a:t>Grants</a:t>
+            </a:r>
+          </a:p>
+        </p:txBody>
+      </p:sp>
+      <p:sp>
+        <p:nvSpPr>
+          <p:cNvPr id="3" name="Rectangle 2"/>
           <p:cNvSpPr/>
           <p:nvPr/>
         </p:nvSpPr>
@@ -4980,14 +6109,14 @@
       </p:sp>
       <p:sp>
         <p:nvSpPr>
-          <p:cNvPr id="3" name="TextBox 2"/>
+          <p:cNvPr id="4" name="TextBox 3"/>
           <p:cNvSpPr txBox="1"/>
           <p:nvPr/>
         </p:nvSpPr>
         <p:spPr>
           <a:xfrm>
-            <a:off x="457200" y="164592"/>
-            <a:ext cx="7315200" cy="274320"/>
+            <a:off x="457200" y="146304"/>
+            <a:ext cx="8229600" cy="256032"/>
           </a:xfrm>
           <a:prstGeom prst="rect">
             <a:avLst/>
@@ -4995,7 +6124,7 @@
           <a:noFill/>
         </p:spPr>
         <p:txBody>
-          <a:bodyPr wrap="square">
+          <a:bodyPr wrap="square" lIns="45720" rIns="45720">
             <a:spAutoFit/>
           </a:bodyPr>
           <a:lstStyle/>
@@ -5019,14 +6148,14 @@
       </p:sp>
       <p:sp>
         <p:nvSpPr>
-          <p:cNvPr id="4" name="TextBox 3"/>
+          <p:cNvPr id="5" name="TextBox 4"/>
           <p:cNvSpPr txBox="1"/>
           <p:nvPr/>
         </p:nvSpPr>
         <p:spPr>
           <a:xfrm>
-            <a:off x="457200" y="411480"/>
-            <a:ext cx="11247120" cy="548640"/>
+            <a:off x="457200" y="914400"/>
+            <a:ext cx="11277295" cy="263652"/>
           </a:xfrm>
           <a:prstGeom prst="rect">
             <a:avLst/>
@@ -5034,7 +6163,7 @@
           <a:noFill/>
         </p:spPr>
         <p:txBody>
-          <a:bodyPr wrap="square">
+          <a:bodyPr wrap="square" lIns="45720" rIns="45720">
             <a:spAutoFit/>
           </a:bodyPr>
           <a:lstStyle/>
@@ -5045,27 +6174,45 @@
               </a:defRPr>
             </a:pPr>
             <a:r>
-              <a:rPr sz="2400" b="1">
+              <a:rPr sz="1200" b="0">
                 <a:solidFill>
-                  <a:srgbClr val="25342A"/>
+                  <a:srgbClr val="5F6F63"/>
                 </a:solidFill>
                 <a:latin typeface="Roboto"/>
               </a:rPr>
-              <a:t>What it shows · Source: All sources</a:t>
-            </a:r>
-          </a:p>
-        </p:txBody>
-      </p:sp>
-      <p:sp>
-        <p:nvSpPr>
-          <p:cNvPr id="5" name="Rectangle 4"/>
+              <a:t>Raised and left after costs, by month · Grants</a:t>
+            </a:r>
+          </a:p>
+        </p:txBody>
+      </p:sp>
+      <p:graphicFrame>
+        <p:nvGraphicFramePr>
+          <p:cNvPr id="6" name="Chart 5"/>
+          <p:cNvGraphicFramePr>
+            <a:graphicFrameLocks noGrp="1"/>
+          </p:cNvGraphicFramePr>
+          <p:nvPr/>
+        </p:nvGraphicFramePr>
+        <p:xfrm>
+          <a:off x="457200" y="1278636"/>
+          <a:ext cx="11277295" cy="3842004"/>
+        </p:xfrm>
+        <a:graphic>
+          <a:graphicData uri="http://schemas.openxmlformats.org/drawingml/2006/chart">
+            <c:chart xmlns:c="http://schemas.openxmlformats.org/drawingml/2006/chart" r:id="rId3"/>
+          </a:graphicData>
+        </a:graphic>
+      </p:graphicFrame>
+      <p:sp>
+        <p:nvSpPr>
+          <p:cNvPr id="7" name="Rectangle 6"/>
           <p:cNvSpPr/>
           <p:nvPr/>
         </p:nvSpPr>
         <p:spPr>
           <a:xfrm>
-            <a:off x="457200" y="1554480"/>
-            <a:ext cx="5501487" cy="4389120"/>
+            <a:off x="457200" y="5212080"/>
+            <a:ext cx="5501487" cy="1097280"/>
           </a:xfrm>
           <a:prstGeom prst="rect">
             <a:avLst/>
@@ -5107,14 +6254,14 @@
       </p:sp>
       <p:sp>
         <p:nvSpPr>
-          <p:cNvPr id="6" name="TextBox 5"/>
+          <p:cNvPr id="8" name="TextBox 7"/>
           <p:cNvSpPr txBox="1"/>
           <p:nvPr/>
         </p:nvSpPr>
         <p:spPr>
           <a:xfrm>
-            <a:off x="685800" y="1691640"/>
-            <a:ext cx="5044287" cy="365760"/>
+            <a:off x="594360" y="5266944"/>
+            <a:ext cx="5227167" cy="274320"/>
           </a:xfrm>
           <a:prstGeom prst="rect">
             <a:avLst/>
@@ -5122,7 +6269,7 @@
           <a:noFill/>
         </p:spPr>
         <p:txBody>
-          <a:bodyPr wrap="square">
+          <a:bodyPr wrap="square" lIns="45720" rIns="45720">
             <a:spAutoFit/>
           </a:bodyPr>
           <a:lstStyle/>
@@ -5133,7 +6280,7 @@
               </a:defRPr>
             </a:pPr>
             <a:r>
-              <a:rPr sz="1100" b="1">
+              <a:rPr sz="1000" b="1">
                 <a:solidFill>
                   <a:srgbClr val="5F6F63"/>
                 </a:solidFill>
@@ -5146,14 +6293,14 @@
       </p:sp>
       <p:sp>
         <p:nvSpPr>
-          <p:cNvPr id="7" name="TextBox 6"/>
+          <p:cNvPr id="9" name="TextBox 8"/>
           <p:cNvSpPr txBox="1"/>
           <p:nvPr/>
         </p:nvSpPr>
         <p:spPr>
           <a:xfrm>
-            <a:off x="685800" y="2103120"/>
-            <a:ext cx="5044287" cy="3749039"/>
+            <a:off x="594360" y="5541264"/>
+            <a:ext cx="5227167" cy="731520"/>
           </a:xfrm>
           <a:prstGeom prst="rect">
             <a:avLst/>
@@ -5161,7 +6308,7 @@
           <a:noFill/>
         </p:spPr>
         <p:txBody>
-          <a:bodyPr wrap="square">
+          <a:bodyPr wrap="square" lIns="45720" rIns="45720">
             <a:spAutoFit/>
           </a:bodyPr>
           <a:lstStyle/>
@@ -5172,27 +6319,27 @@
               </a:defRPr>
             </a:pPr>
             <a:r>
-              <a:rPr sz="1600" b="0">
+              <a:rPr sz="1200" b="0">
                 <a:solidFill>
                   <a:srgbClr val="25342A"/>
                 </a:solidFill>
                 <a:latin typeface="Roboto"/>
               </a:rPr>
-              <a:t>In September it cost: Grants 9¢, donations 19¢ and fundraising events 41¢ to raise each dollar.</a:t>
-            </a:r>
-          </a:p>
-        </p:txBody>
-      </p:sp>
-      <p:sp>
-        <p:nvSpPr>
-          <p:cNvPr id="8" name="Rectangle 7"/>
+              <a:t>Grants: $223,318 raised this financial year to date (68.6% of everything raised), $21,300 to raise it, so $202,018 left for programs: 10¢ per dollar.</a:t>
+            </a:r>
+          </a:p>
+        </p:txBody>
+      </p:sp>
+      <p:sp>
+        <p:nvSpPr>
+          <p:cNvPr id="10" name="Rectangle 9"/>
           <p:cNvSpPr/>
           <p:nvPr/>
         </p:nvSpPr>
         <p:spPr>
           <a:xfrm>
-            <a:off x="6233007" y="1554480"/>
-            <a:ext cx="5501487" cy="4389120"/>
+            <a:off x="6233007" y="5212080"/>
+            <a:ext cx="5501487" cy="1097280"/>
           </a:xfrm>
           <a:prstGeom prst="rect">
             <a:avLst/>
@@ -5234,14 +6381,14 @@
       </p:sp>
       <p:sp>
         <p:nvSpPr>
-          <p:cNvPr id="9" name="TextBox 8"/>
+          <p:cNvPr id="11" name="TextBox 10"/>
           <p:cNvSpPr txBox="1"/>
           <p:nvPr/>
         </p:nvSpPr>
         <p:spPr>
           <a:xfrm>
-            <a:off x="6461607" y="1691640"/>
-            <a:ext cx="5044287" cy="365760"/>
+            <a:off x="6370167" y="5266944"/>
+            <a:ext cx="5227167" cy="274320"/>
           </a:xfrm>
           <a:prstGeom prst="rect">
             <a:avLst/>
@@ -5249,7 +6396,7 @@
           <a:noFill/>
         </p:spPr>
         <p:txBody>
-          <a:bodyPr wrap="square">
+          <a:bodyPr wrap="square" lIns="45720" rIns="45720">
             <a:spAutoFit/>
           </a:bodyPr>
           <a:lstStyle/>
@@ -5260,7 +6407,7 @@
               </a:defRPr>
             </a:pPr>
             <a:r>
-              <a:rPr sz="1100" b="1">
+              <a:rPr sz="1000" b="1">
                 <a:solidFill>
                   <a:srgbClr val="5F6F63"/>
                 </a:solidFill>
@@ -5273,14 +6420,14 @@
       </p:sp>
       <p:sp>
         <p:nvSpPr>
-          <p:cNvPr id="10" name="TextBox 9"/>
+          <p:cNvPr id="12" name="TextBox 11"/>
           <p:cNvSpPr txBox="1"/>
           <p:nvPr/>
         </p:nvSpPr>
         <p:spPr>
           <a:xfrm>
-            <a:off x="6461607" y="2103120"/>
-            <a:ext cx="5044287" cy="3749039"/>
+            <a:off x="6370167" y="5541264"/>
+            <a:ext cx="5227167" cy="731520"/>
           </a:xfrm>
           <a:prstGeom prst="rect">
             <a:avLst/>
@@ -5288,7 +6435,7 @@
           <a:noFill/>
         </p:spPr>
         <p:txBody>
-          <a:bodyPr wrap="square">
+          <a:bodyPr wrap="square" lIns="45720" rIns="45720">
             <a:spAutoFit/>
           </a:bodyPr>
           <a:lstStyle/>
@@ -5299,27 +6446,27 @@
               </a:defRPr>
             </a:pPr>
             <a:r>
-              <a:rPr sz="1600" b="0">
+              <a:rPr sz="1200" b="0">
                 <a:solidFill>
                   <a:srgbClr val="25342A"/>
                 </a:solidFill>
                 <a:latin typeface="Roboto"/>
               </a:rPr>
-              <a:t>Cheapest to raise in September: grants (9¢ a dollar). Dearest: fundraising events (41¢). Events are worth counting for what else they bring too (new donors, profile).</a:t>
-            </a:r>
-          </a:p>
-        </p:txBody>
-      </p:sp>
-      <p:sp>
-        <p:nvSpPr>
-          <p:cNvPr id="11" name="TextBox 10"/>
+              <a:t>Most of the money, and usually the cheapest to raise, starting with grants that renew.</a:t>
+            </a:r>
+          </a:p>
+        </p:txBody>
+      </p:sp>
+      <p:sp>
+        <p:nvSpPr>
+          <p:cNvPr id="13" name="TextBox 12"/>
           <p:cNvSpPr txBox="1"/>
           <p:nvPr/>
         </p:nvSpPr>
         <p:spPr>
           <a:xfrm>
             <a:off x="457200" y="6492240"/>
-            <a:ext cx="3657600" cy="274320"/>
+            <a:ext cx="2926080" cy="274320"/>
           </a:xfrm>
           <a:prstGeom prst="rect">
             <a:avLst/>
@@ -5327,7 +6474,7 @@
           <a:noFill/>
         </p:spPr>
         <p:txBody>
-          <a:bodyPr wrap="square">
+          <a:bodyPr wrap="square" lIns="45720" rIns="45720">
             <a:spAutoFit/>
           </a:bodyPr>
           <a:lstStyle/>
@@ -5351,14 +6498,14 @@
       </p:sp>
       <p:sp>
         <p:nvSpPr>
-          <p:cNvPr id="12" name="TextBox 11"/>
+          <p:cNvPr id="14" name="TextBox 13"/>
           <p:cNvSpPr txBox="1"/>
           <p:nvPr/>
         </p:nvSpPr>
         <p:spPr>
           <a:xfrm>
-            <a:off x="4297680" y="6492240"/>
-            <a:ext cx="3657600" cy="274320"/>
+            <a:off x="3108960" y="6492240"/>
+            <a:ext cx="5943600" cy="274320"/>
           </a:xfrm>
           <a:prstGeom prst="rect">
             <a:avLst/>
@@ -5366,7 +6513,7 @@
           <a:noFill/>
         </p:spPr>
         <p:txBody>
-          <a:bodyPr wrap="square">
+          <a:bodyPr wrap="square" lIns="45720" rIns="45720">
             <a:spAutoFit/>
           </a:bodyPr>
           <a:lstStyle/>
@@ -5383,14 +6530,14 @@
                 </a:solidFill>
                 <a:latin typeface="Roboto"/>
               </a:rPr>
-              <a:t>Data retrieved 2pm, Tue 6 Oct 2026 · Sample data</a:t>
-            </a:r>
-          </a:p>
-        </p:txBody>
-      </p:sp>
-      <p:sp>
-        <p:nvSpPr>
-          <p:cNvPr id="13" name="TextBox 12"/>
+              <a:t>Data retrieved 2pm, Tue 6 Oct 2026 · Generated 8 Oct 2026, 9:35am · Sample data · Made with Python (python-pptx)</a:t>
+            </a:r>
+          </a:p>
+        </p:txBody>
+      </p:sp>
+      <p:sp>
+        <p:nvSpPr>
+          <p:cNvPr id="15" name="TextBox 14"/>
           <p:cNvSpPr txBox="1"/>
           <p:nvPr/>
         </p:nvSpPr>
@@ -5405,7 +6552,7 @@
           <a:noFill/>
         </p:spPr>
         <p:txBody>
-          <a:bodyPr wrap="square">
+          <a:bodyPr wrap="square" lIns="45720" rIns="45720">
             <a:spAutoFit/>
           </a:bodyPr>
           <a:lstStyle/>
@@ -5422,7 +6569,7 @@
                 </a:solidFill>
                 <a:latin typeface="Roboto"/>
               </a:rPr>
-              <a:t>Slide 3 of 10</a:t>
+              <a:t>Slide 3 of 6</a:t>
             </a:r>
           </a:p>
         </p:txBody>
@@ -5447,7 +6594,44 @@
       <p:grpSpPr/>
       <p:sp>
         <p:nvSpPr>
-          <p:cNvPr id="2" name="Rectangle 1"/>
+          <p:cNvPr id="2" name="Title 1"/>
+          <p:cNvSpPr>
+            <a:spLocks noGrp="1"/>
+          </p:cNvSpPr>
+          <p:nvPr>
+            <p:ph type="title"/>
+          </p:nvPr>
+        </p:nvSpPr>
+        <p:spPr>
+          <a:xfrm>
+            <a:off x="457200" y="384048"/>
+            <a:ext cx="11277295" cy="475488"/>
+          </a:xfrm>
+        </p:spPr>
+        <p:txBody>
+          <a:bodyPr wrap="square" lIns="45720" rIns="45720" tIns="0" bIns="0" anchor="t"/>
+          <a:lstStyle/>
+          <a:p>
+            <a:pPr algn="l">
+              <a:defRPr>
+                <a:latin typeface="Roboto"/>
+              </a:defRPr>
+            </a:pPr>
+            <a:r>
+              <a:rPr sz="2400" b="1">
+                <a:solidFill>
+                  <a:srgbClr val="25342A"/>
+                </a:solidFill>
+                <a:latin typeface="Roboto"/>
+              </a:rPr>
+              <a:t>Donations</a:t>
+            </a:r>
+          </a:p>
+        </p:txBody>
+      </p:sp>
+      <p:sp>
+        <p:nvSpPr>
+          <p:cNvPr id="3" name="Rectangle 2"/>
           <p:cNvSpPr/>
           <p:nvPr/>
         </p:nvSpPr>
@@ -5494,14 +6678,14 @@
       </p:sp>
       <p:sp>
         <p:nvSpPr>
-          <p:cNvPr id="3" name="TextBox 2"/>
+          <p:cNvPr id="4" name="TextBox 3"/>
           <p:cNvSpPr txBox="1"/>
           <p:nvPr/>
         </p:nvSpPr>
         <p:spPr>
           <a:xfrm>
-            <a:off x="457200" y="164592"/>
-            <a:ext cx="7315200" cy="274320"/>
+            <a:off x="457200" y="146304"/>
+            <a:ext cx="8229600" cy="256032"/>
           </a:xfrm>
           <a:prstGeom prst="rect">
             <a:avLst/>
@@ -5509,7 +6693,7 @@
           <a:noFill/>
         </p:spPr>
         <p:txBody>
-          <a:bodyPr wrap="square">
+          <a:bodyPr wrap="square" lIns="45720" rIns="45720">
             <a:spAutoFit/>
           </a:bodyPr>
           <a:lstStyle/>
@@ -5533,14 +6717,14 @@
       </p:sp>
       <p:sp>
         <p:nvSpPr>
-          <p:cNvPr id="4" name="TextBox 3"/>
+          <p:cNvPr id="5" name="TextBox 4"/>
           <p:cNvSpPr txBox="1"/>
           <p:nvPr/>
         </p:nvSpPr>
         <p:spPr>
           <a:xfrm>
-            <a:off x="457200" y="411480"/>
-            <a:ext cx="11247120" cy="548640"/>
+            <a:off x="457200" y="914400"/>
+            <a:ext cx="11277295" cy="263652"/>
           </a:xfrm>
           <a:prstGeom prst="rect">
             <a:avLst/>
@@ -5548,7 +6732,7 @@
           <a:noFill/>
         </p:spPr>
         <p:txBody>
-          <a:bodyPr wrap="square">
+          <a:bodyPr wrap="square" lIns="45720" rIns="45720">
             <a:spAutoFit/>
           </a:bodyPr>
           <a:lstStyle/>
@@ -5559,27 +6743,45 @@
               </a:defRPr>
             </a:pPr>
             <a:r>
-              <a:rPr sz="2400" b="1">
+              <a:rPr sz="1200" b="0">
                 <a:solidFill>
-                  <a:srgbClr val="25342A"/>
+                  <a:srgbClr val="5F6F63"/>
                 </a:solidFill>
                 <a:latin typeface="Roboto"/>
               </a:rPr>
-              <a:t>What it shows · Source: Grants</a:t>
-            </a:r>
-          </a:p>
-        </p:txBody>
-      </p:sp>
-      <p:sp>
-        <p:nvSpPr>
-          <p:cNvPr id="5" name="Rectangle 4"/>
+              <a:t>Raised and left after costs, by month · Donations</a:t>
+            </a:r>
+          </a:p>
+        </p:txBody>
+      </p:sp>
+      <p:graphicFrame>
+        <p:nvGraphicFramePr>
+          <p:cNvPr id="6" name="Chart 5"/>
+          <p:cNvGraphicFramePr>
+            <a:graphicFrameLocks noGrp="1"/>
+          </p:cNvGraphicFramePr>
+          <p:nvPr/>
+        </p:nvGraphicFramePr>
+        <p:xfrm>
+          <a:off x="457200" y="1278636"/>
+          <a:ext cx="11277295" cy="3842004"/>
+        </p:xfrm>
+        <a:graphic>
+          <a:graphicData uri="http://schemas.openxmlformats.org/drawingml/2006/chart">
+            <c:chart xmlns:c="http://schemas.openxmlformats.org/drawingml/2006/chart" r:id="rId3"/>
+          </a:graphicData>
+        </a:graphic>
+      </p:graphicFrame>
+      <p:sp>
+        <p:nvSpPr>
+          <p:cNvPr id="7" name="Rectangle 6"/>
           <p:cNvSpPr/>
           <p:nvPr/>
         </p:nvSpPr>
         <p:spPr>
           <a:xfrm>
-            <a:off x="457200" y="1554480"/>
-            <a:ext cx="5501487" cy="4389120"/>
+            <a:off x="457200" y="5212080"/>
+            <a:ext cx="5501487" cy="1097280"/>
           </a:xfrm>
           <a:prstGeom prst="rect">
             <a:avLst/>
@@ -5621,14 +6823,14 @@
       </p:sp>
       <p:sp>
         <p:nvSpPr>
-          <p:cNvPr id="6" name="TextBox 5"/>
+          <p:cNvPr id="8" name="TextBox 7"/>
           <p:cNvSpPr txBox="1"/>
           <p:nvPr/>
         </p:nvSpPr>
         <p:spPr>
           <a:xfrm>
-            <a:off x="685800" y="1691640"/>
-            <a:ext cx="5044287" cy="365760"/>
+            <a:off x="594360" y="5266944"/>
+            <a:ext cx="5227167" cy="274320"/>
           </a:xfrm>
           <a:prstGeom prst="rect">
             <a:avLst/>
@@ -5636,7 +6838,7 @@
           <a:noFill/>
         </p:spPr>
         <p:txBody>
-          <a:bodyPr wrap="square">
+          <a:bodyPr wrap="square" lIns="45720" rIns="45720">
             <a:spAutoFit/>
           </a:bodyPr>
           <a:lstStyle/>
@@ -5647,7 +6849,7 @@
               </a:defRPr>
             </a:pPr>
             <a:r>
-              <a:rPr sz="1100" b="1">
+              <a:rPr sz="1000" b="1">
                 <a:solidFill>
                   <a:srgbClr val="5F6F63"/>
                 </a:solidFill>
@@ -5660,14 +6862,14 @@
       </p:sp>
       <p:sp>
         <p:nvSpPr>
-          <p:cNvPr id="7" name="TextBox 6"/>
+          <p:cNvPr id="9" name="TextBox 8"/>
           <p:cNvSpPr txBox="1"/>
           <p:nvPr/>
         </p:nvSpPr>
         <p:spPr>
           <a:xfrm>
-            <a:off x="685800" y="2103120"/>
-            <a:ext cx="5044287" cy="3749039"/>
+            <a:off x="594360" y="5541264"/>
+            <a:ext cx="5227167" cy="731520"/>
           </a:xfrm>
           <a:prstGeom prst="rect">
             <a:avLst/>
@@ -5675,7 +6877,7 @@
           <a:noFill/>
         </p:spPr>
         <p:txBody>
-          <a:bodyPr wrap="square">
+          <a:bodyPr wrap="square" lIns="45720" rIns="45720">
             <a:spAutoFit/>
           </a:bodyPr>
           <a:lstStyle/>
@@ -5686,27 +6888,27 @@
               </a:defRPr>
             </a:pPr>
             <a:r>
-              <a:rPr sz="1600" b="0">
+              <a:rPr sz="1200" b="0">
                 <a:solidFill>
                   <a:srgbClr val="25342A"/>
                 </a:solidFill>
                 <a:latin typeface="Roboto"/>
               </a:rPr>
-              <a:t>Grants: $223,318 raised this financial year to date (68.6% of everything raised), $21,300 to raise it, so $202,018 left for programs: 10¢ per dollar.</a:t>
-            </a:r>
-          </a:p>
-        </p:txBody>
-      </p:sp>
-      <p:sp>
-        <p:nvSpPr>
-          <p:cNvPr id="8" name="Rectangle 7"/>
+              <a:t>Donations: $60,600 raised this financial year to date (18.6% of everything raised), $9,800 to raise it, so $50,800 left for programs: 16¢ per dollar.</a:t>
+            </a:r>
+          </a:p>
+        </p:txBody>
+      </p:sp>
+      <p:sp>
+        <p:nvSpPr>
+          <p:cNvPr id="10" name="Rectangle 9"/>
           <p:cNvSpPr/>
           <p:nvPr/>
         </p:nvSpPr>
         <p:spPr>
           <a:xfrm>
-            <a:off x="6233007" y="1554480"/>
-            <a:ext cx="5501487" cy="4389120"/>
+            <a:off x="6233007" y="5212080"/>
+            <a:ext cx="5501487" cy="1097280"/>
           </a:xfrm>
           <a:prstGeom prst="rect">
             <a:avLst/>
@@ -5748,14 +6950,14 @@
       </p:sp>
       <p:sp>
         <p:nvSpPr>
-          <p:cNvPr id="9" name="TextBox 8"/>
+          <p:cNvPr id="11" name="TextBox 10"/>
           <p:cNvSpPr txBox="1"/>
           <p:nvPr/>
         </p:nvSpPr>
         <p:spPr>
           <a:xfrm>
-            <a:off x="6461607" y="1691640"/>
-            <a:ext cx="5044287" cy="365760"/>
+            <a:off x="6370167" y="5266944"/>
+            <a:ext cx="5227167" cy="274320"/>
           </a:xfrm>
           <a:prstGeom prst="rect">
             <a:avLst/>
@@ -5763,7 +6965,7 @@
           <a:noFill/>
         </p:spPr>
         <p:txBody>
-          <a:bodyPr wrap="square">
+          <a:bodyPr wrap="square" lIns="45720" rIns="45720">
             <a:spAutoFit/>
           </a:bodyPr>
           <a:lstStyle/>
@@ -5774,7 +6976,7 @@
               </a:defRPr>
             </a:pPr>
             <a:r>
-              <a:rPr sz="1100" b="1">
+              <a:rPr sz="1000" b="1">
                 <a:solidFill>
                   <a:srgbClr val="5F6F63"/>
                 </a:solidFill>
@@ -5787,14 +6989,14 @@
       </p:sp>
       <p:sp>
         <p:nvSpPr>
-          <p:cNvPr id="10" name="TextBox 9"/>
+          <p:cNvPr id="12" name="TextBox 11"/>
           <p:cNvSpPr txBox="1"/>
           <p:nvPr/>
         </p:nvSpPr>
         <p:spPr>
           <a:xfrm>
-            <a:off x="6461607" y="2103120"/>
-            <a:ext cx="5044287" cy="3749039"/>
+            <a:off x="6370167" y="5541264"/>
+            <a:ext cx="5227167" cy="731520"/>
           </a:xfrm>
           <a:prstGeom prst="rect">
             <a:avLst/>
@@ -5802,7 +7004,7 @@
           <a:noFill/>
         </p:spPr>
         <p:txBody>
-          <a:bodyPr wrap="square">
+          <a:bodyPr wrap="square" lIns="45720" rIns="45720">
             <a:spAutoFit/>
           </a:bodyPr>
           <a:lstStyle/>
@@ -5813,27 +7015,27 @@
               </a:defRPr>
             </a:pPr>
             <a:r>
-              <a:rPr sz="1600" b="0">
+              <a:rPr sz="1200" b="0">
                 <a:solidFill>
                   <a:srgbClr val="25342A"/>
                 </a:solidFill>
                 <a:latin typeface="Roboto"/>
               </a:rPr>
-              <a:t>Most of the money, and usually the cheapest to raise, starting with grants that renew.</a:t>
-            </a:r>
-          </a:p>
-        </p:txBody>
-      </p:sp>
-      <p:sp>
-        <p:nvSpPr>
-          <p:cNvPr id="11" name="TextBox 10"/>
+              <a:t>Cheap and flexible (untied): the money that builds reserves.</a:t>
+            </a:r>
+          </a:p>
+        </p:txBody>
+      </p:sp>
+      <p:sp>
+        <p:nvSpPr>
+          <p:cNvPr id="13" name="TextBox 12"/>
           <p:cNvSpPr txBox="1"/>
           <p:nvPr/>
         </p:nvSpPr>
         <p:spPr>
           <a:xfrm>
             <a:off x="457200" y="6492240"/>
-            <a:ext cx="3657600" cy="274320"/>
+            <a:ext cx="2926080" cy="274320"/>
           </a:xfrm>
           <a:prstGeom prst="rect">
             <a:avLst/>
@@ -5841,7 +7043,7 @@
           <a:noFill/>
         </p:spPr>
         <p:txBody>
-          <a:bodyPr wrap="square">
+          <a:bodyPr wrap="square" lIns="45720" rIns="45720">
             <a:spAutoFit/>
           </a:bodyPr>
           <a:lstStyle/>
@@ -5865,14 +7067,14 @@
       </p:sp>
       <p:sp>
         <p:nvSpPr>
-          <p:cNvPr id="12" name="TextBox 11"/>
+          <p:cNvPr id="14" name="TextBox 13"/>
           <p:cNvSpPr txBox="1"/>
           <p:nvPr/>
         </p:nvSpPr>
         <p:spPr>
           <a:xfrm>
-            <a:off x="4297680" y="6492240"/>
-            <a:ext cx="3657600" cy="274320"/>
+            <a:off x="3108960" y="6492240"/>
+            <a:ext cx="5943600" cy="274320"/>
           </a:xfrm>
           <a:prstGeom prst="rect">
             <a:avLst/>
@@ -5880,7 +7082,7 @@
           <a:noFill/>
         </p:spPr>
         <p:txBody>
-          <a:bodyPr wrap="square">
+          <a:bodyPr wrap="square" lIns="45720" rIns="45720">
             <a:spAutoFit/>
           </a:bodyPr>
           <a:lstStyle/>
@@ -5897,14 +7099,14 @@
                 </a:solidFill>
                 <a:latin typeface="Roboto"/>
               </a:rPr>
-              <a:t>Data retrieved 2pm, Tue 6 Oct 2026 · Sample data</a:t>
-            </a:r>
-          </a:p>
-        </p:txBody>
-      </p:sp>
-      <p:sp>
-        <p:nvSpPr>
-          <p:cNvPr id="13" name="TextBox 12"/>
+              <a:t>Data retrieved 2pm, Tue 6 Oct 2026 · Generated 8 Oct 2026, 9:35am · Sample data · Made with Python (python-pptx)</a:t>
+            </a:r>
+          </a:p>
+        </p:txBody>
+      </p:sp>
+      <p:sp>
+        <p:nvSpPr>
+          <p:cNvPr id="15" name="TextBox 14"/>
           <p:cNvSpPr txBox="1"/>
           <p:nvPr/>
         </p:nvSpPr>
@@ -5919,7 +7121,7 @@
           <a:noFill/>
         </p:spPr>
         <p:txBody>
-          <a:bodyPr wrap="square">
+          <a:bodyPr wrap="square" lIns="45720" rIns="45720">
             <a:spAutoFit/>
           </a:bodyPr>
           <a:lstStyle/>
@@ -5936,7 +7138,7 @@
                 </a:solidFill>
                 <a:latin typeface="Roboto"/>
               </a:rPr>
-              <a:t>Slide 4 of 10</a:t>
+              <a:t>Slide 4 of 6</a:t>
             </a:r>
           </a:p>
         </p:txBody>
@@ -5961,7 +7163,44 @@
       <p:grpSpPr/>
       <p:sp>
         <p:nvSpPr>
-          <p:cNvPr id="2" name="Rectangle 1"/>
+          <p:cNvPr id="2" name="Title 1"/>
+          <p:cNvSpPr>
+            <a:spLocks noGrp="1"/>
+          </p:cNvSpPr>
+          <p:nvPr>
+            <p:ph type="title"/>
+          </p:nvPr>
+        </p:nvSpPr>
+        <p:spPr>
+          <a:xfrm>
+            <a:off x="457200" y="384048"/>
+            <a:ext cx="11277295" cy="475488"/>
+          </a:xfrm>
+        </p:spPr>
+        <p:txBody>
+          <a:bodyPr wrap="square" lIns="45720" rIns="45720" tIns="0" bIns="0" anchor="t"/>
+          <a:lstStyle/>
+          <a:p>
+            <a:pPr algn="l">
+              <a:defRPr>
+                <a:latin typeface="Roboto"/>
+              </a:defRPr>
+            </a:pPr>
+            <a:r>
+              <a:rPr sz="2400" b="1">
+                <a:solidFill>
+                  <a:srgbClr val="25342A"/>
+                </a:solidFill>
+                <a:latin typeface="Roboto"/>
+              </a:rPr>
+              <a:t>Fundraising events</a:t>
+            </a:r>
+          </a:p>
+        </p:txBody>
+      </p:sp>
+      <p:sp>
+        <p:nvSpPr>
+          <p:cNvPr id="3" name="Rectangle 2"/>
           <p:cNvSpPr/>
           <p:nvPr/>
         </p:nvSpPr>
@@ -6008,14 +7247,14 @@
       </p:sp>
       <p:sp>
         <p:nvSpPr>
-          <p:cNvPr id="3" name="TextBox 2"/>
+          <p:cNvPr id="4" name="TextBox 3"/>
           <p:cNvSpPr txBox="1"/>
           <p:nvPr/>
         </p:nvSpPr>
         <p:spPr>
           <a:xfrm>
-            <a:off x="457200" y="164592"/>
-            <a:ext cx="7315200" cy="274320"/>
+            <a:off x="457200" y="146304"/>
+            <a:ext cx="8229600" cy="256032"/>
           </a:xfrm>
           <a:prstGeom prst="rect">
             <a:avLst/>
@@ -6023,7 +7262,7 @@
           <a:noFill/>
         </p:spPr>
         <p:txBody>
-          <a:bodyPr wrap="square">
+          <a:bodyPr wrap="square" lIns="45720" rIns="45720">
             <a:spAutoFit/>
           </a:bodyPr>
           <a:lstStyle/>
@@ -6047,14 +7286,14 @@
       </p:sp>
       <p:sp>
         <p:nvSpPr>
-          <p:cNvPr id="4" name="TextBox 3"/>
+          <p:cNvPr id="5" name="TextBox 4"/>
           <p:cNvSpPr txBox="1"/>
           <p:nvPr/>
         </p:nvSpPr>
         <p:spPr>
           <a:xfrm>
-            <a:off x="457200" y="411480"/>
-            <a:ext cx="11247120" cy="548640"/>
+            <a:off x="457200" y="914400"/>
+            <a:ext cx="11277295" cy="263652"/>
           </a:xfrm>
           <a:prstGeom prst="rect">
             <a:avLst/>
@@ -6062,7 +7301,7 @@
           <a:noFill/>
         </p:spPr>
         <p:txBody>
-          <a:bodyPr wrap="square">
+          <a:bodyPr wrap="square" lIns="45720" rIns="45720">
             <a:spAutoFit/>
           </a:bodyPr>
           <a:lstStyle/>
@@ -6073,27 +7312,45 @@
               </a:defRPr>
             </a:pPr>
             <a:r>
-              <a:rPr sz="2400" b="1">
+              <a:rPr sz="1200" b="0">
                 <a:solidFill>
-                  <a:srgbClr val="25342A"/>
+                  <a:srgbClr val="5F6F63"/>
                 </a:solidFill>
                 <a:latin typeface="Roboto"/>
               </a:rPr>
-              <a:t>What it shows · Source: Donations</a:t>
-            </a:r>
-          </a:p>
-        </p:txBody>
-      </p:sp>
-      <p:sp>
-        <p:nvSpPr>
-          <p:cNvPr id="5" name="Rectangle 4"/>
+              <a:t>Raised and left after costs, by month · Fundraising events</a:t>
+            </a:r>
+          </a:p>
+        </p:txBody>
+      </p:sp>
+      <p:graphicFrame>
+        <p:nvGraphicFramePr>
+          <p:cNvPr id="6" name="Chart 5"/>
+          <p:cNvGraphicFramePr>
+            <a:graphicFrameLocks noGrp="1"/>
+          </p:cNvGraphicFramePr>
+          <p:nvPr/>
+        </p:nvGraphicFramePr>
+        <p:xfrm>
+          <a:off x="457200" y="1278636"/>
+          <a:ext cx="11277295" cy="3842004"/>
+        </p:xfrm>
+        <a:graphic>
+          <a:graphicData uri="http://schemas.openxmlformats.org/drawingml/2006/chart">
+            <c:chart xmlns:c="http://schemas.openxmlformats.org/drawingml/2006/chart" r:id="rId3"/>
+          </a:graphicData>
+        </a:graphic>
+      </p:graphicFrame>
+      <p:sp>
+        <p:nvSpPr>
+          <p:cNvPr id="7" name="Rectangle 6"/>
           <p:cNvSpPr/>
           <p:nvPr/>
         </p:nvSpPr>
         <p:spPr>
           <a:xfrm>
-            <a:off x="457200" y="1554480"/>
-            <a:ext cx="5501487" cy="4389120"/>
+            <a:off x="457200" y="5212080"/>
+            <a:ext cx="5501487" cy="1097280"/>
           </a:xfrm>
           <a:prstGeom prst="rect">
             <a:avLst/>
@@ -6135,14 +7392,14 @@
       </p:sp>
       <p:sp>
         <p:nvSpPr>
-          <p:cNvPr id="6" name="TextBox 5"/>
+          <p:cNvPr id="8" name="TextBox 7"/>
           <p:cNvSpPr txBox="1"/>
           <p:nvPr/>
         </p:nvSpPr>
         <p:spPr>
           <a:xfrm>
-            <a:off x="685800" y="1691640"/>
-            <a:ext cx="5044287" cy="365760"/>
+            <a:off x="594360" y="5266944"/>
+            <a:ext cx="5227167" cy="274320"/>
           </a:xfrm>
           <a:prstGeom prst="rect">
             <a:avLst/>
@@ -6150,7 +7407,7 @@
           <a:noFill/>
         </p:spPr>
         <p:txBody>
-          <a:bodyPr wrap="square">
+          <a:bodyPr wrap="square" lIns="45720" rIns="45720">
             <a:spAutoFit/>
           </a:bodyPr>
           <a:lstStyle/>
@@ -6161,7 +7418,7 @@
               </a:defRPr>
             </a:pPr>
             <a:r>
-              <a:rPr sz="1100" b="1">
+              <a:rPr sz="1000" b="1">
                 <a:solidFill>
                   <a:srgbClr val="5F6F63"/>
                 </a:solidFill>
@@ -6174,14 +7431,14 @@
       </p:sp>
       <p:sp>
         <p:nvSpPr>
-          <p:cNvPr id="7" name="TextBox 6"/>
+          <p:cNvPr id="9" name="TextBox 8"/>
           <p:cNvSpPr txBox="1"/>
           <p:nvPr/>
         </p:nvSpPr>
         <p:spPr>
           <a:xfrm>
-            <a:off x="685800" y="2103120"/>
-            <a:ext cx="5044287" cy="3749039"/>
+            <a:off x="594360" y="5541264"/>
+            <a:ext cx="5227167" cy="731520"/>
           </a:xfrm>
           <a:prstGeom prst="rect">
             <a:avLst/>
@@ -6189,7 +7446,7 @@
           <a:noFill/>
         </p:spPr>
         <p:txBody>
-          <a:bodyPr wrap="square">
+          <a:bodyPr wrap="square" lIns="45720" rIns="45720">
             <a:spAutoFit/>
           </a:bodyPr>
           <a:lstStyle/>
@@ -6200,27 +7457,27 @@
               </a:defRPr>
             </a:pPr>
             <a:r>
-              <a:rPr sz="1600" b="0">
+              <a:rPr sz="1200" b="0">
                 <a:solidFill>
                   <a:srgbClr val="25342A"/>
                 </a:solidFill>
                 <a:latin typeface="Roboto"/>
               </a:rPr>
-              <a:t>Donations: $60,600 raised this financial year to date (18.6% of everything raised), $9,800 to raise it, so $50,800 left for programs: 16¢ per dollar.</a:t>
-            </a:r>
-          </a:p>
-        </p:txBody>
-      </p:sp>
-      <p:sp>
-        <p:nvSpPr>
-          <p:cNvPr id="8" name="Rectangle 7"/>
+              <a:t>Fundraising events: $41,600 raised this financial year to date (12.8% of everything raised), $19,300 to raise it, so $22,300 left for programs: 46¢ per dollar.</a:t>
+            </a:r>
+          </a:p>
+        </p:txBody>
+      </p:sp>
+      <p:sp>
+        <p:nvSpPr>
+          <p:cNvPr id="10" name="Rectangle 9"/>
           <p:cNvSpPr/>
           <p:nvPr/>
         </p:nvSpPr>
         <p:spPr>
           <a:xfrm>
-            <a:off x="6233007" y="1554480"/>
-            <a:ext cx="5501487" cy="4389120"/>
+            <a:off x="6233007" y="5212080"/>
+            <a:ext cx="5501487" cy="1097280"/>
           </a:xfrm>
           <a:prstGeom prst="rect">
             <a:avLst/>
@@ -6262,14 +7519,14 @@
       </p:sp>
       <p:sp>
         <p:nvSpPr>
-          <p:cNvPr id="9" name="TextBox 8"/>
+          <p:cNvPr id="11" name="TextBox 10"/>
           <p:cNvSpPr txBox="1"/>
           <p:nvPr/>
         </p:nvSpPr>
         <p:spPr>
           <a:xfrm>
-            <a:off x="6461607" y="1691640"/>
-            <a:ext cx="5044287" cy="365760"/>
+            <a:off x="6370167" y="5266944"/>
+            <a:ext cx="5227167" cy="274320"/>
           </a:xfrm>
           <a:prstGeom prst="rect">
             <a:avLst/>
@@ -6277,7 +7534,7 @@
           <a:noFill/>
         </p:spPr>
         <p:txBody>
-          <a:bodyPr wrap="square">
+          <a:bodyPr wrap="square" lIns="45720" rIns="45720">
             <a:spAutoFit/>
           </a:bodyPr>
           <a:lstStyle/>
@@ -6288,7 +7545,7 @@
               </a:defRPr>
             </a:pPr>
             <a:r>
-              <a:rPr sz="1100" b="1">
+              <a:rPr sz="1000" b="1">
                 <a:solidFill>
                   <a:srgbClr val="5F6F63"/>
                 </a:solidFill>
@@ -6301,14 +7558,14 @@
       </p:sp>
       <p:sp>
         <p:nvSpPr>
-          <p:cNvPr id="10" name="TextBox 9"/>
+          <p:cNvPr id="12" name="TextBox 11"/>
           <p:cNvSpPr txBox="1"/>
           <p:nvPr/>
         </p:nvSpPr>
         <p:spPr>
           <a:xfrm>
-            <a:off x="6461607" y="2103120"/>
-            <a:ext cx="5044287" cy="3749039"/>
+            <a:off x="6370167" y="5541264"/>
+            <a:ext cx="5227167" cy="731520"/>
           </a:xfrm>
           <a:prstGeom prst="rect">
             <a:avLst/>
@@ -6316,7 +7573,7 @@
           <a:noFill/>
         </p:spPr>
         <p:txBody>
-          <a:bodyPr wrap="square">
+          <a:bodyPr wrap="square" lIns="45720" rIns="45720">
             <a:spAutoFit/>
           </a:bodyPr>
           <a:lstStyle/>
@@ -6327,27 +7584,27 @@
               </a:defRPr>
             </a:pPr>
             <a:r>
-              <a:rPr sz="1600" b="0">
+              <a:rPr sz="1200" b="0">
                 <a:solidFill>
                   <a:srgbClr val="25342A"/>
                 </a:solidFill>
                 <a:latin typeface="Roboto"/>
               </a:rPr>
-              <a:t>Cheap and flexible (untied): the money that builds reserves.</a:t>
-            </a:r>
-          </a:p>
-        </p:txBody>
-      </p:sp>
-      <p:sp>
-        <p:nvSpPr>
-          <p:cNvPr id="11" name="TextBox 10"/>
+              <a:t>The dearest per dollar: worth measuring the new donors each event brings in too.</a:t>
+            </a:r>
+          </a:p>
+        </p:txBody>
+      </p:sp>
+      <p:sp>
+        <p:nvSpPr>
+          <p:cNvPr id="13" name="TextBox 12"/>
           <p:cNvSpPr txBox="1"/>
           <p:nvPr/>
         </p:nvSpPr>
         <p:spPr>
           <a:xfrm>
             <a:off x="457200" y="6492240"/>
-            <a:ext cx="3657600" cy="274320"/>
+            <a:ext cx="2926080" cy="274320"/>
           </a:xfrm>
           <a:prstGeom prst="rect">
             <a:avLst/>
@@ -6355,7 +7612,7 @@
           <a:noFill/>
         </p:spPr>
         <p:txBody>
-          <a:bodyPr wrap="square">
+          <a:bodyPr wrap="square" lIns="45720" rIns="45720">
             <a:spAutoFit/>
           </a:bodyPr>
           <a:lstStyle/>
@@ -6379,14 +7636,14 @@
       </p:sp>
       <p:sp>
         <p:nvSpPr>
-          <p:cNvPr id="12" name="TextBox 11"/>
+          <p:cNvPr id="14" name="TextBox 13"/>
           <p:cNvSpPr txBox="1"/>
           <p:nvPr/>
         </p:nvSpPr>
         <p:spPr>
           <a:xfrm>
-            <a:off x="4297680" y="6492240"/>
-            <a:ext cx="3657600" cy="274320"/>
+            <a:off x="3108960" y="6492240"/>
+            <a:ext cx="5943600" cy="274320"/>
           </a:xfrm>
           <a:prstGeom prst="rect">
             <a:avLst/>
@@ -6394,7 +7651,7 @@
           <a:noFill/>
         </p:spPr>
         <p:txBody>
-          <a:bodyPr wrap="square">
+          <a:bodyPr wrap="square" lIns="45720" rIns="45720">
             <a:spAutoFit/>
           </a:bodyPr>
           <a:lstStyle/>
@@ -6411,14 +7668,14 @@
                 </a:solidFill>
                 <a:latin typeface="Roboto"/>
               </a:rPr>
-              <a:t>Data retrieved 2pm, Tue 6 Oct 2026 · Sample data</a:t>
-            </a:r>
-          </a:p>
-        </p:txBody>
-      </p:sp>
-      <p:sp>
-        <p:nvSpPr>
-          <p:cNvPr id="13" name="TextBox 12"/>
+              <a:t>Data retrieved 2pm, Tue 6 Oct 2026 · Generated 8 Oct 2026, 9:35am · Sample data · Made with Python (python-pptx)</a:t>
+            </a:r>
+          </a:p>
+        </p:txBody>
+      </p:sp>
+      <p:sp>
+        <p:nvSpPr>
+          <p:cNvPr id="15" name="TextBox 14"/>
           <p:cNvSpPr txBox="1"/>
           <p:nvPr/>
         </p:nvSpPr>
@@ -6433,7 +7690,7 @@
           <a:noFill/>
         </p:spPr>
         <p:txBody>
-          <a:bodyPr wrap="square">
+          <a:bodyPr wrap="square" lIns="45720" rIns="45720">
             <a:spAutoFit/>
           </a:bodyPr>
           <a:lstStyle/>
@@ -6450,7 +7707,7 @@
                 </a:solidFill>
                 <a:latin typeface="Roboto"/>
               </a:rPr>
-              <a:t>Slide 5 of 10</a:t>
+              <a:t>Slide 5 of 6</a:t>
             </a:r>
           </a:p>
         </p:txBody>
@@ -6475,7 +7732,44 @@
       <p:grpSpPr/>
       <p:sp>
         <p:nvSpPr>
-          <p:cNvPr id="2" name="Rectangle 1"/>
+          <p:cNvPr id="2" name="Title 1"/>
+          <p:cNvSpPr>
+            <a:spLocks noGrp="1"/>
+          </p:cNvSpPr>
+          <p:nvPr>
+            <p:ph type="title"/>
+          </p:nvPr>
+        </p:nvSpPr>
+        <p:spPr>
+          <a:xfrm>
+            <a:off x="457200" y="384048"/>
+            <a:ext cx="11277295" cy="475488"/>
+          </a:xfrm>
+        </p:spPr>
+        <p:txBody>
+          <a:bodyPr wrap="square" lIns="45720" rIns="45720" tIns="0" bIns="0" anchor="t"/>
+          <a:lstStyle/>
+          <a:p>
+            <a:pPr algn="l">
+              <a:defRPr>
+                <a:latin typeface="Roboto"/>
+              </a:defRPr>
+            </a:pPr>
+            <a:r>
+              <a:rPr sz="2400" b="1">
+                <a:solidFill>
+                  <a:srgbClr val="25342A"/>
+                </a:solidFill>
+                <a:latin typeface="Roboto"/>
+              </a:rPr>
+              <a:t>Financial year to date (Jul to Sep 2026), by source</a:t>
+            </a:r>
+          </a:p>
+        </p:txBody>
+      </p:sp>
+      <p:sp>
+        <p:nvSpPr>
+          <p:cNvPr id="3" name="Rectangle 2"/>
           <p:cNvSpPr/>
           <p:nvPr/>
         </p:nvSpPr>
@@ -6522,14 +7816,14 @@
       </p:sp>
       <p:sp>
         <p:nvSpPr>
-          <p:cNvPr id="3" name="TextBox 2"/>
+          <p:cNvPr id="4" name="TextBox 3"/>
           <p:cNvSpPr txBox="1"/>
           <p:nvPr/>
         </p:nvSpPr>
         <p:spPr>
           <a:xfrm>
-            <a:off x="457200" y="164592"/>
-            <a:ext cx="7315200" cy="274320"/>
+            <a:off x="457200" y="146304"/>
+            <a:ext cx="8229600" cy="256032"/>
           </a:xfrm>
           <a:prstGeom prst="rect">
             <a:avLst/>
@@ -6537,7 +7831,7 @@
           <a:noFill/>
         </p:spPr>
         <p:txBody>
-          <a:bodyPr wrap="square">
+          <a:bodyPr wrap="square" lIns="45720" rIns="45720">
             <a:spAutoFit/>
           </a:bodyPr>
           <a:lstStyle/>
@@ -6555,1317 +7849,6 @@
                 <a:latin typeface="Roboto"/>
               </a:rPr>
               <a:t>Sample Community Services Ltd · Which funding is worth chasing?</a:t>
-            </a:r>
-          </a:p>
-        </p:txBody>
-      </p:sp>
-      <p:sp>
-        <p:nvSpPr>
-          <p:cNvPr id="4" name="TextBox 3"/>
-          <p:cNvSpPr txBox="1"/>
-          <p:nvPr/>
-        </p:nvSpPr>
-        <p:spPr>
-          <a:xfrm>
-            <a:off x="457200" y="411480"/>
-            <a:ext cx="11247120" cy="548640"/>
-          </a:xfrm>
-          <a:prstGeom prst="rect">
-            <a:avLst/>
-          </a:prstGeom>
-          <a:noFill/>
-        </p:spPr>
-        <p:txBody>
-          <a:bodyPr wrap="square">
-            <a:spAutoFit/>
-          </a:bodyPr>
-          <a:lstStyle/>
-          <a:p>
-            <a:pPr>
-              <a:defRPr>
-                <a:latin typeface="Roboto"/>
-              </a:defRPr>
-            </a:pPr>
-            <a:r>
-              <a:rPr sz="2400" b="1">
-                <a:solidFill>
-                  <a:srgbClr val="25342A"/>
-                </a:solidFill>
-                <a:latin typeface="Roboto"/>
-              </a:rPr>
-              <a:t>What it shows · Source: Fundraising events</a:t>
-            </a:r>
-          </a:p>
-        </p:txBody>
-      </p:sp>
-      <p:sp>
-        <p:nvSpPr>
-          <p:cNvPr id="5" name="Rectangle 4"/>
-          <p:cNvSpPr/>
-          <p:nvPr/>
-        </p:nvSpPr>
-        <p:spPr>
-          <a:xfrm>
-            <a:off x="457200" y="1554480"/>
-            <a:ext cx="5501487" cy="4389120"/>
-          </a:xfrm>
-          <a:prstGeom prst="rect">
-            <a:avLst/>
-          </a:prstGeom>
-          <a:solidFill>
-            <a:srgbClr val="FFFFFF"/>
-          </a:solidFill>
-          <a:ln>
-            <a:solidFill>
-              <a:srgbClr val="DCE8DC"/>
-            </a:solidFill>
-          </a:ln>
-        </p:spPr>
-        <p:style>
-          <a:lnRef idx="1">
-            <a:schemeClr val="accent1"/>
-          </a:lnRef>
-          <a:fillRef idx="3">
-            <a:schemeClr val="accent1"/>
-          </a:fillRef>
-          <a:effectRef idx="2">
-            <a:schemeClr val="accent1"/>
-          </a:effectRef>
-          <a:fontRef idx="minor">
-            <a:schemeClr val="lt1"/>
-          </a:fontRef>
-        </p:style>
-        <p:txBody>
-          <a:bodyPr rtlCol="0" anchor="ctr"/>
-          <a:lstStyle/>
-          <a:p>
-            <a:pPr algn="ctr">
-              <a:defRPr>
-                <a:latin typeface="Roboto"/>
-              </a:defRPr>
-            </a:pPr>
-          </a:p>
-        </p:txBody>
-      </p:sp>
-      <p:sp>
-        <p:nvSpPr>
-          <p:cNvPr id="6" name="TextBox 5"/>
-          <p:cNvSpPr txBox="1"/>
-          <p:nvPr/>
-        </p:nvSpPr>
-        <p:spPr>
-          <a:xfrm>
-            <a:off x="685800" y="1691640"/>
-            <a:ext cx="5044287" cy="365760"/>
-          </a:xfrm>
-          <a:prstGeom prst="rect">
-            <a:avLst/>
-          </a:prstGeom>
-          <a:noFill/>
-        </p:spPr>
-        <p:txBody>
-          <a:bodyPr wrap="square">
-            <a:spAutoFit/>
-          </a:bodyPr>
-          <a:lstStyle/>
-          <a:p>
-            <a:pPr>
-              <a:defRPr>
-                <a:latin typeface="Roboto"/>
-              </a:defRPr>
-            </a:pPr>
-            <a:r>
-              <a:rPr sz="1100" b="1">
-                <a:solidFill>
-                  <a:srgbClr val="5F6F63"/>
-                </a:solidFill>
-                <a:latin typeface="Roboto"/>
-              </a:rPr>
-              <a:t>WHAT IT SHOWS</a:t>
-            </a:r>
-          </a:p>
-        </p:txBody>
-      </p:sp>
-      <p:sp>
-        <p:nvSpPr>
-          <p:cNvPr id="7" name="TextBox 6"/>
-          <p:cNvSpPr txBox="1"/>
-          <p:nvPr/>
-        </p:nvSpPr>
-        <p:spPr>
-          <a:xfrm>
-            <a:off x="685800" y="2103120"/>
-            <a:ext cx="5044287" cy="3749039"/>
-          </a:xfrm>
-          <a:prstGeom prst="rect">
-            <a:avLst/>
-          </a:prstGeom>
-          <a:noFill/>
-        </p:spPr>
-        <p:txBody>
-          <a:bodyPr wrap="square">
-            <a:spAutoFit/>
-          </a:bodyPr>
-          <a:lstStyle/>
-          <a:p>
-            <a:pPr>
-              <a:defRPr>
-                <a:latin typeface="Roboto"/>
-              </a:defRPr>
-            </a:pPr>
-            <a:r>
-              <a:rPr sz="1600" b="0">
-                <a:solidFill>
-                  <a:srgbClr val="25342A"/>
-                </a:solidFill>
-                <a:latin typeface="Roboto"/>
-              </a:rPr>
-              <a:t>Fundraising events: $41,600 raised this financial year to date (12.8% of everything raised), $19,300 to raise it, so $22,300 left for programs: 46¢ per dollar.</a:t>
-            </a:r>
-          </a:p>
-        </p:txBody>
-      </p:sp>
-      <p:sp>
-        <p:nvSpPr>
-          <p:cNvPr id="8" name="Rectangle 7"/>
-          <p:cNvSpPr/>
-          <p:nvPr/>
-        </p:nvSpPr>
-        <p:spPr>
-          <a:xfrm>
-            <a:off x="6233007" y="1554480"/>
-            <a:ext cx="5501487" cy="4389120"/>
-          </a:xfrm>
-          <a:prstGeom prst="rect">
-            <a:avLst/>
-          </a:prstGeom>
-          <a:solidFill>
-            <a:srgbClr val="EEF5F0"/>
-          </a:solidFill>
-          <a:ln>
-            <a:solidFill>
-              <a:srgbClr val="DCE8DC"/>
-            </a:solidFill>
-          </a:ln>
-        </p:spPr>
-        <p:style>
-          <a:lnRef idx="1">
-            <a:schemeClr val="accent1"/>
-          </a:lnRef>
-          <a:fillRef idx="3">
-            <a:schemeClr val="accent1"/>
-          </a:fillRef>
-          <a:effectRef idx="2">
-            <a:schemeClr val="accent1"/>
-          </a:effectRef>
-          <a:fontRef idx="minor">
-            <a:schemeClr val="lt1"/>
-          </a:fontRef>
-        </p:style>
-        <p:txBody>
-          <a:bodyPr rtlCol="0" anchor="ctr"/>
-          <a:lstStyle/>
-          <a:p>
-            <a:pPr algn="ctr">
-              <a:defRPr>
-                <a:latin typeface="Roboto"/>
-              </a:defRPr>
-            </a:pPr>
-          </a:p>
-        </p:txBody>
-      </p:sp>
-      <p:sp>
-        <p:nvSpPr>
-          <p:cNvPr id="9" name="TextBox 8"/>
-          <p:cNvSpPr txBox="1"/>
-          <p:nvPr/>
-        </p:nvSpPr>
-        <p:spPr>
-          <a:xfrm>
-            <a:off x="6461607" y="1691640"/>
-            <a:ext cx="5044287" cy="365760"/>
-          </a:xfrm>
-          <a:prstGeom prst="rect">
-            <a:avLst/>
-          </a:prstGeom>
-          <a:noFill/>
-        </p:spPr>
-        <p:txBody>
-          <a:bodyPr wrap="square">
-            <a:spAutoFit/>
-          </a:bodyPr>
-          <a:lstStyle/>
-          <a:p>
-            <a:pPr>
-              <a:defRPr>
-                <a:latin typeface="Roboto"/>
-              </a:defRPr>
-            </a:pPr>
-            <a:r>
-              <a:rPr sz="1100" b="1">
-                <a:solidFill>
-                  <a:srgbClr val="5F6F63"/>
-                </a:solidFill>
-                <a:latin typeface="Roboto"/>
-              </a:rPr>
-              <a:t>WHAT YOU'D DO ABOUT IT</a:t>
-            </a:r>
-          </a:p>
-        </p:txBody>
-      </p:sp>
-      <p:sp>
-        <p:nvSpPr>
-          <p:cNvPr id="10" name="TextBox 9"/>
-          <p:cNvSpPr txBox="1"/>
-          <p:nvPr/>
-        </p:nvSpPr>
-        <p:spPr>
-          <a:xfrm>
-            <a:off x="6461607" y="2103120"/>
-            <a:ext cx="5044287" cy="3749039"/>
-          </a:xfrm>
-          <a:prstGeom prst="rect">
-            <a:avLst/>
-          </a:prstGeom>
-          <a:noFill/>
-        </p:spPr>
-        <p:txBody>
-          <a:bodyPr wrap="square">
-            <a:spAutoFit/>
-          </a:bodyPr>
-          <a:lstStyle/>
-          <a:p>
-            <a:pPr>
-              <a:defRPr>
-                <a:latin typeface="Roboto"/>
-              </a:defRPr>
-            </a:pPr>
-            <a:r>
-              <a:rPr sz="1600" b="0">
-                <a:solidFill>
-                  <a:srgbClr val="25342A"/>
-                </a:solidFill>
-                <a:latin typeface="Roboto"/>
-              </a:rPr>
-              <a:t>The dearest per dollar: worth measuring the new donors each event brings in too.</a:t>
-            </a:r>
-          </a:p>
-        </p:txBody>
-      </p:sp>
-      <p:sp>
-        <p:nvSpPr>
-          <p:cNvPr id="11" name="TextBox 10"/>
-          <p:cNvSpPr txBox="1"/>
-          <p:nvPr/>
-        </p:nvSpPr>
-        <p:spPr>
-          <a:xfrm>
-            <a:off x="457200" y="6492240"/>
-            <a:ext cx="3657600" cy="274320"/>
-          </a:xfrm>
-          <a:prstGeom prst="rect">
-            <a:avLst/>
-          </a:prstGeom>
-          <a:noFill/>
-        </p:spPr>
-        <p:txBody>
-          <a:bodyPr wrap="square">
-            <a:spAutoFit/>
-          </a:bodyPr>
-          <a:lstStyle/>
-          <a:p>
-            <a:pPr>
-              <a:defRPr>
-                <a:latin typeface="Roboto"/>
-              </a:defRPr>
-            </a:pPr>
-            <a:r>
-              <a:rPr sz="900" b="0">
-                <a:solidFill>
-                  <a:srgbClr val="5F6F63"/>
-                </a:solidFill>
-                <a:latin typeface="Roboto"/>
-              </a:rPr>
-              <a:t>funding.pptx</a:t>
-            </a:r>
-          </a:p>
-        </p:txBody>
-      </p:sp>
-      <p:sp>
-        <p:nvSpPr>
-          <p:cNvPr id="12" name="TextBox 11"/>
-          <p:cNvSpPr txBox="1"/>
-          <p:nvPr/>
-        </p:nvSpPr>
-        <p:spPr>
-          <a:xfrm>
-            <a:off x="4297680" y="6492240"/>
-            <a:ext cx="3657600" cy="274320"/>
-          </a:xfrm>
-          <a:prstGeom prst="rect">
-            <a:avLst/>
-          </a:prstGeom>
-          <a:noFill/>
-        </p:spPr>
-        <p:txBody>
-          <a:bodyPr wrap="square">
-            <a:spAutoFit/>
-          </a:bodyPr>
-          <a:lstStyle/>
-          <a:p>
-            <a:pPr algn="ctr">
-              <a:defRPr>
-                <a:latin typeface="Roboto"/>
-              </a:defRPr>
-            </a:pPr>
-            <a:r>
-              <a:rPr sz="900" b="0">
-                <a:solidFill>
-                  <a:srgbClr val="5F6F63"/>
-                </a:solidFill>
-                <a:latin typeface="Roboto"/>
-              </a:rPr>
-              <a:t>Data retrieved 2pm, Tue 6 Oct 2026 · Sample data</a:t>
-            </a:r>
-          </a:p>
-        </p:txBody>
-      </p:sp>
-      <p:sp>
-        <p:nvSpPr>
-          <p:cNvPr id="13" name="TextBox 12"/>
-          <p:cNvSpPr txBox="1"/>
-          <p:nvPr/>
-        </p:nvSpPr>
-        <p:spPr>
-          <a:xfrm>
-            <a:off x="8503920" y="6492240"/>
-            <a:ext cx="3200400" cy="274320"/>
-          </a:xfrm>
-          <a:prstGeom prst="rect">
-            <a:avLst/>
-          </a:prstGeom>
-          <a:noFill/>
-        </p:spPr>
-        <p:txBody>
-          <a:bodyPr wrap="square">
-            <a:spAutoFit/>
-          </a:bodyPr>
-          <a:lstStyle/>
-          <a:p>
-            <a:pPr algn="r">
-              <a:defRPr>
-                <a:latin typeface="Roboto"/>
-              </a:defRPr>
-            </a:pPr>
-            <a:r>
-              <a:rPr sz="900" b="0">
-                <a:solidFill>
-                  <a:srgbClr val="5F6F63"/>
-                </a:solidFill>
-                <a:latin typeface="Roboto"/>
-              </a:rPr>
-              <a:t>Slide 6 of 10</a:t>
-            </a:r>
-          </a:p>
-        </p:txBody>
-      </p:sp>
-    </p:spTree>
-  </p:cSld>
-  <p:clrMapOvr>
-    <a:masterClrMapping/>
-  </p:clrMapOvr>
-</p:sld>
-</file>
-
-<file path=ppt/slides/slide7.xml><?xml version="1.0" encoding="utf-8"?>
-<p:sld xmlns:a="http://schemas.openxmlformats.org/drawingml/2006/main" xmlns:p="http://schemas.openxmlformats.org/presentationml/2006/main" xmlns:r="http://schemas.openxmlformats.org/officeDocument/2006/relationships">
-  <p:cSld>
-    <p:spTree>
-      <p:nvGrpSpPr>
-        <p:cNvPr id="1" name=""/>
-        <p:cNvGrpSpPr/>
-        <p:nvPr/>
-      </p:nvGrpSpPr>
-      <p:grpSpPr/>
-      <p:sp>
-        <p:nvSpPr>
-          <p:cNvPr id="2" name="Rectangle 1"/>
-          <p:cNvSpPr/>
-          <p:nvPr/>
-        </p:nvSpPr>
-        <p:spPr>
-          <a:xfrm>
-            <a:off x="0" y="0"/>
-            <a:ext cx="12191695" cy="73152"/>
-          </a:xfrm>
-          <a:prstGeom prst="rect">
-            <a:avLst/>
-          </a:prstGeom>
-          <a:solidFill>
-            <a:srgbClr val="2F7A5D"/>
-          </a:solidFill>
-          <a:ln>
-            <a:noFill/>
-          </a:ln>
-        </p:spPr>
-        <p:style>
-          <a:lnRef idx="1">
-            <a:schemeClr val="accent1"/>
-          </a:lnRef>
-          <a:fillRef idx="3">
-            <a:schemeClr val="accent1"/>
-          </a:fillRef>
-          <a:effectRef idx="2">
-            <a:schemeClr val="accent1"/>
-          </a:effectRef>
-          <a:fontRef idx="minor">
-            <a:schemeClr val="lt1"/>
-          </a:fontRef>
-        </p:style>
-        <p:txBody>
-          <a:bodyPr rtlCol="0" anchor="ctr"/>
-          <a:lstStyle/>
-          <a:p>
-            <a:pPr algn="ctr">
-              <a:defRPr>
-                <a:latin typeface="Roboto"/>
-              </a:defRPr>
-            </a:pPr>
-          </a:p>
-        </p:txBody>
-      </p:sp>
-      <p:sp>
-        <p:nvSpPr>
-          <p:cNvPr id="3" name="TextBox 2"/>
-          <p:cNvSpPr txBox="1"/>
-          <p:nvPr/>
-        </p:nvSpPr>
-        <p:spPr>
-          <a:xfrm>
-            <a:off x="457200" y="164592"/>
-            <a:ext cx="7315200" cy="274320"/>
-          </a:xfrm>
-          <a:prstGeom prst="rect">
-            <a:avLst/>
-          </a:prstGeom>
-          <a:noFill/>
-        </p:spPr>
-        <p:txBody>
-          <a:bodyPr wrap="square">
-            <a:spAutoFit/>
-          </a:bodyPr>
-          <a:lstStyle/>
-          <a:p>
-            <a:pPr>
-              <a:defRPr>
-                <a:latin typeface="Roboto"/>
-              </a:defRPr>
-            </a:pPr>
-            <a:r>
-              <a:rPr sz="1000" b="0">
-                <a:solidFill>
-                  <a:srgbClr val="5F6F63"/>
-                </a:solidFill>
-                <a:latin typeface="Roboto"/>
-              </a:rPr>
-              <a:t>Sample Community Services Ltd · Which funding is worth chasing?</a:t>
-            </a:r>
-          </a:p>
-        </p:txBody>
-      </p:sp>
-      <p:sp>
-        <p:nvSpPr>
-          <p:cNvPr id="4" name="TextBox 3"/>
-          <p:cNvSpPr txBox="1"/>
-          <p:nvPr/>
-        </p:nvSpPr>
-        <p:spPr>
-          <a:xfrm>
-            <a:off x="457200" y="411480"/>
-            <a:ext cx="11247120" cy="548640"/>
-          </a:xfrm>
-          <a:prstGeom prst="rect">
-            <a:avLst/>
-          </a:prstGeom>
-          <a:noFill/>
-        </p:spPr>
-        <p:txBody>
-          <a:bodyPr wrap="square">
-            <a:spAutoFit/>
-          </a:bodyPr>
-          <a:lstStyle/>
-          <a:p>
-            <a:pPr>
-              <a:defRPr>
-                <a:latin typeface="Roboto"/>
-              </a:defRPr>
-            </a:pPr>
-            <a:r>
-              <a:rPr sz="2400" b="1">
-                <a:solidFill>
-                  <a:srgbClr val="25342A"/>
-                </a:solidFill>
-                <a:latin typeface="Roboto"/>
-              </a:rPr>
-              <a:t>Headline numbers · Every source at once</a:t>
-            </a:r>
-          </a:p>
-        </p:txBody>
-      </p:sp>
-      <p:sp>
-        <p:nvSpPr>
-          <p:cNvPr id="5" name="Rectangle 4"/>
-          <p:cNvSpPr/>
-          <p:nvPr/>
-        </p:nvSpPr>
-        <p:spPr>
-          <a:xfrm>
-            <a:off x="457200" y="1645920"/>
-            <a:ext cx="3576218" cy="2011680"/>
-          </a:xfrm>
-          <a:prstGeom prst="rect">
-            <a:avLst/>
-          </a:prstGeom>
-          <a:solidFill>
-            <a:srgbClr val="F7FAF7"/>
-          </a:solidFill>
-          <a:ln>
-            <a:solidFill>
-              <a:srgbClr val="DCE8DC"/>
-            </a:solidFill>
-          </a:ln>
-        </p:spPr>
-        <p:style>
-          <a:lnRef idx="1">
-            <a:schemeClr val="accent1"/>
-          </a:lnRef>
-          <a:fillRef idx="3">
-            <a:schemeClr val="accent1"/>
-          </a:fillRef>
-          <a:effectRef idx="2">
-            <a:schemeClr val="accent1"/>
-          </a:effectRef>
-          <a:fontRef idx="minor">
-            <a:schemeClr val="lt1"/>
-          </a:fontRef>
-        </p:style>
-        <p:txBody>
-          <a:bodyPr rtlCol="0" anchor="ctr"/>
-          <a:lstStyle/>
-          <a:p>
-            <a:pPr algn="ctr">
-              <a:defRPr>
-                <a:latin typeface="Roboto"/>
-              </a:defRPr>
-            </a:pPr>
-          </a:p>
-        </p:txBody>
-      </p:sp>
-      <p:sp>
-        <p:nvSpPr>
-          <p:cNvPr id="6" name="TextBox 5"/>
-          <p:cNvSpPr txBox="1"/>
-          <p:nvPr/>
-        </p:nvSpPr>
-        <p:spPr>
-          <a:xfrm>
-            <a:off x="640080" y="1783080"/>
-            <a:ext cx="3210458" cy="457200"/>
-          </a:xfrm>
-          <a:prstGeom prst="rect">
-            <a:avLst/>
-          </a:prstGeom>
-          <a:noFill/>
-        </p:spPr>
-        <p:txBody>
-          <a:bodyPr wrap="square">
-            <a:spAutoFit/>
-          </a:bodyPr>
-          <a:lstStyle/>
-          <a:p>
-            <a:pPr>
-              <a:defRPr>
-                <a:latin typeface="Roboto"/>
-              </a:defRPr>
-            </a:pPr>
-            <a:r>
-              <a:rPr sz="1200" b="0">
-                <a:solidFill>
-                  <a:srgbClr val="5F6F63"/>
-                </a:solidFill>
-                <a:latin typeface="Roboto"/>
-              </a:rPr>
-              <a:t>Cheapest to raise: Grants</a:t>
-            </a:r>
-          </a:p>
-        </p:txBody>
-      </p:sp>
-      <p:sp>
-        <p:nvSpPr>
-          <p:cNvPr id="7" name="TextBox 6"/>
-          <p:cNvSpPr txBox="1"/>
-          <p:nvPr/>
-        </p:nvSpPr>
-        <p:spPr>
-          <a:xfrm>
-            <a:off x="640080" y="2240280"/>
-            <a:ext cx="3210458" cy="731520"/>
-          </a:xfrm>
-          <a:prstGeom prst="rect">
-            <a:avLst/>
-          </a:prstGeom>
-          <a:noFill/>
-        </p:spPr>
-        <p:txBody>
-          <a:bodyPr wrap="square">
-            <a:spAutoFit/>
-          </a:bodyPr>
-          <a:lstStyle/>
-          <a:p>
-            <a:pPr>
-              <a:defRPr>
-                <a:latin typeface="Roboto"/>
-              </a:defRPr>
-            </a:pPr>
-            <a:r>
-              <a:rPr sz="3000" b="1">
-                <a:solidFill>
-                  <a:srgbClr val="2F7A5D"/>
-                </a:solidFill>
-                <a:latin typeface="Roboto"/>
-              </a:rPr>
-              <a:t>9¢</a:t>
-            </a:r>
-          </a:p>
-        </p:txBody>
-      </p:sp>
-      <p:sp>
-        <p:nvSpPr>
-          <p:cNvPr id="8" name="TextBox 7"/>
-          <p:cNvSpPr txBox="1"/>
-          <p:nvPr/>
-        </p:nvSpPr>
-        <p:spPr>
-          <a:xfrm>
-            <a:off x="640080" y="3017520"/>
-            <a:ext cx="3210458" cy="548640"/>
-          </a:xfrm>
-          <a:prstGeom prst="rect">
-            <a:avLst/>
-          </a:prstGeom>
-          <a:noFill/>
-        </p:spPr>
-        <p:txBody>
-          <a:bodyPr wrap="square">
-            <a:spAutoFit/>
-          </a:bodyPr>
-          <a:lstStyle/>
-          <a:p>
-            <a:pPr>
-              <a:defRPr>
-                <a:latin typeface="Roboto"/>
-              </a:defRPr>
-            </a:pPr>
-            <a:r>
-              <a:rPr sz="1100" b="0">
-                <a:solidFill>
-                  <a:srgbClr val="5F6F63"/>
-                </a:solidFill>
-                <a:latin typeface="Roboto"/>
-              </a:rPr>
-              <a:t>per $1 raised in September</a:t>
-            </a:r>
-          </a:p>
-        </p:txBody>
-      </p:sp>
-      <p:sp>
-        <p:nvSpPr>
-          <p:cNvPr id="9" name="Rectangle 8"/>
-          <p:cNvSpPr/>
-          <p:nvPr/>
-        </p:nvSpPr>
-        <p:spPr>
-          <a:xfrm>
-            <a:off x="4307738" y="1645920"/>
-            <a:ext cx="3576218" cy="2011680"/>
-          </a:xfrm>
-          <a:prstGeom prst="rect">
-            <a:avLst/>
-          </a:prstGeom>
-          <a:solidFill>
-            <a:srgbClr val="F7FAF7"/>
-          </a:solidFill>
-          <a:ln>
-            <a:solidFill>
-              <a:srgbClr val="DCE8DC"/>
-            </a:solidFill>
-          </a:ln>
-        </p:spPr>
-        <p:style>
-          <a:lnRef idx="1">
-            <a:schemeClr val="accent1"/>
-          </a:lnRef>
-          <a:fillRef idx="3">
-            <a:schemeClr val="accent1"/>
-          </a:fillRef>
-          <a:effectRef idx="2">
-            <a:schemeClr val="accent1"/>
-          </a:effectRef>
-          <a:fontRef idx="minor">
-            <a:schemeClr val="lt1"/>
-          </a:fontRef>
-        </p:style>
-        <p:txBody>
-          <a:bodyPr rtlCol="0" anchor="ctr"/>
-          <a:lstStyle/>
-          <a:p>
-            <a:pPr algn="ctr">
-              <a:defRPr>
-                <a:latin typeface="Roboto"/>
-              </a:defRPr>
-            </a:pPr>
-          </a:p>
-        </p:txBody>
-      </p:sp>
-      <p:sp>
-        <p:nvSpPr>
-          <p:cNvPr id="10" name="TextBox 9"/>
-          <p:cNvSpPr txBox="1"/>
-          <p:nvPr/>
-        </p:nvSpPr>
-        <p:spPr>
-          <a:xfrm>
-            <a:off x="4490618" y="1783080"/>
-            <a:ext cx="3210458" cy="457200"/>
-          </a:xfrm>
-          <a:prstGeom prst="rect">
-            <a:avLst/>
-          </a:prstGeom>
-          <a:noFill/>
-        </p:spPr>
-        <p:txBody>
-          <a:bodyPr wrap="square">
-            <a:spAutoFit/>
-          </a:bodyPr>
-          <a:lstStyle/>
-          <a:p>
-            <a:pPr>
-              <a:defRPr>
-                <a:latin typeface="Roboto"/>
-              </a:defRPr>
-            </a:pPr>
-            <a:r>
-              <a:rPr sz="1200" b="0">
-                <a:solidFill>
-                  <a:srgbClr val="5F6F63"/>
-                </a:solidFill>
-                <a:latin typeface="Roboto"/>
-              </a:rPr>
-              <a:t>Dearest to raise: Fundraising events</a:t>
-            </a:r>
-          </a:p>
-        </p:txBody>
-      </p:sp>
-      <p:sp>
-        <p:nvSpPr>
-          <p:cNvPr id="11" name="TextBox 10"/>
-          <p:cNvSpPr txBox="1"/>
-          <p:nvPr/>
-        </p:nvSpPr>
-        <p:spPr>
-          <a:xfrm>
-            <a:off x="4490618" y="2240280"/>
-            <a:ext cx="3210458" cy="731520"/>
-          </a:xfrm>
-          <a:prstGeom prst="rect">
-            <a:avLst/>
-          </a:prstGeom>
-          <a:noFill/>
-        </p:spPr>
-        <p:txBody>
-          <a:bodyPr wrap="square">
-            <a:spAutoFit/>
-          </a:bodyPr>
-          <a:lstStyle/>
-          <a:p>
-            <a:pPr>
-              <a:defRPr>
-                <a:latin typeface="Roboto"/>
-              </a:defRPr>
-            </a:pPr>
-            <a:r>
-              <a:rPr sz="3000" b="1">
-                <a:solidFill>
-                  <a:srgbClr val="2F7A5D"/>
-                </a:solidFill>
-                <a:latin typeface="Roboto"/>
-              </a:rPr>
-              <a:t>41¢</a:t>
-            </a:r>
-          </a:p>
-        </p:txBody>
-      </p:sp>
-      <p:sp>
-        <p:nvSpPr>
-          <p:cNvPr id="12" name="TextBox 11"/>
-          <p:cNvSpPr txBox="1"/>
-          <p:nvPr/>
-        </p:nvSpPr>
-        <p:spPr>
-          <a:xfrm>
-            <a:off x="4490618" y="3017520"/>
-            <a:ext cx="3210458" cy="548640"/>
-          </a:xfrm>
-          <a:prstGeom prst="rect">
-            <a:avLst/>
-          </a:prstGeom>
-          <a:noFill/>
-        </p:spPr>
-        <p:txBody>
-          <a:bodyPr wrap="square">
-            <a:spAutoFit/>
-          </a:bodyPr>
-          <a:lstStyle/>
-          <a:p>
-            <a:pPr>
-              <a:defRPr>
-                <a:latin typeface="Roboto"/>
-              </a:defRPr>
-            </a:pPr>
-            <a:r>
-              <a:rPr sz="1100" b="0">
-                <a:solidFill>
-                  <a:srgbClr val="5F6F63"/>
-                </a:solidFill>
-                <a:latin typeface="Roboto"/>
-              </a:rPr>
-              <a:t>per $1 raised in September</a:t>
-            </a:r>
-          </a:p>
-        </p:txBody>
-      </p:sp>
-      <p:sp>
-        <p:nvSpPr>
-          <p:cNvPr id="13" name="Rectangle 12"/>
-          <p:cNvSpPr/>
-          <p:nvPr/>
-        </p:nvSpPr>
-        <p:spPr>
-          <a:xfrm>
-            <a:off x="8158276" y="1645920"/>
-            <a:ext cx="3576218" cy="2011680"/>
-          </a:xfrm>
-          <a:prstGeom prst="rect">
-            <a:avLst/>
-          </a:prstGeom>
-          <a:solidFill>
-            <a:srgbClr val="F7FAF7"/>
-          </a:solidFill>
-          <a:ln>
-            <a:solidFill>
-              <a:srgbClr val="DCE8DC"/>
-            </a:solidFill>
-          </a:ln>
-        </p:spPr>
-        <p:style>
-          <a:lnRef idx="1">
-            <a:schemeClr val="accent1"/>
-          </a:lnRef>
-          <a:fillRef idx="3">
-            <a:schemeClr val="accent1"/>
-          </a:fillRef>
-          <a:effectRef idx="2">
-            <a:schemeClr val="accent1"/>
-          </a:effectRef>
-          <a:fontRef idx="minor">
-            <a:schemeClr val="lt1"/>
-          </a:fontRef>
-        </p:style>
-        <p:txBody>
-          <a:bodyPr rtlCol="0" anchor="ctr"/>
-          <a:lstStyle/>
-          <a:p>
-            <a:pPr algn="ctr">
-              <a:defRPr>
-                <a:latin typeface="Roboto"/>
-              </a:defRPr>
-            </a:pPr>
-          </a:p>
-        </p:txBody>
-      </p:sp>
-      <p:sp>
-        <p:nvSpPr>
-          <p:cNvPr id="14" name="TextBox 13"/>
-          <p:cNvSpPr txBox="1"/>
-          <p:nvPr/>
-        </p:nvSpPr>
-        <p:spPr>
-          <a:xfrm>
-            <a:off x="8341156" y="1783080"/>
-            <a:ext cx="3210458" cy="457200"/>
-          </a:xfrm>
-          <a:prstGeom prst="rect">
-            <a:avLst/>
-          </a:prstGeom>
-          <a:noFill/>
-        </p:spPr>
-        <p:txBody>
-          <a:bodyPr wrap="square">
-            <a:spAutoFit/>
-          </a:bodyPr>
-          <a:lstStyle/>
-          <a:p>
-            <a:pPr>
-              <a:defRPr>
-                <a:latin typeface="Roboto"/>
-              </a:defRPr>
-            </a:pPr>
-            <a:r>
-              <a:rPr sz="1200" b="0">
-                <a:solidFill>
-                  <a:srgbClr val="5F6F63"/>
-                </a:solidFill>
-                <a:latin typeface="Roboto"/>
-              </a:rPr>
-              <a:t>Raised, year to date</a:t>
-            </a:r>
-          </a:p>
-        </p:txBody>
-      </p:sp>
-      <p:sp>
-        <p:nvSpPr>
-          <p:cNvPr id="15" name="TextBox 14"/>
-          <p:cNvSpPr txBox="1"/>
-          <p:nvPr/>
-        </p:nvSpPr>
-        <p:spPr>
-          <a:xfrm>
-            <a:off x="8341156" y="2240280"/>
-            <a:ext cx="3210458" cy="731520"/>
-          </a:xfrm>
-          <a:prstGeom prst="rect">
-            <a:avLst/>
-          </a:prstGeom>
-          <a:noFill/>
-        </p:spPr>
-        <p:txBody>
-          <a:bodyPr wrap="square">
-            <a:spAutoFit/>
-          </a:bodyPr>
-          <a:lstStyle/>
-          <a:p>
-            <a:pPr>
-              <a:defRPr>
-                <a:latin typeface="Roboto"/>
-              </a:defRPr>
-            </a:pPr>
-            <a:r>
-              <a:rPr sz="3000" b="1">
-                <a:solidFill>
-                  <a:srgbClr val="2F7A5D"/>
-                </a:solidFill>
-                <a:latin typeface="Roboto"/>
-              </a:rPr>
-              <a:t>$325,518</a:t>
-            </a:r>
-          </a:p>
-        </p:txBody>
-      </p:sp>
-      <p:sp>
-        <p:nvSpPr>
-          <p:cNvPr id="16" name="TextBox 15"/>
-          <p:cNvSpPr txBox="1"/>
-          <p:nvPr/>
-        </p:nvSpPr>
-        <p:spPr>
-          <a:xfrm>
-            <a:off x="8341156" y="3017520"/>
-            <a:ext cx="3210458" cy="548640"/>
-          </a:xfrm>
-          <a:prstGeom prst="rect">
-            <a:avLst/>
-          </a:prstGeom>
-          <a:noFill/>
-        </p:spPr>
-        <p:txBody>
-          <a:bodyPr wrap="square">
-            <a:spAutoFit/>
-          </a:bodyPr>
-          <a:lstStyle/>
-          <a:p>
-            <a:pPr>
-              <a:defRPr>
-                <a:latin typeface="Roboto"/>
-              </a:defRPr>
-            </a:pPr>
-            <a:r>
-              <a:rPr sz="1100" b="0">
-                <a:solidFill>
-                  <a:srgbClr val="5F6F63"/>
-                </a:solidFill>
-                <a:latin typeface="Roboto"/>
-              </a:rPr>
-              <a:t>Jul to Sep 2026</a:t>
-            </a:r>
-          </a:p>
-        </p:txBody>
-      </p:sp>
-      <p:sp>
-        <p:nvSpPr>
-          <p:cNvPr id="17" name="TextBox 16"/>
-          <p:cNvSpPr txBox="1"/>
-          <p:nvPr/>
-        </p:nvSpPr>
-        <p:spPr>
-          <a:xfrm>
-            <a:off x="457200" y="6492240"/>
-            <a:ext cx="3657600" cy="274320"/>
-          </a:xfrm>
-          <a:prstGeom prst="rect">
-            <a:avLst/>
-          </a:prstGeom>
-          <a:noFill/>
-        </p:spPr>
-        <p:txBody>
-          <a:bodyPr wrap="square">
-            <a:spAutoFit/>
-          </a:bodyPr>
-          <a:lstStyle/>
-          <a:p>
-            <a:pPr>
-              <a:defRPr>
-                <a:latin typeface="Roboto"/>
-              </a:defRPr>
-            </a:pPr>
-            <a:r>
-              <a:rPr sz="900" b="0">
-                <a:solidFill>
-                  <a:srgbClr val="5F6F63"/>
-                </a:solidFill>
-                <a:latin typeface="Roboto"/>
-              </a:rPr>
-              <a:t>funding.pptx</a:t>
-            </a:r>
-          </a:p>
-        </p:txBody>
-      </p:sp>
-      <p:sp>
-        <p:nvSpPr>
-          <p:cNvPr id="18" name="TextBox 17"/>
-          <p:cNvSpPr txBox="1"/>
-          <p:nvPr/>
-        </p:nvSpPr>
-        <p:spPr>
-          <a:xfrm>
-            <a:off x="4297680" y="6492240"/>
-            <a:ext cx="3657600" cy="274320"/>
-          </a:xfrm>
-          <a:prstGeom prst="rect">
-            <a:avLst/>
-          </a:prstGeom>
-          <a:noFill/>
-        </p:spPr>
-        <p:txBody>
-          <a:bodyPr wrap="square">
-            <a:spAutoFit/>
-          </a:bodyPr>
-          <a:lstStyle/>
-          <a:p>
-            <a:pPr algn="ctr">
-              <a:defRPr>
-                <a:latin typeface="Roboto"/>
-              </a:defRPr>
-            </a:pPr>
-            <a:r>
-              <a:rPr sz="900" b="0">
-                <a:solidFill>
-                  <a:srgbClr val="5F6F63"/>
-                </a:solidFill>
-                <a:latin typeface="Roboto"/>
-              </a:rPr>
-              <a:t>Data retrieved 2pm, Tue 6 Oct 2026 · Sample data</a:t>
-            </a:r>
-          </a:p>
-        </p:txBody>
-      </p:sp>
-      <p:sp>
-        <p:nvSpPr>
-          <p:cNvPr id="19" name="TextBox 18"/>
-          <p:cNvSpPr txBox="1"/>
-          <p:nvPr/>
-        </p:nvSpPr>
-        <p:spPr>
-          <a:xfrm>
-            <a:off x="8503920" y="6492240"/>
-            <a:ext cx="3200400" cy="274320"/>
-          </a:xfrm>
-          <a:prstGeom prst="rect">
-            <a:avLst/>
-          </a:prstGeom>
-          <a:noFill/>
-        </p:spPr>
-        <p:txBody>
-          <a:bodyPr wrap="square">
-            <a:spAutoFit/>
-          </a:bodyPr>
-          <a:lstStyle/>
-          <a:p>
-            <a:pPr algn="r">
-              <a:defRPr>
-                <a:latin typeface="Roboto"/>
-              </a:defRPr>
-            </a:pPr>
-            <a:r>
-              <a:rPr sz="900" b="0">
-                <a:solidFill>
-                  <a:srgbClr val="5F6F63"/>
-                </a:solidFill>
-                <a:latin typeface="Roboto"/>
-              </a:rPr>
-              <a:t>Slide 7 of 10</a:t>
-            </a:r>
-          </a:p>
-        </p:txBody>
-      </p:sp>
-    </p:spTree>
-  </p:cSld>
-  <p:clrMapOvr>
-    <a:masterClrMapping/>
-  </p:clrMapOvr>
-</p:sld>
-</file>
-
-<file path=ppt/slides/slide8.xml><?xml version="1.0" encoding="utf-8"?>
-<p:sld xmlns:a="http://schemas.openxmlformats.org/drawingml/2006/main" xmlns:p="http://schemas.openxmlformats.org/presentationml/2006/main" xmlns:r="http://schemas.openxmlformats.org/officeDocument/2006/relationships">
-  <p:cSld>
-    <p:spTree>
-      <p:nvGrpSpPr>
-        <p:cNvPr id="1" name=""/>
-        <p:cNvGrpSpPr/>
-        <p:nvPr/>
-      </p:nvGrpSpPr>
-      <p:grpSpPr/>
-      <p:sp>
-        <p:nvSpPr>
-          <p:cNvPr id="2" name="Rectangle 1"/>
-          <p:cNvSpPr/>
-          <p:nvPr/>
-        </p:nvSpPr>
-        <p:spPr>
-          <a:xfrm>
-            <a:off x="0" y="0"/>
-            <a:ext cx="12191695" cy="73152"/>
-          </a:xfrm>
-          <a:prstGeom prst="rect">
-            <a:avLst/>
-          </a:prstGeom>
-          <a:solidFill>
-            <a:srgbClr val="2F7A5D"/>
-          </a:solidFill>
-          <a:ln>
-            <a:noFill/>
-          </a:ln>
-        </p:spPr>
-        <p:style>
-          <a:lnRef idx="1">
-            <a:schemeClr val="accent1"/>
-          </a:lnRef>
-          <a:fillRef idx="3">
-            <a:schemeClr val="accent1"/>
-          </a:fillRef>
-          <a:effectRef idx="2">
-            <a:schemeClr val="accent1"/>
-          </a:effectRef>
-          <a:fontRef idx="minor">
-            <a:schemeClr val="lt1"/>
-          </a:fontRef>
-        </p:style>
-        <p:txBody>
-          <a:bodyPr rtlCol="0" anchor="ctr"/>
-          <a:lstStyle/>
-          <a:p>
-            <a:pPr algn="ctr">
-              <a:defRPr>
-                <a:latin typeface="Roboto"/>
-              </a:defRPr>
-            </a:pPr>
-          </a:p>
-        </p:txBody>
-      </p:sp>
-      <p:sp>
-        <p:nvSpPr>
-          <p:cNvPr id="3" name="TextBox 2"/>
-          <p:cNvSpPr txBox="1"/>
-          <p:nvPr/>
-        </p:nvSpPr>
-        <p:spPr>
-          <a:xfrm>
-            <a:off x="457200" y="164592"/>
-            <a:ext cx="7315200" cy="274320"/>
-          </a:xfrm>
-          <a:prstGeom prst="rect">
-            <a:avLst/>
-          </a:prstGeom>
-          <a:noFill/>
-        </p:spPr>
-        <p:txBody>
-          <a:bodyPr wrap="square">
-            <a:spAutoFit/>
-          </a:bodyPr>
-          <a:lstStyle/>
-          <a:p>
-            <a:pPr>
-              <a:defRPr>
-                <a:latin typeface="Roboto"/>
-              </a:defRPr>
-            </a:pPr>
-            <a:r>
-              <a:rPr sz="1000" b="0">
-                <a:solidFill>
-                  <a:srgbClr val="5F6F63"/>
-                </a:solidFill>
-                <a:latin typeface="Roboto"/>
-              </a:rPr>
-              <a:t>Sample Community Services Ltd · Which funding is worth chasing?</a:t>
-            </a:r>
-          </a:p>
-        </p:txBody>
-      </p:sp>
-      <p:sp>
-        <p:nvSpPr>
-          <p:cNvPr id="4" name="TextBox 3"/>
-          <p:cNvSpPr txBox="1"/>
-          <p:nvPr/>
-        </p:nvSpPr>
-        <p:spPr>
-          <a:xfrm>
-            <a:off x="457200" y="411480"/>
-            <a:ext cx="11247120" cy="548640"/>
-          </a:xfrm>
-          <a:prstGeom prst="rect">
-            <a:avLst/>
-          </a:prstGeom>
-          <a:noFill/>
-        </p:spPr>
-        <p:txBody>
-          <a:bodyPr wrap="square">
-            <a:spAutoFit/>
-          </a:bodyPr>
-          <a:lstStyle/>
-          <a:p>
-            <a:pPr>
-              <a:defRPr>
-                <a:latin typeface="Roboto"/>
-              </a:defRPr>
-            </a:pPr>
-            <a:r>
-              <a:rPr sz="2400" b="1">
-                <a:solidFill>
-                  <a:srgbClr val="25342A"/>
-                </a:solidFill>
-                <a:latin typeface="Roboto"/>
-              </a:rPr>
-              <a:t>Financial year to date (Jul to Sep 2026), by source · Every source at once</a:t>
             </a:r>
           </a:p>
         </p:txBody>
@@ -7879,8 +7862,8 @@
           <p:nvPr/>
         </p:nvGraphicFramePr>
         <p:xfrm>
-          <a:off x="457200" y="1188720"/>
-          <a:ext cx="11247120" cy="1316736"/>
+          <a:off x="457200" y="960120"/>
+          <a:ext cx="11277295" cy="1243584"/>
         </p:xfrm>
         <a:graphic>
           <a:graphicData uri="http://schemas.openxmlformats.org/drawingml/2006/table">
@@ -7889,19 +7872,19 @@
                 <a:tableStyleId>{5C22544A-7EE6-4342-B048-85BDC9FD1C3A}</a:tableStyleId>
               </a:tblPr>
               <a:tblGrid>
-                <a:gridCol w="2249424"/>
-                <a:gridCol w="2249424"/>
-                <a:gridCol w="2249424"/>
-                <a:gridCol w="2249424"/>
-                <a:gridCol w="2249424"/>
+                <a:gridCol w="2255459"/>
+                <a:gridCol w="2255459"/>
+                <a:gridCol w="2255459"/>
+                <a:gridCol w="2255459"/>
+                <a:gridCol w="2255459"/>
               </a:tblGrid>
-              <a:tr h="329184">
+              <a:tr h="310896">
                 <a:tc>
                   <a:txBody>
                     <a:bodyPr/>
                     <a:lstStyle/>
                     <a:p>
-                      <a:pPr>
+                      <a:pPr algn="l">
                         <a:defRPr>
                           <a:latin typeface="Roboto"/>
                         </a:defRPr>
@@ -8023,13 +8006,13 @@
                   </a:tcPr>
                 </a:tc>
               </a:tr>
-              <a:tr h="329184">
+              <a:tr h="310896">
                 <a:tc>
                   <a:txBody>
                     <a:bodyPr/>
                     <a:lstStyle/>
                     <a:p>
-                      <a:pPr>
+                      <a:pPr algn="l">
                         <a:defRPr>
                           <a:latin typeface="Roboto"/>
                         </a:defRPr>
@@ -8160,13 +8143,13 @@
                   </a:tcPr>
                 </a:tc>
               </a:tr>
-              <a:tr h="329184">
+              <a:tr h="310896">
                 <a:tc>
                   <a:txBody>
                     <a:bodyPr/>
                     <a:lstStyle/>
                     <a:p>
-                      <a:pPr>
+                      <a:pPr algn="l">
                         <a:defRPr>
                           <a:latin typeface="Roboto"/>
                         </a:defRPr>
@@ -8297,13 +8280,13 @@
                   </a:tcPr>
                 </a:tc>
               </a:tr>
-              <a:tr h="329184">
+              <a:tr h="310896">
                 <a:tc>
                   <a:txBody>
                     <a:bodyPr/>
                     <a:lstStyle/>
                     <a:p>
-                      <a:pPr>
+                      <a:pPr algn="l">
                         <a:defRPr>
                           <a:latin typeface="Roboto"/>
                         </a:defRPr>
@@ -8447,7 +8430,7 @@
         <p:spPr>
           <a:xfrm>
             <a:off x="457200" y="6492240"/>
-            <a:ext cx="3657600" cy="274320"/>
+            <a:ext cx="2926080" cy="274320"/>
           </a:xfrm>
           <a:prstGeom prst="rect">
             <a:avLst/>
@@ -8455,7 +8438,7 @@
           <a:noFill/>
         </p:spPr>
         <p:txBody>
-          <a:bodyPr wrap="square">
+          <a:bodyPr wrap="square" lIns="45720" rIns="45720">
             <a:spAutoFit/>
           </a:bodyPr>
           <a:lstStyle/>
@@ -8485,8 +8468,8 @@
         </p:nvSpPr>
         <p:spPr>
           <a:xfrm>
-            <a:off x="4297680" y="6492240"/>
-            <a:ext cx="3657600" cy="274320"/>
+            <a:off x="3108960" y="6492240"/>
+            <a:ext cx="5943600" cy="274320"/>
           </a:xfrm>
           <a:prstGeom prst="rect">
             <a:avLst/>
@@ -8494,7 +8477,7 @@
           <a:noFill/>
         </p:spPr>
         <p:txBody>
-          <a:bodyPr wrap="square">
+          <a:bodyPr wrap="square" lIns="45720" rIns="45720">
             <a:spAutoFit/>
           </a:bodyPr>
           <a:lstStyle/>
@@ -8511,7 +8494,7 @@
                 </a:solidFill>
                 <a:latin typeface="Roboto"/>
               </a:rPr>
-              <a:t>Data retrieved 2pm, Tue 6 Oct 2026 · Sample data</a:t>
+              <a:t>Data retrieved 2pm, Tue 6 Oct 2026 · Generated 8 Oct 2026, 9:35am · Sample data · Made with Python (python-pptx)</a:t>
             </a:r>
           </a:p>
         </p:txBody>
@@ -8533,7 +8516,7 @@
           <a:noFill/>
         </p:spPr>
         <p:txBody>
-          <a:bodyPr wrap="square">
+          <a:bodyPr wrap="square" lIns="45720" rIns="45720">
             <a:spAutoFit/>
           </a:bodyPr>
           <a:lstStyle/>
@@ -8550,324 +8533,7 @@
                 </a:solidFill>
                 <a:latin typeface="Roboto"/>
               </a:rPr>
-              <a:t>Slide 8 of 10</a:t>
-            </a:r>
-          </a:p>
-        </p:txBody>
-      </p:sp>
-    </p:spTree>
-  </p:cSld>
-  <p:clrMapOvr>
-    <a:masterClrMapping/>
-  </p:clrMapOvr>
-</p:sld>
-</file>
-
-<file path=ppt/slides/slide9.xml><?xml version="1.0" encoding="utf-8"?>
-<p:sld xmlns:a="http://schemas.openxmlformats.org/drawingml/2006/main" xmlns:p="http://schemas.openxmlformats.org/presentationml/2006/main" xmlns:r="http://schemas.openxmlformats.org/officeDocument/2006/relationships">
-  <p:cSld>
-    <p:spTree>
-      <p:nvGrpSpPr>
-        <p:cNvPr id="1" name=""/>
-        <p:cNvGrpSpPr/>
-        <p:nvPr/>
-      </p:nvGrpSpPr>
-      <p:grpSpPr/>
-      <p:sp>
-        <p:nvSpPr>
-          <p:cNvPr id="2" name="Rectangle 1"/>
-          <p:cNvSpPr/>
-          <p:nvPr/>
-        </p:nvSpPr>
-        <p:spPr>
-          <a:xfrm>
-            <a:off x="0" y="0"/>
-            <a:ext cx="12191695" cy="73152"/>
-          </a:xfrm>
-          <a:prstGeom prst="rect">
-            <a:avLst/>
-          </a:prstGeom>
-          <a:solidFill>
-            <a:srgbClr val="2F7A5D"/>
-          </a:solidFill>
-          <a:ln>
-            <a:noFill/>
-          </a:ln>
-        </p:spPr>
-        <p:style>
-          <a:lnRef idx="1">
-            <a:schemeClr val="accent1"/>
-          </a:lnRef>
-          <a:fillRef idx="3">
-            <a:schemeClr val="accent1"/>
-          </a:fillRef>
-          <a:effectRef idx="2">
-            <a:schemeClr val="accent1"/>
-          </a:effectRef>
-          <a:fontRef idx="minor">
-            <a:schemeClr val="lt1"/>
-          </a:fontRef>
-        </p:style>
-        <p:txBody>
-          <a:bodyPr rtlCol="0" anchor="ctr"/>
-          <a:lstStyle/>
-          <a:p>
-            <a:pPr algn="ctr">
-              <a:defRPr>
-                <a:latin typeface="Roboto"/>
-              </a:defRPr>
-            </a:pPr>
-          </a:p>
-        </p:txBody>
-      </p:sp>
-      <p:sp>
-        <p:nvSpPr>
-          <p:cNvPr id="3" name="TextBox 2"/>
-          <p:cNvSpPr txBox="1"/>
-          <p:nvPr/>
-        </p:nvSpPr>
-        <p:spPr>
-          <a:xfrm>
-            <a:off x="457200" y="164592"/>
-            <a:ext cx="7315200" cy="274320"/>
-          </a:xfrm>
-          <a:prstGeom prst="rect">
-            <a:avLst/>
-          </a:prstGeom>
-          <a:noFill/>
-        </p:spPr>
-        <p:txBody>
-          <a:bodyPr wrap="square">
-            <a:spAutoFit/>
-          </a:bodyPr>
-          <a:lstStyle/>
-          <a:p>
-            <a:pPr>
-              <a:defRPr>
-                <a:latin typeface="Roboto"/>
-              </a:defRPr>
-            </a:pPr>
-            <a:r>
-              <a:rPr sz="1000" b="0">
-                <a:solidFill>
-                  <a:srgbClr val="5F6F63"/>
-                </a:solidFill>
-                <a:latin typeface="Roboto"/>
-              </a:rPr>
-              <a:t>Sample Community Services Ltd · Which funding is worth chasing?</a:t>
-            </a:r>
-          </a:p>
-        </p:txBody>
-      </p:sp>
-      <p:sp>
-        <p:nvSpPr>
-          <p:cNvPr id="4" name="TextBox 3"/>
-          <p:cNvSpPr txBox="1"/>
-          <p:nvPr/>
-        </p:nvSpPr>
-        <p:spPr>
-          <a:xfrm>
-            <a:off x="457200" y="411480"/>
-            <a:ext cx="11247120" cy="548640"/>
-          </a:xfrm>
-          <a:prstGeom prst="rect">
-            <a:avLst/>
-          </a:prstGeom>
-          <a:noFill/>
-        </p:spPr>
-        <p:txBody>
-          <a:bodyPr wrap="square">
-            <a:spAutoFit/>
-          </a:bodyPr>
-          <a:lstStyle/>
-          <a:p>
-            <a:pPr>
-              <a:defRPr>
-                <a:latin typeface="Roboto"/>
-              </a:defRPr>
-            </a:pPr>
-            <a:r>
-              <a:rPr sz="2400" b="1">
-                <a:solidFill>
-                  <a:srgbClr val="25342A"/>
-                </a:solidFill>
-                <a:latin typeface="Roboto"/>
-              </a:rPr>
-              <a:t>Raised and left after costs, by month · Raised $ · Every source at once</a:t>
-            </a:r>
-          </a:p>
-        </p:txBody>
-      </p:sp>
-      <p:sp>
-        <p:nvSpPr>
-          <p:cNvPr id="5" name="TextBox 4"/>
-          <p:cNvSpPr txBox="1"/>
-          <p:nvPr/>
-        </p:nvSpPr>
-        <p:spPr>
-          <a:xfrm>
-            <a:off x="457200" y="960120"/>
-            <a:ext cx="11247120" cy="457200"/>
-          </a:xfrm>
-          <a:prstGeom prst="rect">
-            <a:avLst/>
-          </a:prstGeom>
-          <a:noFill/>
-        </p:spPr>
-        <p:txBody>
-          <a:bodyPr wrap="square">
-            <a:spAutoFit/>
-          </a:bodyPr>
-          <a:lstStyle/>
-          <a:p>
-            <a:pPr>
-              <a:defRPr>
-                <a:latin typeface="Roboto"/>
-              </a:defRPr>
-            </a:pPr>
-            <a:r>
-              <a:rPr sz="1200" b="0">
-                <a:solidFill>
-                  <a:srgbClr val="5F6F63"/>
-                </a:solidFill>
-                <a:latin typeface="Roboto"/>
-              </a:rPr>
-              <a:t>Tap a month for its workings.</a:t>
-            </a:r>
-          </a:p>
-        </p:txBody>
-      </p:sp>
-      <p:graphicFrame>
-        <p:nvGraphicFramePr>
-          <p:cNvPr id="6" name="Chart 5"/>
-          <p:cNvGraphicFramePr>
-            <a:graphicFrameLocks noGrp="1"/>
-          </p:cNvGraphicFramePr>
-          <p:nvPr/>
-        </p:nvGraphicFramePr>
-        <p:xfrm>
-          <a:off x="457200" y="1463040"/>
-          <a:ext cx="11247120" cy="4754880"/>
-        </p:xfrm>
-        <a:graphic>
-          <a:graphicData uri="http://schemas.openxmlformats.org/drawingml/2006/chart">
-            <c:chart xmlns:c="http://schemas.openxmlformats.org/drawingml/2006/chart" r:id="rId2"/>
-          </a:graphicData>
-        </a:graphic>
-      </p:graphicFrame>
-      <p:sp>
-        <p:nvSpPr>
-          <p:cNvPr id="7" name="TextBox 6"/>
-          <p:cNvSpPr txBox="1"/>
-          <p:nvPr/>
-        </p:nvSpPr>
-        <p:spPr>
-          <a:xfrm>
-            <a:off x="457200" y="6492240"/>
-            <a:ext cx="3657600" cy="274320"/>
-          </a:xfrm>
-          <a:prstGeom prst="rect">
-            <a:avLst/>
-          </a:prstGeom>
-          <a:noFill/>
-        </p:spPr>
-        <p:txBody>
-          <a:bodyPr wrap="square">
-            <a:spAutoFit/>
-          </a:bodyPr>
-          <a:lstStyle/>
-          <a:p>
-            <a:pPr>
-              <a:defRPr>
-                <a:latin typeface="Roboto"/>
-              </a:defRPr>
-            </a:pPr>
-            <a:r>
-              <a:rPr sz="900" b="0">
-                <a:solidFill>
-                  <a:srgbClr val="5F6F63"/>
-                </a:solidFill>
-                <a:latin typeface="Roboto"/>
-              </a:rPr>
-              <a:t>funding.pptx</a:t>
-            </a:r>
-          </a:p>
-        </p:txBody>
-      </p:sp>
-      <p:sp>
-        <p:nvSpPr>
-          <p:cNvPr id="8" name="TextBox 7"/>
-          <p:cNvSpPr txBox="1"/>
-          <p:nvPr/>
-        </p:nvSpPr>
-        <p:spPr>
-          <a:xfrm>
-            <a:off x="4297680" y="6492240"/>
-            <a:ext cx="3657600" cy="274320"/>
-          </a:xfrm>
-          <a:prstGeom prst="rect">
-            <a:avLst/>
-          </a:prstGeom>
-          <a:noFill/>
-        </p:spPr>
-        <p:txBody>
-          <a:bodyPr wrap="square">
-            <a:spAutoFit/>
-          </a:bodyPr>
-          <a:lstStyle/>
-          <a:p>
-            <a:pPr algn="ctr">
-              <a:defRPr>
-                <a:latin typeface="Roboto"/>
-              </a:defRPr>
-            </a:pPr>
-            <a:r>
-              <a:rPr sz="900" b="0">
-                <a:solidFill>
-                  <a:srgbClr val="5F6F63"/>
-                </a:solidFill>
-                <a:latin typeface="Roboto"/>
-              </a:rPr>
-              <a:t>Data retrieved 2pm, Tue 6 Oct 2026 · Sample data</a:t>
-            </a:r>
-          </a:p>
-        </p:txBody>
-      </p:sp>
-      <p:sp>
-        <p:nvSpPr>
-          <p:cNvPr id="9" name="TextBox 8"/>
-          <p:cNvSpPr txBox="1"/>
-          <p:nvPr/>
-        </p:nvSpPr>
-        <p:spPr>
-          <a:xfrm>
-            <a:off x="8503920" y="6492240"/>
-            <a:ext cx="3200400" cy="274320"/>
-          </a:xfrm>
-          <a:prstGeom prst="rect">
-            <a:avLst/>
-          </a:prstGeom>
-          <a:noFill/>
-        </p:spPr>
-        <p:txBody>
-          <a:bodyPr wrap="square">
-            <a:spAutoFit/>
-          </a:bodyPr>
-          <a:lstStyle/>
-          <a:p>
-            <a:pPr algn="r">
-              <a:defRPr>
-                <a:latin typeface="Roboto"/>
-              </a:defRPr>
-            </a:pPr>
-            <a:r>
-              <a:rPr sz="900" b="0">
-                <a:solidFill>
-                  <a:srgbClr val="5F6F63"/>
-                </a:solidFill>
-                <a:latin typeface="Roboto"/>
-              </a:rPr>
-              <a:t>Slide 9 of 10</a:t>
+              <a:t>Slide 6 of 6</a:t>
             </a:r>
           </a:p>
         </p:txBody>
@@ -8881,6 +8547,326 @@
 </file>
 
 <file path=ppt/theme/theme1.xml><?xml version="1.0" encoding="utf-8"?>
+<a:theme xmlns:a="http://schemas.openxmlformats.org/drawingml/2006/main" name="Office Theme">
+  <a:themeElements>
+    <a:clrScheme name="Office">
+      <a:dk1>
+        <a:sysClr val="windowText" lastClr="000000"/>
+      </a:dk1>
+      <a:lt1>
+        <a:sysClr val="window" lastClr="FFFFFF"/>
+      </a:lt1>
+      <a:dk2>
+        <a:srgbClr val="25342A"/>
+      </a:dk2>
+      <a:lt2>
+        <a:srgbClr val="F4F7F2"/>
+      </a:lt2>
+      <a:accent1>
+        <a:srgbClr val="2F7A5D"/>
+      </a:accent1>
+      <a:accent2>
+        <a:srgbClr val="0E9F6E"/>
+      </a:accent2>
+      <a:accent3>
+        <a:srgbClr val="7D8790"/>
+      </a:accent3>
+      <a:accent4>
+        <a:srgbClr val="8A6D3B"/>
+      </a:accent4>
+      <a:accent5>
+        <a:srgbClr val="B42318"/>
+      </a:accent5>
+      <a:accent6>
+        <a:srgbClr val="8E9CAB"/>
+      </a:accent6>
+      <a:hlink>
+        <a:srgbClr val="0000FF"/>
+      </a:hlink>
+      <a:folHlink>
+        <a:srgbClr val="800080"/>
+      </a:folHlink>
+    </a:clrScheme>
+    <a:fontScheme name="Office">
+      <a:majorFont>
+        <a:latin typeface="Roboto"/>
+        <a:ea typeface=""/>
+        <a:cs typeface=""/>
+        <a:font script="Jpan" typeface="ＭＳ Ｐゴシック"/>
+        <a:font script="Hang" typeface="맑은 고딕"/>
+        <a:font script="Hans" typeface="宋体"/>
+        <a:font script="Hant" typeface="新細明體"/>
+        <a:font script="Arab" typeface="Times New Roman"/>
+        <a:font script="Hebr" typeface="Times New Roman"/>
+        <a:font script="Thai" typeface="Angsana New"/>
+        <a:font script="Ethi" typeface="Nyala"/>
+        <a:font script="Beng" typeface="Vrinda"/>
+        <a:font script="Gujr" typeface="Shruti"/>
+        <a:font script="Khmr" typeface="MoolBoran"/>
+        <a:font script="Knda" typeface="Tunga"/>
+        <a:font script="Guru" typeface="Raavi"/>
+        <a:font script="Cans" typeface="Euphemia"/>
+        <a:font script="Cher" typeface="Plantagenet Cherokee"/>
+        <a:font script="Yiii" typeface="Microsoft Yi Baiti"/>
+        <a:font script="Tibt" typeface="Microsoft Himalaya"/>
+        <a:font script="Thaa" typeface="MV Boli"/>
+        <a:font script="Deva" typeface="Mangal"/>
+        <a:font script="Telu" typeface="Gautami"/>
+        <a:font script="Taml" typeface="Latha"/>
+        <a:font script="Syrc" typeface="Estrangelo Edessa"/>
+        <a:font script="Orya" typeface="Kalinga"/>
+        <a:font script="Mlym" typeface="Kartika"/>
+        <a:font script="Laoo" typeface="DokChampa"/>
+        <a:font script="Sinh" typeface="Iskoola Pota"/>
+        <a:font script="Mong" typeface="Mongolian Baiti"/>
+        <a:font script="Viet" typeface="Times New Roman"/>
+        <a:font script="Uigh" typeface="Microsoft Uighur"/>
+        <a:font script="Geor" typeface="Sylfaen"/>
+      </a:majorFont>
+      <a:minorFont>
+        <a:latin typeface="Roboto"/>
+        <a:ea typeface=""/>
+        <a:cs typeface=""/>
+        <a:font script="Jpan" typeface="ＭＳ Ｐゴシック"/>
+        <a:font script="Hang" typeface="맑은 고딕"/>
+        <a:font script="Hans" typeface="宋体"/>
+        <a:font script="Hant" typeface="新細明體"/>
+        <a:font script="Arab" typeface="Arial"/>
+        <a:font script="Hebr" typeface="Arial"/>
+        <a:font script="Thai" typeface="Cordia New"/>
+        <a:font script="Ethi" typeface="Nyala"/>
+        <a:font script="Beng" typeface="Vrinda"/>
+        <a:font script="Gujr" typeface="Shruti"/>
+        <a:font script="Khmr" typeface="DaunPenh"/>
+        <a:font script="Knda" typeface="Tunga"/>
+        <a:font script="Guru" typeface="Raavi"/>
+        <a:font script="Cans" typeface="Euphemia"/>
+        <a:font script="Cher" typeface="Plantagenet Cherokee"/>
+        <a:font script="Yiii" typeface="Microsoft Yi Baiti"/>
+        <a:font script="Tibt" typeface="Microsoft Himalaya"/>
+        <a:font script="Thaa" typeface="MV Boli"/>
+        <a:font script="Deva" typeface="Mangal"/>
+        <a:font script="Telu" typeface="Gautami"/>
+        <a:font script="Taml" typeface="Latha"/>
+        <a:font script="Syrc" typeface="Estrangelo Edessa"/>
+        <a:font script="Orya" typeface="Kalinga"/>
+        <a:font script="Mlym" typeface="Kartika"/>
+        <a:font script="Laoo" typeface="DokChampa"/>
+        <a:font script="Sinh" typeface="Iskoola Pota"/>
+        <a:font script="Mong" typeface="Mongolian Baiti"/>
+        <a:font script="Viet" typeface="Arial"/>
+        <a:font script="Uigh" typeface="Microsoft Uighur"/>
+        <a:font script="Geor" typeface="Sylfaen"/>
+      </a:minorFont>
+    </a:fontScheme>
+    <a:fmtScheme name="Office">
+      <a:fillStyleLst>
+        <a:solidFill>
+          <a:schemeClr val="phClr"/>
+        </a:solidFill>
+        <a:gradFill rotWithShape="1">
+          <a:gsLst>
+            <a:gs pos="0">
+              <a:schemeClr val="phClr">
+                <a:tint val="50000"/>
+                <a:satMod val="300000"/>
+              </a:schemeClr>
+            </a:gs>
+            <a:gs pos="35000">
+              <a:schemeClr val="phClr">
+                <a:tint val="37000"/>
+                <a:satMod val="300000"/>
+              </a:schemeClr>
+            </a:gs>
+            <a:gs pos="100000">
+              <a:schemeClr val="phClr">
+                <a:tint val="15000"/>
+                <a:satMod val="350000"/>
+              </a:schemeClr>
+            </a:gs>
+          </a:gsLst>
+          <a:lin ang="16200000" scaled="1"/>
+        </a:gradFill>
+        <a:gradFill rotWithShape="1">
+          <a:gsLst>
+            <a:gs pos="0">
+              <a:schemeClr val="phClr">
+                <a:tint val="100000"/>
+                <a:shade val="100000"/>
+                <a:satMod val="130000"/>
+              </a:schemeClr>
+            </a:gs>
+            <a:gs pos="100000">
+              <a:schemeClr val="phClr">
+                <a:tint val="50000"/>
+                <a:shade val="100000"/>
+                <a:satMod val="350000"/>
+              </a:schemeClr>
+            </a:gs>
+          </a:gsLst>
+          <a:lin ang="16200000" scaled="0"/>
+        </a:gradFill>
+      </a:fillStyleLst>
+      <a:lnStyleLst>
+        <a:ln w="9525" cap="flat" cmpd="sng" algn="ctr">
+          <a:solidFill>
+            <a:schemeClr val="phClr">
+              <a:shade val="95000"/>
+              <a:satMod val="105000"/>
+            </a:schemeClr>
+          </a:solidFill>
+          <a:prstDash val="solid"/>
+        </a:ln>
+        <a:ln w="25400" cap="flat" cmpd="sng" algn="ctr">
+          <a:solidFill>
+            <a:schemeClr val="phClr"/>
+          </a:solidFill>
+          <a:prstDash val="solid"/>
+        </a:ln>
+        <a:ln w="38100" cap="flat" cmpd="sng" algn="ctr">
+          <a:solidFill>
+            <a:schemeClr val="phClr"/>
+          </a:solidFill>
+          <a:prstDash val="solid"/>
+        </a:ln>
+      </a:lnStyleLst>
+      <a:effectStyleLst>
+        <a:effectStyle>
+          <a:effectLst>
+            <a:outerShdw blurRad="40000" dist="20000" dir="5400000" rotWithShape="0">
+              <a:srgbClr val="000000">
+                <a:alpha val="38000"/>
+              </a:srgbClr>
+            </a:outerShdw>
+          </a:effectLst>
+        </a:effectStyle>
+        <a:effectStyle>
+          <a:effectLst>
+            <a:outerShdw blurRad="40000" dist="23000" dir="5400000" rotWithShape="0">
+              <a:srgbClr val="000000">
+                <a:alpha val="35000"/>
+              </a:srgbClr>
+            </a:outerShdw>
+          </a:effectLst>
+        </a:effectStyle>
+        <a:effectStyle>
+          <a:effectLst>
+            <a:outerShdw blurRad="40000" dist="23000" dir="5400000" rotWithShape="0">
+              <a:srgbClr val="000000">
+                <a:alpha val="35000"/>
+              </a:srgbClr>
+            </a:outerShdw>
+          </a:effectLst>
+          <a:scene3d>
+            <a:camera prst="orthographicFront">
+              <a:rot lat="0" lon="0" rev="0"/>
+            </a:camera>
+            <a:lightRig rig="threePt" dir="t">
+              <a:rot lat="0" lon="0" rev="1200000"/>
+            </a:lightRig>
+          </a:scene3d>
+          <a:sp3d>
+            <a:bevelT w="63500" h="25400"/>
+          </a:sp3d>
+        </a:effectStyle>
+      </a:effectStyleLst>
+      <a:bgFillStyleLst>
+        <a:solidFill>
+          <a:schemeClr val="phClr"/>
+        </a:solidFill>
+        <a:gradFill rotWithShape="1">
+          <a:gsLst>
+            <a:gs pos="0">
+              <a:schemeClr val="phClr">
+                <a:tint val="40000"/>
+                <a:satMod val="350000"/>
+              </a:schemeClr>
+            </a:gs>
+            <a:gs pos="40000">
+              <a:schemeClr val="phClr">
+                <a:tint val="45000"/>
+                <a:shade val="99000"/>
+                <a:satMod val="350000"/>
+              </a:schemeClr>
+            </a:gs>
+            <a:gs pos="100000">
+              <a:schemeClr val="phClr">
+                <a:shade val="20000"/>
+                <a:satMod val="255000"/>
+              </a:schemeClr>
+            </a:gs>
+          </a:gsLst>
+          <a:path path="circle">
+            <a:fillToRect l="50000" t="-80000" r="50000" b="180000"/>
+          </a:path>
+        </a:gradFill>
+        <a:gradFill rotWithShape="1">
+          <a:gsLst>
+            <a:gs pos="0">
+              <a:schemeClr val="phClr">
+                <a:tint val="80000"/>
+                <a:satMod val="300000"/>
+              </a:schemeClr>
+            </a:gs>
+            <a:gs pos="100000">
+              <a:schemeClr val="phClr">
+                <a:shade val="30000"/>
+                <a:satMod val="200000"/>
+              </a:schemeClr>
+            </a:gs>
+          </a:gsLst>
+          <a:path path="circle">
+            <a:fillToRect l="50000" t="50000" r="50000" b="50000"/>
+          </a:path>
+        </a:gradFill>
+      </a:bgFillStyleLst>
+    </a:fmtScheme>
+  </a:themeElements>
+  <a:objectDefaults>
+    <a:spDef>
+      <a:spPr/>
+      <a:bodyPr/>
+      <a:lstStyle/>
+      <a:style>
+        <a:lnRef idx="1">
+          <a:schemeClr val="accent1"/>
+        </a:lnRef>
+        <a:fillRef idx="3">
+          <a:schemeClr val="accent1"/>
+        </a:fillRef>
+        <a:effectRef idx="2">
+          <a:schemeClr val="accent1"/>
+        </a:effectRef>
+        <a:fontRef idx="minor">
+          <a:schemeClr val="lt1"/>
+        </a:fontRef>
+      </a:style>
+    </a:spDef>
+    <a:lnDef>
+      <a:spPr/>
+      <a:bodyPr/>
+      <a:lstStyle/>
+      <a:style>
+        <a:lnRef idx="2">
+          <a:schemeClr val="accent1"/>
+        </a:lnRef>
+        <a:fillRef idx="0">
+          <a:schemeClr val="accent1"/>
+        </a:fillRef>
+        <a:effectRef idx="1">
+          <a:schemeClr val="accent1"/>
+        </a:effectRef>
+        <a:fontRef idx="minor">
+          <a:schemeClr val="tx1"/>
+        </a:fontRef>
+      </a:style>
+    </a:lnDef>
+  </a:objectDefaults>
+  <a:extraClrSchemeLst/>
+</a:theme>
+</file>
+
+<file path=ppt/theme/theme2.xml><?xml version="1.0" encoding="utf-8"?>
 <a:theme xmlns:a="http://schemas.openxmlformats.org/drawingml/2006/main" name="Office Theme">
   <a:themeElements>
     <a:clrScheme name="Office">

--- a/media/exports/reports/2026-09/funding.pptx
+++ b/media/exports/reports/2026-09/funding.pptx
@@ -11,6 +11,7 @@
     <p:sldId id="259" r:id="rId11"/>
     <p:sldId id="260" r:id="rId12"/>
     <p:sldId id="261" r:id="rId13"/>
+    <p:sldId id="262" r:id="rId14"/>
   </p:sldIdLst>
   <p:sldSz cx="12191695" cy="6858000" type="screen4x3"/>
   <p:notesSz cx="6858000" cy="9144000"/>
@@ -1627,7 +1628,7 @@
           <a:lstStyle/>
           <a:p>
             <a:r>
-              <a:t>Which funding is worth chasing?. Sample Community Services Ltd. Period: September 2026. Each source of money compared on what it raises and what it costs to raise. Pick a source and every chart, table row and note follows it.</a:t>
+              <a:t>Which funding is worth chasing?. Sample Community Services Ltd. Period: September 2026. In short: Grants cost 9¢ to raise each dollar in September; fundraising events 41¢. Each source of money compared on what it raises and what it costs to raise. Pick a source and every chart, table row and note follows it.</a:t>
             </a:r>
           </a:p>
         </p:txBody>
@@ -1933,6 +1934,76 @@
 </file>
 
 <file path=ppt/notesSlides/notesSlide6.xml><?xml version="1.0" encoding="utf-8"?>
+<p:notes xmlns:a="http://schemas.openxmlformats.org/drawingml/2006/main" xmlns:p="http://schemas.openxmlformats.org/presentationml/2006/main" xmlns:r="http://schemas.openxmlformats.org/officeDocument/2006/relationships">
+  <p:cSld>
+    <p:spTree>
+      <p:nvGrpSpPr>
+        <p:cNvPr id="1" name=""/>
+        <p:cNvGrpSpPr/>
+        <p:nvPr/>
+      </p:nvGrpSpPr>
+      <p:grpSpPr>
+        <a:xfrm>
+          <a:off x="0" y="0"/>
+          <a:ext cx="0" cy="0"/>
+          <a:chOff x="0" y="0"/>
+          <a:chExt cx="0" cy="0"/>
+        </a:xfrm>
+      </p:grpSpPr>
+      <p:sp>
+        <p:nvSpPr>
+          <p:cNvPr id="2" name="Slide Image Placeholder 1"/>
+          <p:cNvSpPr>
+            <a:spLocks noGrp="1"/>
+          </p:cNvSpPr>
+          <p:nvPr>
+            <p:ph type="sldImg" idx="2"/>
+          </p:nvPr>
+        </p:nvSpPr>
+        <p:spPr/>
+      </p:sp>
+      <p:sp>
+        <p:nvSpPr>
+          <p:cNvPr id="3" name="Notes Placeholder 2"/>
+          <p:cNvSpPr>
+            <a:spLocks noGrp="1"/>
+          </p:cNvSpPr>
+          <p:nvPr>
+            <p:ph type="body" idx="3" sz="quarter"/>
+          </p:nvPr>
+        </p:nvSpPr>
+        <p:spPr/>
+        <p:txBody>
+          <a:bodyPr/>
+          <a:lstStyle/>
+          <a:p>
+            <a:r>
+              <a:t>Which funding is worth chasing?: Cheapest to raise: Grants 9¢; Dearest to raise: Fundraising events 41¢; Raised, year to date $325,518.</a:t>
+            </a:r>
+          </a:p>
+        </p:txBody>
+      </p:sp>
+      <p:sp>
+        <p:nvSpPr>
+          <p:cNvPr id="4" name="Slide Number Placeholder 3"/>
+          <p:cNvSpPr>
+            <a:spLocks noGrp="1"/>
+          </p:cNvSpPr>
+          <p:nvPr>
+            <p:ph type="sldNum" idx="5" sz="quarter"/>
+          </p:nvPr>
+        </p:nvSpPr>
+        <p:spPr/>
+      </p:sp>
+    </p:spTree>
+  </p:cSld>
+  <p:clrMapOvr>
+    <a:masterClrMapping/>
+  </p:clrMapOvr>
+</p:notes>
+</file>
+
+<file path=ppt/notesSlides/notesSlide7.xml><?xml version="1.0" encoding="utf-8"?>
 <p:notes xmlns:a="http://schemas.openxmlformats.org/drawingml/2006/main" xmlns:p="http://schemas.openxmlformats.org/presentationml/2006/main" xmlns:r="http://schemas.openxmlformats.org/officeDocument/2006/relationships">
   <p:cSld>
     <p:spTree>
@@ -5227,7 +5298,7 @@
                 </a:solidFill>
                 <a:latin typeface="Roboto"/>
               </a:rPr>
-              <a:t>Period: September 2026. Each source of money compared on what it raises and what it costs to raise. Pick a source and every chart, table row and note follows it.</a:t>
+              <a:t>Period: September 2026. In short: Grants cost 9¢ to raise each dollar in September; fundraising events 41¢. Each source of money compared on what it raises and what it costs to raise. Pick a source and every chart, table row and note follows it.</a:t>
             </a:r>
           </a:p>
         </p:txBody>
@@ -5392,7 +5463,7 @@
                 </a:solidFill>
                 <a:latin typeface="Roboto"/>
               </a:rPr>
-              <a:t>Data retrieved 2pm, Tue 6 Oct 2026 · Generated 8 Oct 2026, 9:35am · Sample data · Made with Python (python-pptx)</a:t>
+              <a:t>Data retrieved 2pm, Tue 6 Oct 2026 · Generated 10 Oct 2026, 9:55pm · Sample data · Made with Python (python-pptx)</a:t>
             </a:r>
           </a:p>
         </p:txBody>
@@ -5431,7 +5502,7 @@
                 </a:solidFill>
                 <a:latin typeface="Roboto"/>
               </a:rPr>
-              <a:t>Slide 1 of 6</a:t>
+              <a:t>Slide 1 of 7</a:t>
             </a:r>
           </a:p>
         </p:txBody>
@@ -5961,7 +6032,7 @@
                 </a:solidFill>
                 <a:latin typeface="Roboto"/>
               </a:rPr>
-              <a:t>Data retrieved 2pm, Tue 6 Oct 2026 · Generated 8 Oct 2026, 9:35am · Sample data · Made with Python (python-pptx)</a:t>
+              <a:t>Data retrieved 2pm, Tue 6 Oct 2026 · Generated 10 Oct 2026, 9:55pm · Sample data · Made with Python (python-pptx)</a:t>
             </a:r>
           </a:p>
         </p:txBody>
@@ -6000,7 +6071,7 @@
                 </a:solidFill>
                 <a:latin typeface="Roboto"/>
               </a:rPr>
-              <a:t>Slide 2 of 6</a:t>
+              <a:t>Slide 2 of 7</a:t>
             </a:r>
           </a:p>
         </p:txBody>
@@ -6530,7 +6601,7 @@
                 </a:solidFill>
                 <a:latin typeface="Roboto"/>
               </a:rPr>
-              <a:t>Data retrieved 2pm, Tue 6 Oct 2026 · Generated 8 Oct 2026, 9:35am · Sample data · Made with Python (python-pptx)</a:t>
+              <a:t>Data retrieved 2pm, Tue 6 Oct 2026 · Generated 10 Oct 2026, 9:55pm · Sample data · Made with Python (python-pptx)</a:t>
             </a:r>
           </a:p>
         </p:txBody>
@@ -6569,7 +6640,7 @@
                 </a:solidFill>
                 <a:latin typeface="Roboto"/>
               </a:rPr>
-              <a:t>Slide 3 of 6</a:t>
+              <a:t>Slide 3 of 7</a:t>
             </a:r>
           </a:p>
         </p:txBody>
@@ -7099,7 +7170,7 @@
                 </a:solidFill>
                 <a:latin typeface="Roboto"/>
               </a:rPr>
-              <a:t>Data retrieved 2pm, Tue 6 Oct 2026 · Generated 8 Oct 2026, 9:35am · Sample data · Made with Python (python-pptx)</a:t>
+              <a:t>Data retrieved 2pm, Tue 6 Oct 2026 · Generated 10 Oct 2026, 9:55pm · Sample data · Made with Python (python-pptx)</a:t>
             </a:r>
           </a:p>
         </p:txBody>
@@ -7138,7 +7209,7 @@
                 </a:solidFill>
                 <a:latin typeface="Roboto"/>
               </a:rPr>
-              <a:t>Slide 4 of 6</a:t>
+              <a:t>Slide 4 of 7</a:t>
             </a:r>
           </a:p>
         </p:txBody>
@@ -7668,7 +7739,7 @@
                 </a:solidFill>
                 <a:latin typeface="Roboto"/>
               </a:rPr>
-              <a:t>Data retrieved 2pm, Tue 6 Oct 2026 · Generated 8 Oct 2026, 9:35am · Sample data · Made with Python (python-pptx)</a:t>
+              <a:t>Data retrieved 2pm, Tue 6 Oct 2026 · Generated 10 Oct 2026, 9:55pm · Sample data · Made with Python (python-pptx)</a:t>
             </a:r>
           </a:p>
         </p:txBody>
@@ -7707,7 +7778,7 @@
                 </a:solidFill>
                 <a:latin typeface="Roboto"/>
               </a:rPr>
-              <a:t>Slide 5 of 6</a:t>
+              <a:t>Slide 5 of 7</a:t>
             </a:r>
           </a:p>
         </p:txBody>
@@ -7721,6 +7792,762 @@
 </file>
 
 <file path=ppt/slides/slide6.xml><?xml version="1.0" encoding="utf-8"?>
+<p:sld xmlns:a="http://schemas.openxmlformats.org/drawingml/2006/main" xmlns:p="http://schemas.openxmlformats.org/presentationml/2006/main" xmlns:r="http://schemas.openxmlformats.org/officeDocument/2006/relationships">
+  <p:cSld>
+    <p:spTree>
+      <p:nvGrpSpPr>
+        <p:cNvPr id="1" name=""/>
+        <p:cNvGrpSpPr/>
+        <p:nvPr/>
+      </p:nvGrpSpPr>
+      <p:grpSpPr/>
+      <p:sp>
+        <p:nvSpPr>
+          <p:cNvPr id="2" name="Title 1"/>
+          <p:cNvSpPr>
+            <a:spLocks noGrp="1"/>
+          </p:cNvSpPr>
+          <p:nvPr>
+            <p:ph type="title"/>
+          </p:nvPr>
+        </p:nvSpPr>
+        <p:spPr>
+          <a:xfrm>
+            <a:off x="457200" y="384048"/>
+            <a:ext cx="11277295" cy="475488"/>
+          </a:xfrm>
+        </p:spPr>
+        <p:txBody>
+          <a:bodyPr wrap="square" lIns="45720" rIns="45720" tIns="0" bIns="0" anchor="t"/>
+          <a:lstStyle/>
+          <a:p>
+            <a:pPr algn="l">
+              <a:defRPr>
+                <a:latin typeface="Roboto"/>
+              </a:defRPr>
+            </a:pPr>
+            <a:r>
+              <a:rPr sz="2400" b="1">
+                <a:solidFill>
+                  <a:srgbClr val="25342A"/>
+                </a:solidFill>
+                <a:latin typeface="Roboto"/>
+              </a:rPr>
+              <a:t>Which funding is worth chasing?</a:t>
+            </a:r>
+          </a:p>
+        </p:txBody>
+      </p:sp>
+      <p:sp>
+        <p:nvSpPr>
+          <p:cNvPr id="3" name="Rectangle 2"/>
+          <p:cNvSpPr/>
+          <p:nvPr/>
+        </p:nvSpPr>
+        <p:spPr>
+          <a:xfrm>
+            <a:off x="0" y="0"/>
+            <a:ext cx="12191695" cy="73152"/>
+          </a:xfrm>
+          <a:prstGeom prst="rect">
+            <a:avLst/>
+          </a:prstGeom>
+          <a:solidFill>
+            <a:srgbClr val="2F7A5D"/>
+          </a:solidFill>
+          <a:ln>
+            <a:noFill/>
+          </a:ln>
+        </p:spPr>
+        <p:style>
+          <a:lnRef idx="1">
+            <a:schemeClr val="accent1"/>
+          </a:lnRef>
+          <a:fillRef idx="3">
+            <a:schemeClr val="accent1"/>
+          </a:fillRef>
+          <a:effectRef idx="2">
+            <a:schemeClr val="accent1"/>
+          </a:effectRef>
+          <a:fontRef idx="minor">
+            <a:schemeClr val="lt1"/>
+          </a:fontRef>
+        </p:style>
+        <p:txBody>
+          <a:bodyPr rtlCol="0" anchor="ctr"/>
+          <a:lstStyle/>
+          <a:p>
+            <a:pPr algn="ctr">
+              <a:defRPr>
+                <a:latin typeface="Roboto"/>
+              </a:defRPr>
+            </a:pPr>
+          </a:p>
+        </p:txBody>
+      </p:sp>
+      <p:sp>
+        <p:nvSpPr>
+          <p:cNvPr id="4" name="TextBox 3"/>
+          <p:cNvSpPr txBox="1"/>
+          <p:nvPr/>
+        </p:nvSpPr>
+        <p:spPr>
+          <a:xfrm>
+            <a:off x="457200" y="146304"/>
+            <a:ext cx="8229600" cy="256032"/>
+          </a:xfrm>
+          <a:prstGeom prst="rect">
+            <a:avLst/>
+          </a:prstGeom>
+          <a:noFill/>
+        </p:spPr>
+        <p:txBody>
+          <a:bodyPr wrap="square" lIns="45720" rIns="45720">
+            <a:spAutoFit/>
+          </a:bodyPr>
+          <a:lstStyle/>
+          <a:p>
+            <a:pPr>
+              <a:defRPr>
+                <a:latin typeface="Roboto"/>
+              </a:defRPr>
+            </a:pPr>
+            <a:r>
+              <a:rPr sz="1000" b="0">
+                <a:solidFill>
+                  <a:srgbClr val="5F6F63"/>
+                </a:solidFill>
+                <a:latin typeface="Roboto"/>
+              </a:rPr>
+              <a:t>Sample Community Services Ltd · Which funding is worth chasing?</a:t>
+            </a:r>
+          </a:p>
+        </p:txBody>
+      </p:sp>
+      <p:sp>
+        <p:nvSpPr>
+          <p:cNvPr id="5" name="Rectangle 4"/>
+          <p:cNvSpPr/>
+          <p:nvPr/>
+        </p:nvSpPr>
+        <p:spPr>
+          <a:xfrm>
+            <a:off x="457200" y="1188720"/>
+            <a:ext cx="3606698" cy="1737360"/>
+          </a:xfrm>
+          <a:prstGeom prst="rect">
+            <a:avLst/>
+          </a:prstGeom>
+          <a:solidFill>
+            <a:srgbClr val="F7FAF7"/>
+          </a:solidFill>
+          <a:ln>
+            <a:solidFill>
+              <a:srgbClr val="DCE8DC"/>
+            </a:solidFill>
+          </a:ln>
+        </p:spPr>
+        <p:style>
+          <a:lnRef idx="1">
+            <a:schemeClr val="accent1"/>
+          </a:lnRef>
+          <a:fillRef idx="3">
+            <a:schemeClr val="accent1"/>
+          </a:fillRef>
+          <a:effectRef idx="2">
+            <a:schemeClr val="accent1"/>
+          </a:effectRef>
+          <a:fontRef idx="minor">
+            <a:schemeClr val="lt1"/>
+          </a:fontRef>
+        </p:style>
+        <p:txBody>
+          <a:bodyPr rtlCol="0" anchor="ctr"/>
+          <a:lstStyle/>
+          <a:p>
+            <a:pPr algn="ctr">
+              <a:defRPr>
+                <a:latin typeface="Roboto"/>
+              </a:defRPr>
+            </a:pPr>
+          </a:p>
+        </p:txBody>
+      </p:sp>
+      <p:sp>
+        <p:nvSpPr>
+          <p:cNvPr id="6" name="TextBox 5"/>
+          <p:cNvSpPr txBox="1"/>
+          <p:nvPr/>
+        </p:nvSpPr>
+        <p:spPr>
+          <a:xfrm>
+            <a:off x="594360" y="1261872"/>
+            <a:ext cx="3332378" cy="384048"/>
+          </a:xfrm>
+          <a:prstGeom prst="rect">
+            <a:avLst/>
+          </a:prstGeom>
+          <a:noFill/>
+        </p:spPr>
+        <p:txBody>
+          <a:bodyPr wrap="square" lIns="45720" rIns="45720">
+            <a:spAutoFit/>
+          </a:bodyPr>
+          <a:lstStyle/>
+          <a:p>
+            <a:pPr>
+              <a:defRPr>
+                <a:latin typeface="Roboto"/>
+              </a:defRPr>
+            </a:pPr>
+            <a:r>
+              <a:rPr sz="1100" b="0">
+                <a:solidFill>
+                  <a:srgbClr val="5F6F63"/>
+                </a:solidFill>
+                <a:latin typeface="Roboto"/>
+              </a:rPr>
+              <a:t>Cheapest to raise: Grants</a:t>
+            </a:r>
+          </a:p>
+        </p:txBody>
+      </p:sp>
+      <p:sp>
+        <p:nvSpPr>
+          <p:cNvPr id="7" name="TextBox 6"/>
+          <p:cNvSpPr txBox="1"/>
+          <p:nvPr/>
+        </p:nvSpPr>
+        <p:spPr>
+          <a:xfrm>
+            <a:off x="594360" y="1627632"/>
+            <a:ext cx="3332378" cy="502920"/>
+          </a:xfrm>
+          <a:prstGeom prst="rect">
+            <a:avLst/>
+          </a:prstGeom>
+          <a:noFill/>
+        </p:spPr>
+        <p:txBody>
+          <a:bodyPr wrap="square" lIns="45720" rIns="45720">
+            <a:spAutoFit/>
+          </a:bodyPr>
+          <a:lstStyle/>
+          <a:p>
+            <a:pPr>
+              <a:defRPr>
+                <a:latin typeface="Roboto"/>
+              </a:defRPr>
+            </a:pPr>
+            <a:r>
+              <a:rPr sz="2600" b="1">
+                <a:solidFill>
+                  <a:srgbClr val="2F7A5D"/>
+                </a:solidFill>
+                <a:latin typeface="Roboto"/>
+              </a:rPr>
+              <a:t>9¢</a:t>
+            </a:r>
+          </a:p>
+        </p:txBody>
+      </p:sp>
+      <p:sp>
+        <p:nvSpPr>
+          <p:cNvPr id="8" name="TextBox 7"/>
+          <p:cNvSpPr txBox="1"/>
+          <p:nvPr/>
+        </p:nvSpPr>
+        <p:spPr>
+          <a:xfrm>
+            <a:off x="594360" y="2542032"/>
+            <a:ext cx="3332378" cy="329184"/>
+          </a:xfrm>
+          <a:prstGeom prst="rect">
+            <a:avLst/>
+          </a:prstGeom>
+          <a:noFill/>
+        </p:spPr>
+        <p:txBody>
+          <a:bodyPr wrap="square" lIns="45720" rIns="45720">
+            <a:spAutoFit/>
+          </a:bodyPr>
+          <a:lstStyle/>
+          <a:p>
+            <a:pPr>
+              <a:defRPr>
+                <a:latin typeface="Roboto"/>
+              </a:defRPr>
+            </a:pPr>
+            <a:r>
+              <a:rPr sz="1000" b="0">
+                <a:solidFill>
+                  <a:srgbClr val="5F6F63"/>
+                </a:solidFill>
+                <a:latin typeface="Roboto"/>
+              </a:rPr>
+              <a:t>per $1 raised in September</a:t>
+            </a:r>
+          </a:p>
+        </p:txBody>
+      </p:sp>
+      <p:sp>
+        <p:nvSpPr>
+          <p:cNvPr id="9" name="Rectangle 8"/>
+          <p:cNvSpPr/>
+          <p:nvPr/>
+        </p:nvSpPr>
+        <p:spPr>
+          <a:xfrm>
+            <a:off x="4292498" y="1188720"/>
+            <a:ext cx="3606698" cy="1737360"/>
+          </a:xfrm>
+          <a:prstGeom prst="rect">
+            <a:avLst/>
+          </a:prstGeom>
+          <a:solidFill>
+            <a:srgbClr val="F7FAF7"/>
+          </a:solidFill>
+          <a:ln>
+            <a:solidFill>
+              <a:srgbClr val="DCE8DC"/>
+            </a:solidFill>
+          </a:ln>
+        </p:spPr>
+        <p:style>
+          <a:lnRef idx="1">
+            <a:schemeClr val="accent1"/>
+          </a:lnRef>
+          <a:fillRef idx="3">
+            <a:schemeClr val="accent1"/>
+          </a:fillRef>
+          <a:effectRef idx="2">
+            <a:schemeClr val="accent1"/>
+          </a:effectRef>
+          <a:fontRef idx="minor">
+            <a:schemeClr val="lt1"/>
+          </a:fontRef>
+        </p:style>
+        <p:txBody>
+          <a:bodyPr rtlCol="0" anchor="ctr"/>
+          <a:lstStyle/>
+          <a:p>
+            <a:pPr algn="ctr">
+              <a:defRPr>
+                <a:latin typeface="Roboto"/>
+              </a:defRPr>
+            </a:pPr>
+          </a:p>
+        </p:txBody>
+      </p:sp>
+      <p:sp>
+        <p:nvSpPr>
+          <p:cNvPr id="10" name="TextBox 9"/>
+          <p:cNvSpPr txBox="1"/>
+          <p:nvPr/>
+        </p:nvSpPr>
+        <p:spPr>
+          <a:xfrm>
+            <a:off x="4429658" y="1261872"/>
+            <a:ext cx="3332378" cy="384048"/>
+          </a:xfrm>
+          <a:prstGeom prst="rect">
+            <a:avLst/>
+          </a:prstGeom>
+          <a:noFill/>
+        </p:spPr>
+        <p:txBody>
+          <a:bodyPr wrap="square" lIns="45720" rIns="45720">
+            <a:spAutoFit/>
+          </a:bodyPr>
+          <a:lstStyle/>
+          <a:p>
+            <a:pPr>
+              <a:defRPr>
+                <a:latin typeface="Roboto"/>
+              </a:defRPr>
+            </a:pPr>
+            <a:r>
+              <a:rPr sz="1100" b="0">
+                <a:solidFill>
+                  <a:srgbClr val="5F6F63"/>
+                </a:solidFill>
+                <a:latin typeface="Roboto"/>
+              </a:rPr>
+              <a:t>Dearest to raise: Fundraising events</a:t>
+            </a:r>
+          </a:p>
+        </p:txBody>
+      </p:sp>
+      <p:sp>
+        <p:nvSpPr>
+          <p:cNvPr id="11" name="TextBox 10"/>
+          <p:cNvSpPr txBox="1"/>
+          <p:nvPr/>
+        </p:nvSpPr>
+        <p:spPr>
+          <a:xfrm>
+            <a:off x="4429658" y="1627632"/>
+            <a:ext cx="3332378" cy="502920"/>
+          </a:xfrm>
+          <a:prstGeom prst="rect">
+            <a:avLst/>
+          </a:prstGeom>
+          <a:noFill/>
+        </p:spPr>
+        <p:txBody>
+          <a:bodyPr wrap="square" lIns="45720" rIns="45720">
+            <a:spAutoFit/>
+          </a:bodyPr>
+          <a:lstStyle/>
+          <a:p>
+            <a:pPr>
+              <a:defRPr>
+                <a:latin typeface="Roboto"/>
+              </a:defRPr>
+            </a:pPr>
+            <a:r>
+              <a:rPr sz="2600" b="1">
+                <a:solidFill>
+                  <a:srgbClr val="2F7A5D"/>
+                </a:solidFill>
+                <a:latin typeface="Roboto"/>
+              </a:rPr>
+              <a:t>41¢</a:t>
+            </a:r>
+          </a:p>
+        </p:txBody>
+      </p:sp>
+      <p:sp>
+        <p:nvSpPr>
+          <p:cNvPr id="12" name="TextBox 11"/>
+          <p:cNvSpPr txBox="1"/>
+          <p:nvPr/>
+        </p:nvSpPr>
+        <p:spPr>
+          <a:xfrm>
+            <a:off x="4429658" y="2542032"/>
+            <a:ext cx="3332378" cy="329184"/>
+          </a:xfrm>
+          <a:prstGeom prst="rect">
+            <a:avLst/>
+          </a:prstGeom>
+          <a:noFill/>
+        </p:spPr>
+        <p:txBody>
+          <a:bodyPr wrap="square" lIns="45720" rIns="45720">
+            <a:spAutoFit/>
+          </a:bodyPr>
+          <a:lstStyle/>
+          <a:p>
+            <a:pPr>
+              <a:defRPr>
+                <a:latin typeface="Roboto"/>
+              </a:defRPr>
+            </a:pPr>
+            <a:r>
+              <a:rPr sz="1000" b="0">
+                <a:solidFill>
+                  <a:srgbClr val="5F6F63"/>
+                </a:solidFill>
+                <a:latin typeface="Roboto"/>
+              </a:rPr>
+              <a:t>per $1 raised in September</a:t>
+            </a:r>
+          </a:p>
+        </p:txBody>
+      </p:sp>
+      <p:sp>
+        <p:nvSpPr>
+          <p:cNvPr id="13" name="Rectangle 12"/>
+          <p:cNvSpPr/>
+          <p:nvPr/>
+        </p:nvSpPr>
+        <p:spPr>
+          <a:xfrm>
+            <a:off x="8127796" y="1188720"/>
+            <a:ext cx="3606698" cy="1737360"/>
+          </a:xfrm>
+          <a:prstGeom prst="rect">
+            <a:avLst/>
+          </a:prstGeom>
+          <a:solidFill>
+            <a:srgbClr val="F7FAF7"/>
+          </a:solidFill>
+          <a:ln>
+            <a:solidFill>
+              <a:srgbClr val="DCE8DC"/>
+            </a:solidFill>
+          </a:ln>
+        </p:spPr>
+        <p:style>
+          <a:lnRef idx="1">
+            <a:schemeClr val="accent1"/>
+          </a:lnRef>
+          <a:fillRef idx="3">
+            <a:schemeClr val="accent1"/>
+          </a:fillRef>
+          <a:effectRef idx="2">
+            <a:schemeClr val="accent1"/>
+          </a:effectRef>
+          <a:fontRef idx="minor">
+            <a:schemeClr val="lt1"/>
+          </a:fontRef>
+        </p:style>
+        <p:txBody>
+          <a:bodyPr rtlCol="0" anchor="ctr"/>
+          <a:lstStyle/>
+          <a:p>
+            <a:pPr algn="ctr">
+              <a:defRPr>
+                <a:latin typeface="Roboto"/>
+              </a:defRPr>
+            </a:pPr>
+          </a:p>
+        </p:txBody>
+      </p:sp>
+      <p:sp>
+        <p:nvSpPr>
+          <p:cNvPr id="14" name="TextBox 13"/>
+          <p:cNvSpPr txBox="1"/>
+          <p:nvPr/>
+        </p:nvSpPr>
+        <p:spPr>
+          <a:xfrm>
+            <a:off x="8264956" y="1261872"/>
+            <a:ext cx="3332378" cy="384048"/>
+          </a:xfrm>
+          <a:prstGeom prst="rect">
+            <a:avLst/>
+          </a:prstGeom>
+          <a:noFill/>
+        </p:spPr>
+        <p:txBody>
+          <a:bodyPr wrap="square" lIns="45720" rIns="45720">
+            <a:spAutoFit/>
+          </a:bodyPr>
+          <a:lstStyle/>
+          <a:p>
+            <a:pPr>
+              <a:defRPr>
+                <a:latin typeface="Roboto"/>
+              </a:defRPr>
+            </a:pPr>
+            <a:r>
+              <a:rPr sz="1100" b="0">
+                <a:solidFill>
+                  <a:srgbClr val="5F6F63"/>
+                </a:solidFill>
+                <a:latin typeface="Roboto"/>
+              </a:rPr>
+              <a:t>Raised, year to date</a:t>
+            </a:r>
+          </a:p>
+        </p:txBody>
+      </p:sp>
+      <p:sp>
+        <p:nvSpPr>
+          <p:cNvPr id="15" name="TextBox 14"/>
+          <p:cNvSpPr txBox="1"/>
+          <p:nvPr/>
+        </p:nvSpPr>
+        <p:spPr>
+          <a:xfrm>
+            <a:off x="8264956" y="1627632"/>
+            <a:ext cx="3332378" cy="502920"/>
+          </a:xfrm>
+          <a:prstGeom prst="rect">
+            <a:avLst/>
+          </a:prstGeom>
+          <a:noFill/>
+        </p:spPr>
+        <p:txBody>
+          <a:bodyPr wrap="square" lIns="45720" rIns="45720">
+            <a:spAutoFit/>
+          </a:bodyPr>
+          <a:lstStyle/>
+          <a:p>
+            <a:pPr>
+              <a:defRPr>
+                <a:latin typeface="Roboto"/>
+              </a:defRPr>
+            </a:pPr>
+            <a:r>
+              <a:rPr sz="2600" b="1">
+                <a:solidFill>
+                  <a:srgbClr val="2F7A5D"/>
+                </a:solidFill>
+                <a:latin typeface="Roboto"/>
+              </a:rPr>
+              <a:t>$325,518</a:t>
+            </a:r>
+          </a:p>
+        </p:txBody>
+      </p:sp>
+      <p:sp>
+        <p:nvSpPr>
+          <p:cNvPr id="16" name="TextBox 15"/>
+          <p:cNvSpPr txBox="1"/>
+          <p:nvPr/>
+        </p:nvSpPr>
+        <p:spPr>
+          <a:xfrm>
+            <a:off x="8264956" y="2542032"/>
+            <a:ext cx="3332378" cy="329184"/>
+          </a:xfrm>
+          <a:prstGeom prst="rect">
+            <a:avLst/>
+          </a:prstGeom>
+          <a:noFill/>
+        </p:spPr>
+        <p:txBody>
+          <a:bodyPr wrap="square" lIns="45720" rIns="45720">
+            <a:spAutoFit/>
+          </a:bodyPr>
+          <a:lstStyle/>
+          <a:p>
+            <a:pPr>
+              <a:defRPr>
+                <a:latin typeface="Roboto"/>
+              </a:defRPr>
+            </a:pPr>
+            <a:r>
+              <a:rPr sz="1000" b="0">
+                <a:solidFill>
+                  <a:srgbClr val="5F6F63"/>
+                </a:solidFill>
+                <a:latin typeface="Roboto"/>
+              </a:rPr>
+              <a:t>Jul to Sep 2026</a:t>
+            </a:r>
+          </a:p>
+        </p:txBody>
+      </p:sp>
+      <p:sp>
+        <p:nvSpPr>
+          <p:cNvPr id="17" name="TextBox 16"/>
+          <p:cNvSpPr txBox="1"/>
+          <p:nvPr/>
+        </p:nvSpPr>
+        <p:spPr>
+          <a:xfrm>
+            <a:off x="457200" y="6492240"/>
+            <a:ext cx="2926080" cy="274320"/>
+          </a:xfrm>
+          <a:prstGeom prst="rect">
+            <a:avLst/>
+          </a:prstGeom>
+          <a:noFill/>
+        </p:spPr>
+        <p:txBody>
+          <a:bodyPr wrap="square" lIns="45720" rIns="45720">
+            <a:spAutoFit/>
+          </a:bodyPr>
+          <a:lstStyle/>
+          <a:p>
+            <a:pPr>
+              <a:defRPr>
+                <a:latin typeface="Roboto"/>
+              </a:defRPr>
+            </a:pPr>
+            <a:r>
+              <a:rPr sz="900" b="0">
+                <a:solidFill>
+                  <a:srgbClr val="5F6F63"/>
+                </a:solidFill>
+                <a:latin typeface="Roboto"/>
+              </a:rPr>
+              <a:t>funding.pptx</a:t>
+            </a:r>
+          </a:p>
+        </p:txBody>
+      </p:sp>
+      <p:sp>
+        <p:nvSpPr>
+          <p:cNvPr id="18" name="TextBox 17"/>
+          <p:cNvSpPr txBox="1"/>
+          <p:nvPr/>
+        </p:nvSpPr>
+        <p:spPr>
+          <a:xfrm>
+            <a:off x="3108960" y="6492240"/>
+            <a:ext cx="5943600" cy="274320"/>
+          </a:xfrm>
+          <a:prstGeom prst="rect">
+            <a:avLst/>
+          </a:prstGeom>
+          <a:noFill/>
+        </p:spPr>
+        <p:txBody>
+          <a:bodyPr wrap="square" lIns="45720" rIns="45720">
+            <a:spAutoFit/>
+          </a:bodyPr>
+          <a:lstStyle/>
+          <a:p>
+            <a:pPr algn="ctr">
+              <a:defRPr>
+                <a:latin typeface="Roboto"/>
+              </a:defRPr>
+            </a:pPr>
+            <a:r>
+              <a:rPr sz="900" b="0">
+                <a:solidFill>
+                  <a:srgbClr val="5F6F63"/>
+                </a:solidFill>
+                <a:latin typeface="Roboto"/>
+              </a:rPr>
+              <a:t>Data retrieved 2pm, Tue 6 Oct 2026 · Generated 10 Oct 2026, 9:55pm · Sample data · Made with Python (python-pptx)</a:t>
+            </a:r>
+          </a:p>
+        </p:txBody>
+      </p:sp>
+      <p:sp>
+        <p:nvSpPr>
+          <p:cNvPr id="19" name="TextBox 18"/>
+          <p:cNvSpPr txBox="1"/>
+          <p:nvPr/>
+        </p:nvSpPr>
+        <p:spPr>
+          <a:xfrm>
+            <a:off x="8503920" y="6492240"/>
+            <a:ext cx="3200400" cy="274320"/>
+          </a:xfrm>
+          <a:prstGeom prst="rect">
+            <a:avLst/>
+          </a:prstGeom>
+          <a:noFill/>
+        </p:spPr>
+        <p:txBody>
+          <a:bodyPr wrap="square" lIns="45720" rIns="45720">
+            <a:spAutoFit/>
+          </a:bodyPr>
+          <a:lstStyle/>
+          <a:p>
+            <a:pPr algn="r">
+              <a:defRPr>
+                <a:latin typeface="Roboto"/>
+              </a:defRPr>
+            </a:pPr>
+            <a:r>
+              <a:rPr sz="900" b="0">
+                <a:solidFill>
+                  <a:srgbClr val="5F6F63"/>
+                </a:solidFill>
+                <a:latin typeface="Roboto"/>
+              </a:rPr>
+              <a:t>Slide 6 of 7</a:t>
+            </a:r>
+          </a:p>
+        </p:txBody>
+      </p:sp>
+    </p:spTree>
+  </p:cSld>
+  <p:clrMapOvr>
+    <a:masterClrMapping/>
+  </p:clrMapOvr>
+</p:sld>
+</file>
+
+<file path=ppt/slides/slide7.xml><?xml version="1.0" encoding="utf-8"?>
 <p:sld xmlns:a="http://schemas.openxmlformats.org/drawingml/2006/main" xmlns:p="http://schemas.openxmlformats.org/presentationml/2006/main" xmlns:r="http://schemas.openxmlformats.org/officeDocument/2006/relationships">
   <p:cSld>
     <p:spTree>
@@ -8494,7 +9321,7 @@
                 </a:solidFill>
                 <a:latin typeface="Roboto"/>
               </a:rPr>
-              <a:t>Data retrieved 2pm, Tue 6 Oct 2026 · Generated 8 Oct 2026, 9:35am · Sample data · Made with Python (python-pptx)</a:t>
+              <a:t>Data retrieved 2pm, Tue 6 Oct 2026 · Generated 10 Oct 2026, 9:55pm · Sample data · Made with Python (python-pptx)</a:t>
             </a:r>
           </a:p>
         </p:txBody>
@@ -8533,7 +9360,7 @@
                 </a:solidFill>
                 <a:latin typeface="Roboto"/>
               </a:rPr>
-              <a:t>Slide 6 of 6</a:t>
+              <a:t>Slide 7 of 7</a:t>
             </a:r>
           </a:p>
         </p:txBody>
